--- a/slides/task4_rag_tender.pptx
+++ b/slides/task4_rag_tender.pptx
@@ -4,6 +4,9 @@
   <p:sldMasterIdLst>
     <p:sldMasterId id="2147483648" r:id="rId1"/>
   </p:sldMasterIdLst>
+  <p:notesMasterIdLst>
+    <p:notesMasterId r:id="rId15"/>
+  </p:notesMasterIdLst>
   <p:sldIdLst>
     <p:sldId id="256" r:id="rId2"/>
     <p:sldId id="257" r:id="rId3"/>
@@ -19,10 +22,7 @@
     <p:sldId id="267" r:id="rId13"/>
     <p:sldId id="268" r:id="rId14"/>
   </p:sldIdLst>
-  <p:notesMasterIdLst>
-    <p:notesMasterId r:id="rId15"/>
-  </p:notesMasterIdLst>
-  <p:sldSz cx="9144000" cy="5143500"/>
+  <p:sldSz cx="9144000" cy="5143500" type="screen16x9"/>
   <p:notesSz cx="5143500" cy="9144000"/>
   <p:defaultTextStyle>
     <a:lvl1pPr marL="0" algn="l" defTabSz="914400" rtl="0" eaLnBrk="1" latinLnBrk="0" hangingPunct="1">
@@ -116,7 +116,41 @@
       </a:defRPr>
     </a:lvl9pPr>
   </p:defaultTextStyle>
+  <p:extLst>
+    <p:ext uri="{EFAFB233-063F-42B5-8137-9DF3F51BA10A}">
+      <p15:sldGuideLst xmlns:p15="http://schemas.microsoft.com/office/powerpoint/2012/main"/>
+    </p:ext>
+  </p:extLst>
 </p:presentation>
+</file>
+
+<file path=ppt/changesInfos/changesInfo1.xml><?xml version="1.0" encoding="utf-8"?>
+<pc:chgInfo xmlns:a="http://schemas.openxmlformats.org/drawingml/2006/main" xmlns:r="http://schemas.openxmlformats.org/officeDocument/2006/relationships" xmlns:ac="http://schemas.microsoft.com/office/drawing/2013/main/command" xmlns:pc="http://schemas.microsoft.com/office/powerpoint/2013/main/command">
+  <pc:docChgLst>
+    <pc:chgData name="RAVURI SOMASEKHAR" userId="4c38ed612dd12dde" providerId="LiveId" clId="{22CC3E0A-2C78-41A0-810B-B81AD08A3B8F}"/>
+    <pc:docChg chg="modSld">
+      <pc:chgData name="RAVURI SOMASEKHAR" userId="4c38ed612dd12dde" providerId="LiveId" clId="{22CC3E0A-2C78-41A0-810B-B81AD08A3B8F}" dt="2026-05-03T10:57:00.306" v="0" actId="1076"/>
+      <pc:docMkLst>
+        <pc:docMk/>
+      </pc:docMkLst>
+      <pc:sldChg chg="modSp mod">
+        <pc:chgData name="RAVURI SOMASEKHAR" userId="4c38ed612dd12dde" providerId="LiveId" clId="{22CC3E0A-2C78-41A0-810B-B81AD08A3B8F}" dt="2026-05-03T10:57:00.306" v="0" actId="1076"/>
+        <pc:sldMkLst>
+          <pc:docMk/>
+          <pc:sldMk cId="0" sldId="256"/>
+        </pc:sldMkLst>
+        <pc:spChg chg="mod">
+          <ac:chgData name="RAVURI SOMASEKHAR" userId="4c38ed612dd12dde" providerId="LiveId" clId="{22CC3E0A-2C78-41A0-810B-B81AD08A3B8F}" dt="2026-05-03T10:57:00.306" v="0" actId="1076"/>
+          <ac:spMkLst>
+            <pc:docMk/>
+            <pc:sldMk cId="0" sldId="256"/>
+            <ac:spMk id="5" creationId="{00000000-0000-0000-0000-000000000000}"/>
+          </ac:spMkLst>
+        </pc:spChg>
+      </pc:sldChg>
+    </pc:docChg>
+  </pc:docChgLst>
+</pc:chgInfo>
 </file>
 
 <file path=ppt/notesMasters/notesMaster1.xml><?xml version="1.0" encoding="utf-8"?>
@@ -141,234 +175,10 @@
           <a:chExt cx="0" cy="0"/>
         </a:xfrm>
       </p:grpSpPr>
-      <p:sp>
-        <p:nvSpPr>
-          <p:cNvPr id="2" name="Header Placeholder 1"/>
-          <p:cNvSpPr>
-            <a:spLocks noGrp="1"/>
-          </p:cNvSpPr>
-          <p:nvPr>
-            <p:ph type="hdr" sz="quarter"/>
-          </p:nvPr>
-        </p:nvSpPr>
-        <p:spPr>
-          <a:xfrm>
-            <a:off x="0" y="0"/>
-            <a:ext cx="2971800" cy="458788"/>
-          </a:xfrm>
-          <a:prstGeom prst="rect">
-            <a:avLst/>
-          </a:prstGeom>
-        </p:spPr>
-        <p:txBody>
-          <a:bodyPr vert="horz" lIns="91440" tIns="45720" rIns="91440" bIns="45720" rtlCol="0"/>
-          <a:lstStyle>
-            <a:lvl1pPr algn="l">
-              <a:defRPr sz="1200"/>
-            </a:lvl1pPr>
-          </a:lstStyle>
-          <a:p>
-            <a:endParaRPr lang="en-US"/>
-          </a:p>
-        </p:txBody>
-      </p:sp>
-      <p:sp>
-        <p:nvSpPr>
-          <p:cNvPr id="3" name="Date Placeholder 2"/>
-          <p:cNvSpPr>
-            <a:spLocks noGrp="1"/>
-          </p:cNvSpPr>
-          <p:nvPr>
-            <p:ph type="dt" idx="1"/>
-          </p:nvPr>
-        </p:nvSpPr>
-        <p:spPr>
-          <a:xfrm>
-            <a:off x="3884613" y="0"/>
-            <a:ext cx="2971800" cy="458788"/>
-          </a:xfrm>
-          <a:prstGeom prst="rect">
-            <a:avLst/>
-          </a:prstGeom>
-        </p:spPr>
-        <p:txBody>
-          <a:bodyPr vert="horz" lIns="91440" tIns="45720" rIns="91440" bIns="45720" rtlCol="0"/>
-          <a:lstStyle>
-            <a:lvl1pPr algn="r">
-              <a:defRPr sz="1200"/>
-            </a:lvl1pPr>
-          </a:lstStyle>
-          <a:p>
-            <a:fld id="{5282F153-3F37-0F45-9E97-73ACFA13230C}" type="datetimeFigureOut">
-              <a:rPr lang="en-US"/>
-              <a:t>7/23/19</a:t>
-            </a:fld>
-            <a:endParaRPr lang="en-US"/>
-          </a:p>
-        </p:txBody>
-      </p:sp>
-      <p:sp>
-        <p:nvSpPr>
-          <p:cNvPr id="4" name="Slide Image Placeholder 3"/>
-          <p:cNvSpPr>
-            <a:spLocks noGrp="1" noRot="1" noChangeAspect="1"/>
-          </p:cNvSpPr>
-          <p:nvPr>
-            <p:ph type="sldImg" idx="2"/>
-          </p:nvPr>
-        </p:nvSpPr>
-        <p:spPr>
-          <a:xfrm>
-            <a:off x="685800" y="1143000"/>
-            <a:ext cx="5486400" cy="3086100"/>
-          </a:xfrm>
-          <a:prstGeom prst="rect">
-            <a:avLst/>
-          </a:prstGeom>
-          <a:noFill/>
-          <a:ln w="12700">
-            <a:solidFill>
-              <a:prstClr val="black"/>
-            </a:solidFill>
-          </a:ln>
-        </p:spPr>
-        <p:txBody>
-          <a:bodyPr vert="horz" lIns="91440" tIns="45720" rIns="91440" bIns="45720" rtlCol="0" anchor="ctr"/>
-          <a:lstStyle/>
-          <a:p>
-            <a:endParaRPr lang="en-US"/>
-          </a:p>
-        </p:txBody>
-      </p:sp>
-      <p:sp>
-        <p:nvSpPr>
-          <p:cNvPr id="5" name="Notes Placeholder 4"/>
-          <p:cNvSpPr>
-            <a:spLocks noGrp="1"/>
-          </p:cNvSpPr>
-          <p:nvPr>
-            <p:ph type="body" sz="quarter" idx="3"/>
-          </p:nvPr>
-        </p:nvSpPr>
-        <p:spPr>
-          <a:xfrm>
-            <a:off x="685800" y="4400550"/>
-            <a:ext cx="5486400" cy="3600450"/>
-          </a:xfrm>
-          <a:prstGeom prst="rect">
-            <a:avLst/>
-          </a:prstGeom>
-        </p:spPr>
-        <p:txBody>
-          <a:bodyPr vert="horz" lIns="91440" tIns="45720" rIns="91440" bIns="45720" rtlCol="0"/>
-          <a:lstStyle/>
-          <a:p>
-            <a:pPr lvl="0"/>
-            <a:r>
-              <a:rPr lang="en-US"/>
-              <a:t>Click to edit Master text styles</a:t>
-            </a:r>
-          </a:p>
-          <a:p>
-            <a:pPr lvl="1"/>
-            <a:r>
-              <a:rPr lang="en-US"/>
-              <a:t>Second level</a:t>
-            </a:r>
-          </a:p>
-          <a:p>
-            <a:pPr lvl="2"/>
-            <a:r>
-              <a:rPr lang="en-US"/>
-              <a:t>Third level</a:t>
-            </a:r>
-          </a:p>
-          <a:p>
-            <a:pPr lvl="3"/>
-            <a:r>
-              <a:rPr lang="en-US"/>
-              <a:t>Fourth level</a:t>
-            </a:r>
-          </a:p>
-          <a:p>
-            <a:pPr lvl="4"/>
-            <a:r>
-              <a:rPr lang="en-US"/>
-              <a:t>Fifth level</a:t>
-            </a:r>
-          </a:p>
-        </p:txBody>
-      </p:sp>
-      <p:sp>
-        <p:nvSpPr>
-          <p:cNvPr id="6" name="Footer Placeholder 5"/>
-          <p:cNvSpPr>
-            <a:spLocks noGrp="1"/>
-          </p:cNvSpPr>
-          <p:nvPr>
-            <p:ph type="ftr" sz="quarter" idx="4"/>
-          </p:nvPr>
-        </p:nvSpPr>
-        <p:spPr>
-          <a:xfrm>
-            <a:off x="0" y="8685213"/>
-            <a:ext cx="2971800" cy="458787"/>
-          </a:xfrm>
-          <a:prstGeom prst="rect">
-            <a:avLst/>
-          </a:prstGeom>
-        </p:spPr>
-        <p:txBody>
-          <a:bodyPr vert="horz" lIns="91440" tIns="45720" rIns="91440" bIns="45720" rtlCol="0" anchor="b"/>
-          <a:lstStyle>
-            <a:lvl1pPr algn="l">
-              <a:defRPr sz="1200"/>
-            </a:lvl1pPr>
-          </a:lstStyle>
-          <a:p>
-            <a:endParaRPr lang="en-US"/>
-          </a:p>
-        </p:txBody>
-      </p:sp>
-      <p:sp>
-        <p:nvSpPr>
-          <p:cNvPr id="7" name="Slide Number Placeholder 6"/>
-          <p:cNvSpPr>
-            <a:spLocks noGrp="1"/>
-          </p:cNvSpPr>
-          <p:nvPr>
-            <p:ph type="sldNum" sz="quarter" idx="5"/>
-          </p:nvPr>
-        </p:nvSpPr>
-        <p:spPr>
-          <a:xfrm>
-            <a:off x="3884613" y="8685213"/>
-            <a:ext cx="2971800" cy="458787"/>
-          </a:xfrm>
-          <a:prstGeom prst="rect">
-            <a:avLst/>
-          </a:prstGeom>
-        </p:spPr>
-        <p:txBody>
-          <a:bodyPr vert="horz" lIns="91440" tIns="45720" rIns="91440" bIns="45720" rtlCol="0" anchor="b"/>
-          <a:lstStyle>
-            <a:lvl1pPr algn="r">
-              <a:defRPr sz="1200"/>
-            </a:lvl1pPr>
-          </a:lstStyle>
-          <a:p>
-            <a:fld id="{CE5E9CC1-C706-0F49-92D6-E571CC5EEA8F}" type="slidenum">
-              <a:rPr lang="en-US"/>
-              <a:t>‹#›</a:t>
-            </a:fld>
-            <a:endParaRPr lang="en-US"/>
-          </a:p>
-        </p:txBody>
-      </p:sp>
     </p:spTree>
     <p:extLst>
       <p:ext uri="{BB962C8B-B14F-4D97-AF65-F5344CB8AC3E}">
-        <p14:creationId xmlns:p14="http://schemas.microsoft.com/office/powerpoint/2010/main" val="1024086991"/>
+        <p14:creationId xmlns:p14="http://schemas.microsoft.com/office/powerpoint/2010/main" val="1018976559"/>
       </p:ext>
     </p:extLst>
   </p:cSld>
@@ -512,10 +322,6 @@
           <a:bodyPr/>
           <a:lstStyle/>
           <a:p>
-            <a:r>
-              <a:rPr lang="en-US" dirty="0"/>
-              <a:t/>
-            </a:r>
             <a:endParaRPr lang="en-US" dirty="0"/>
           </a:p>
         </p:txBody>
@@ -600,10 +406,6 @@
           <a:bodyPr/>
           <a:lstStyle/>
           <a:p>
-            <a:r>
-              <a:rPr lang="en-US" dirty="0"/>
-              <a:t/>
-            </a:r>
             <a:endParaRPr lang="en-US" dirty="0"/>
           </a:p>
         </p:txBody>
@@ -688,10 +490,6 @@
           <a:bodyPr/>
           <a:lstStyle/>
           <a:p>
-            <a:r>
-              <a:rPr lang="en-US" dirty="0"/>
-              <a:t/>
-            </a:r>
             <a:endParaRPr lang="en-US" dirty="0"/>
           </a:p>
         </p:txBody>
@@ -776,10 +574,6 @@
           <a:bodyPr/>
           <a:lstStyle/>
           <a:p>
-            <a:r>
-              <a:rPr lang="en-US" dirty="0"/>
-              <a:t/>
-            </a:r>
             <a:endParaRPr lang="en-US" dirty="0"/>
           </a:p>
         </p:txBody>
@@ -864,10 +658,6 @@
           <a:bodyPr/>
           <a:lstStyle/>
           <a:p>
-            <a:r>
-              <a:rPr lang="en-US" dirty="0"/>
-              <a:t/>
-            </a:r>
             <a:endParaRPr lang="en-US" dirty="0"/>
           </a:p>
         </p:txBody>
@@ -952,10 +742,6 @@
           <a:bodyPr/>
           <a:lstStyle/>
           <a:p>
-            <a:r>
-              <a:rPr lang="en-US" dirty="0"/>
-              <a:t/>
-            </a:r>
             <a:endParaRPr lang="en-US" dirty="0"/>
           </a:p>
         </p:txBody>
@@ -1040,10 +826,6 @@
           <a:bodyPr/>
           <a:lstStyle/>
           <a:p>
-            <a:r>
-              <a:rPr lang="en-US" dirty="0"/>
-              <a:t/>
-            </a:r>
             <a:endParaRPr lang="en-US" dirty="0"/>
           </a:p>
         </p:txBody>
@@ -1128,10 +910,6 @@
           <a:bodyPr/>
           <a:lstStyle/>
           <a:p>
-            <a:r>
-              <a:rPr lang="en-US" dirty="0"/>
-              <a:t/>
-            </a:r>
             <a:endParaRPr lang="en-US" dirty="0"/>
           </a:p>
         </p:txBody>
@@ -1216,10 +994,6 @@
           <a:bodyPr/>
           <a:lstStyle/>
           <a:p>
-            <a:r>
-              <a:rPr lang="en-US" dirty="0"/>
-              <a:t/>
-            </a:r>
             <a:endParaRPr lang="en-US" dirty="0"/>
           </a:p>
         </p:txBody>
@@ -1304,10 +1078,6 @@
           <a:bodyPr/>
           <a:lstStyle/>
           <a:p>
-            <a:r>
-              <a:rPr lang="en-US" dirty="0"/>
-              <a:t/>
-            </a:r>
             <a:endParaRPr lang="en-US" dirty="0"/>
           </a:p>
         </p:txBody>
@@ -1392,10 +1162,6 @@
           <a:bodyPr/>
           <a:lstStyle/>
           <a:p>
-            <a:r>
-              <a:rPr lang="en-US" dirty="0"/>
-              <a:t/>
-            </a:r>
             <a:endParaRPr lang="en-US" dirty="0"/>
           </a:p>
         </p:txBody>
@@ -1480,10 +1246,6 @@
           <a:bodyPr/>
           <a:lstStyle/>
           <a:p>
-            <a:r>
-              <a:rPr lang="en-US" dirty="0"/>
-              <a:t/>
-            </a:r>
             <a:endParaRPr lang="en-US" dirty="0"/>
           </a:p>
         </p:txBody>
@@ -1568,10 +1330,6 @@
           <a:bodyPr/>
           <a:lstStyle/>
           <a:p>
-            <a:r>
-              <a:rPr lang="en-US" dirty="0"/>
-              <a:t/>
-            </a:r>
             <a:endParaRPr lang="en-US" dirty="0"/>
           </a:p>
         </p:txBody>
@@ -1645,6 +1403,11 @@
 <file path=ppt/slideMasters/slideMaster1.xml><?xml version="1.0" encoding="utf-8"?>
 <p:sldMaster xmlns:a="http://schemas.openxmlformats.org/drawingml/2006/main" xmlns:r="http://schemas.openxmlformats.org/officeDocument/2006/relationships" xmlns:p="http://schemas.openxmlformats.org/presentationml/2006/main">
   <p:cSld>
+    <p:bg>
+      <p:bgRef idx="1001">
+        <a:schemeClr val="bg1"/>
+      </p:bgRef>
+    </p:bg>
     <p:spTree>
       <p:nvGrpSpPr>
         <p:cNvPr id="1" name=""/>
@@ -1927,6 +1690,7 @@
         <a:solidFill>
           <a:srgbClr val="0F172A"/>
         </a:solidFill>
+        <a:effectLst/>
       </p:bgPr>
     </p:bg>
     <p:spTree>
@@ -1964,11 +1728,11 @@
           <a:bodyPr wrap="square" lIns="0" tIns="0" rIns="0" bIns="0" rtlCol="0" anchor="ctr"/>
           <a:lstStyle/>
           <a:p>
-            <a:pPr indent="0" marL="0">
-              <a:buNone/>
-            </a:pPr>
-            <a:r>
-              <a:rPr lang="en-US" sz="1200" b="1" spc="400" kern="0" dirty="0">
+            <a:pPr marL="0" indent="0">
+              <a:buNone/>
+            </a:pPr>
+            <a:r>
+              <a:rPr lang="en-US" sz="1200" b="1" kern="0" spc="400" dirty="0">
                 <a:solidFill>
                   <a:srgbClr val="A5B4FC"/>
                 </a:solidFill>
@@ -2003,7 +1767,7 @@
           <a:bodyPr wrap="square" lIns="0" tIns="0" rIns="0" bIns="0" rtlCol="0" anchor="ctr"/>
           <a:lstStyle/>
           <a:p>
-            <a:pPr indent="0" marL="0">
+            <a:pPr marL="0" indent="0">
               <a:buNone/>
             </a:pPr>
             <a:r>
@@ -2042,7 +1806,7 @@
           <a:bodyPr wrap="square" lIns="0" tIns="0" rIns="0" bIns="0" rtlCol="0" anchor="ctr"/>
           <a:lstStyle/>
           <a:p>
-            <a:pPr indent="0" marL="0">
+            <a:pPr marL="0" indent="0">
               <a:buNone/>
             </a:pPr>
             <a:r>
@@ -2068,7 +1832,7 @@
         </p:nvSpPr>
         <p:spPr>
           <a:xfrm>
-            <a:off x="731520" y="2834640"/>
+            <a:off x="907366" y="2834640"/>
             <a:ext cx="6400800" cy="457200"/>
           </a:xfrm>
           <a:prstGeom prst="rect">
@@ -2081,7 +1845,7 @@
           <a:bodyPr wrap="square" lIns="0" tIns="0" rIns="0" bIns="0" rtlCol="0" anchor="ctr"/>
           <a:lstStyle/>
           <a:p>
-            <a:pPr indent="0" marL="0">
+            <a:pPr marL="0" indent="0">
               <a:buNone/>
             </a:pPr>
             <a:r>
@@ -2101,14 +1865,14 @@
       </p:sp>
       <p:pic>
         <p:nvPicPr>
-          <p:cNvPr id="6" name="Image 0" descr="preencoded.png">    </p:cNvPr>
+          <p:cNvPr id="6" name="Image 0" descr="preencoded.png"/>
           <p:cNvPicPr>
             <a:picLocks noChangeAspect="1"/>
           </p:cNvPicPr>
           <p:nvPr/>
         </p:nvPicPr>
         <p:blipFill>
-          <a:blip r:embed="rId1"/>
+          <a:blip r:embed="rId3"/>
           <a:stretch>
             <a:fillRect/>
           </a:stretch>
@@ -2164,7 +1928,7 @@
           <a:bodyPr wrap="square" lIns="0" tIns="0" rIns="0" bIns="0" rtlCol="0" anchor="ctr"/>
           <a:lstStyle/>
           <a:p>
-            <a:pPr indent="0" marL="0">
+            <a:pPr marL="0" indent="0">
               <a:buNone/>
             </a:pPr>
             <a:r>
@@ -2198,6 +1962,7 @@
         <a:solidFill>
           <a:srgbClr val="0F172A"/>
         </a:solidFill>
+        <a:effectLst/>
       </p:bgPr>
     </p:bg>
     <p:spTree>
@@ -2235,7 +2000,7 @@
           <a:bodyPr wrap="square" lIns="0" tIns="0" rIns="0" bIns="0" rtlCol="0" anchor="ctr"/>
           <a:lstStyle/>
           <a:p>
-            <a:pPr indent="0" marL="0">
+            <a:pPr marL="0" indent="0">
               <a:buNone/>
             </a:pPr>
             <a:r>
@@ -2272,7 +2037,7 @@
           </a:solidFill>
           <a:ln/>
           <a:effectLst>
-            <a:outerShdw sx="100000" sy="100000" kx="0" ky="0" algn="bl" rotWithShape="0" blurRad="76200" dist="25400" dir="8100000">
+            <a:outerShdw blurRad="76200" dist="25400" dir="8100000" algn="bl" rotWithShape="0">
               <a:srgbClr val="000000">
                 <a:alpha val="12000"/>
               </a:srgbClr>
@@ -2321,7 +2086,7 @@
           <a:bodyPr wrap="square" lIns="0" tIns="0" rIns="0" bIns="0" rtlCol="0" anchor="ctr"/>
           <a:lstStyle/>
           <a:p>
-            <a:pPr indent="0" marL="0">
+            <a:pPr marL="0" indent="0">
               <a:buNone/>
             </a:pPr>
             <a:r>
@@ -2380,7 +2145,7 @@
           <a:bodyPr wrap="square" lIns="0" tIns="0" rIns="0" bIns="0" rtlCol="0" anchor="ctr"/>
           <a:lstStyle/>
           <a:p>
-            <a:pPr indent="0" marL="0">
+            <a:pPr marL="0" indent="0">
               <a:buNone/>
             </a:pPr>
             <a:r>
@@ -2439,7 +2204,7 @@
           <a:bodyPr wrap="square" lIns="0" tIns="0" rIns="0" bIns="0" rtlCol="0" anchor="ctr"/>
           <a:lstStyle/>
           <a:p>
-            <a:pPr indent="0" marL="0">
+            <a:pPr marL="0" indent="0">
               <a:buNone/>
             </a:pPr>
             <a:r>
@@ -2498,7 +2263,7 @@
           <a:bodyPr wrap="square" lIns="0" tIns="0" rIns="0" bIns="0" rtlCol="0" anchor="ctr"/>
           <a:lstStyle/>
           <a:p>
-            <a:pPr indent="0" marL="0">
+            <a:pPr marL="0" indent="0">
               <a:buNone/>
             </a:pPr>
             <a:r>
@@ -2515,7 +2280,7 @@
             <a:endParaRPr lang="en-US" sz="1100" dirty="0"/>
           </a:p>
           <a:p>
-            <a:pPr indent="0" marL="0">
+            <a:pPr marL="0" indent="0">
               <a:buNone/>
             </a:pPr>
             <a:r>
@@ -2574,7 +2339,7 @@
           <a:bodyPr wrap="square" lIns="0" tIns="0" rIns="0" bIns="0" rtlCol="0" anchor="ctr"/>
           <a:lstStyle/>
           <a:p>
-            <a:pPr algn="ctr" indent="0" marL="0">
+            <a:pPr marL="0" indent="0" algn="ctr">
               <a:buNone/>
             </a:pPr>
             <a:r>
@@ -2638,7 +2403,7 @@
           <a:bodyPr wrap="square" lIns="0" tIns="0" rIns="0" bIns="0" rtlCol="0" anchor="ctr"/>
           <a:lstStyle/>
           <a:p>
-            <a:pPr indent="0" marL="0">
+            <a:pPr marL="0" indent="0">
               <a:buNone/>
             </a:pPr>
             <a:r>
@@ -2672,6 +2437,7 @@
         <a:solidFill>
           <a:srgbClr val="F8FAFC"/>
         </a:solidFill>
+        <a:effectLst/>
       </p:bgPr>
     </p:bg>
     <p:spTree>
@@ -2709,7 +2475,7 @@
           <a:bodyPr wrap="square" lIns="0" tIns="0" rIns="0" bIns="0" rtlCol="0" anchor="ctr"/>
           <a:lstStyle/>
           <a:p>
-            <a:pPr indent="0" marL="0">
+            <a:pPr marL="0" indent="0">
               <a:buNone/>
             </a:pPr>
             <a:r>
@@ -2748,7 +2514,7 @@
           <a:bodyPr wrap="square" lIns="0" tIns="0" rIns="0" bIns="0" rtlCol="0" anchor="ctr"/>
           <a:lstStyle/>
           <a:p>
-            <a:pPr indent="0" marL="0">
+            <a:pPr marL="0" indent="0">
               <a:buNone/>
             </a:pPr>
             <a:r>
@@ -2785,7 +2551,7 @@
           </a:solidFill>
           <a:ln/>
           <a:effectLst>
-            <a:outerShdw sx="100000" sy="100000" kx="0" ky="0" algn="bl" rotWithShape="0" blurRad="76200" dist="25400" dir="8100000">
+            <a:outerShdw blurRad="76200" dist="25400" dir="8100000" algn="bl" rotWithShape="0">
               <a:srgbClr val="000000">
                 <a:alpha val="12000"/>
               </a:srgbClr>
@@ -2815,500 +2581,7 @@
       </p:sp>
       <p:pic>
         <p:nvPicPr>
-          <p:cNvPr id="6" name="Image 0" descr="preencoded.png">    </p:cNvPr>
-          <p:cNvPicPr>
-            <a:picLocks noChangeAspect="1"/>
-          </p:cNvPicPr>
-          <p:nvPr/>
-        </p:nvPicPr>
-        <p:blipFill>
-          <a:blip r:embed="rId1"/>
-          <a:stretch>
-            <a:fillRect/>
-          </a:stretch>
-        </p:blipFill>
-        <p:spPr>
-          <a:xfrm>
-            <a:off x="1005840" y="1783080"/>
-            <a:ext cx="365760" cy="365760"/>
-          </a:xfrm>
-          <a:prstGeom prst="rect">
-            <a:avLst/>
-          </a:prstGeom>
-        </p:spPr>
-      </p:pic>
-      <p:sp>
-        <p:nvSpPr>
-          <p:cNvPr id="7" name="Text 4"/>
-          <p:cNvSpPr/>
-          <p:nvPr/>
-        </p:nvSpPr>
-        <p:spPr>
-          <a:xfrm>
-            <a:off x="1463040" y="1783080"/>
-            <a:ext cx="2560320" cy="365760"/>
-          </a:xfrm>
-          <a:prstGeom prst="rect">
-            <a:avLst/>
-          </a:prstGeom>
-          <a:noFill/>
-          <a:ln/>
-        </p:spPr>
-        <p:txBody>
-          <a:bodyPr wrap="square" lIns="0" tIns="0" rIns="0" bIns="0" rtlCol="0" anchor="ctr"/>
-          <a:lstStyle/>
-          <a:p>
-            <a:pPr indent="0" marL="0">
-              <a:buNone/>
-            </a:pPr>
-            <a:r>
-              <a:rPr lang="en-US" sz="1600" b="1" dirty="0">
-                <a:solidFill>
-                  <a:srgbClr val="EF4444"/>
-                </a:solidFill>
-                <a:latin typeface="Trebuchet MS" pitchFamily="34" charset="0"/>
-                <a:ea typeface="Trebuchet MS" pitchFamily="34" charset="-122"/>
-                <a:cs typeface="Trebuchet MS" pitchFamily="34" charset="-120"/>
-              </a:rPr>
-              <a:t>No Citation</a:t>
-            </a:r>
-            <a:endParaRPr lang="en-US" sz="1600" dirty="0"/>
-          </a:p>
-        </p:txBody>
-      </p:sp>
-      <p:sp>
-        <p:nvSpPr>
-          <p:cNvPr id="8" name="Text 5"/>
-          <p:cNvSpPr/>
-          <p:nvPr/>
-        </p:nvSpPr>
-        <p:spPr>
-          <a:xfrm>
-            <a:off x="1005840" y="2286000"/>
-            <a:ext cx="3108960" cy="457200"/>
-          </a:xfrm>
-          <a:prstGeom prst="rect">
-            <a:avLst/>
-          </a:prstGeom>
-          <a:noFill/>
-          <a:ln/>
-        </p:spPr>
-        <p:txBody>
-          <a:bodyPr wrap="square" lIns="0" tIns="0" rIns="0" bIns="0" rtlCol="0" anchor="ctr"/>
-          <a:lstStyle/>
-          <a:p>
-            <a:pPr indent="0" marL="0">
-              <a:buNone/>
-            </a:pPr>
-            <a:r>
-              <a:rPr lang="en-US" sz="1100" dirty="0">
-                <a:solidFill>
-                  <a:srgbClr val="64748B"/>
-                </a:solidFill>
-                <a:latin typeface="Courier New" pitchFamily="34" charset="0"/>
-                <a:ea typeface="Courier New" pitchFamily="34" charset="-122"/>
-                <a:cs typeface="Courier New" pitchFamily="34" charset="-120"/>
-              </a:rPr>
-              <a:t>"The LD clause is 0.5% per week,</a:t>
-            </a:r>
-            <a:endParaRPr lang="en-US" sz="1100" dirty="0"/>
-          </a:p>
-          <a:p>
-            <a:pPr indent="0" marL="0">
-              <a:buNone/>
-            </a:pPr>
-            <a:r>
-              <a:rPr lang="en-US" sz="1100" dirty="0">
-                <a:solidFill>
-                  <a:srgbClr val="64748B"/>
-                </a:solidFill>
-                <a:latin typeface="Courier New" pitchFamily="34" charset="0"/>
-                <a:ea typeface="Courier New" pitchFamily="34" charset="-122"/>
-                <a:cs typeface="Courier New" pitchFamily="34" charset="-120"/>
-              </a:rPr>
-              <a:t>capped at 10%."</a:t>
-            </a:r>
-            <a:endParaRPr lang="en-US" sz="1100" dirty="0"/>
-          </a:p>
-        </p:txBody>
-      </p:sp>
-      <p:sp>
-        <p:nvSpPr>
-          <p:cNvPr id="9" name="Text 6"/>
-          <p:cNvSpPr/>
-          <p:nvPr/>
-        </p:nvSpPr>
-        <p:spPr>
-          <a:xfrm>
-            <a:off x="1005840" y="2880360"/>
-            <a:ext cx="3108960" cy="640080"/>
-          </a:xfrm>
-          <a:prstGeom prst="rect">
-            <a:avLst/>
-          </a:prstGeom>
-          <a:noFill/>
-          <a:ln/>
-        </p:spPr>
-        <p:txBody>
-          <a:bodyPr wrap="square" lIns="0" tIns="0" rIns="0" bIns="0" rtlCol="0" anchor="ctr"/>
-          <a:lstStyle/>
-          <a:p>
-            <a:pPr indent="0" marL="0">
-              <a:buNone/>
-            </a:pPr>
-            <a:r>
-              <a:rPr lang="en-US" sz="1200" dirty="0">
-                <a:solidFill>
-                  <a:srgbClr val="64748B"/>
-                </a:solidFill>
-                <a:latin typeface="Calibri" pitchFamily="34" charset="0"/>
-                <a:ea typeface="Calibri" pitchFamily="34" charset="-122"/>
-                <a:cs typeface="Calibri" pitchFamily="34" charset="-120"/>
-              </a:rPr>
-              <a:t>The manager thinks: "Is this right?</a:t>
-            </a:r>
-            <a:endParaRPr lang="en-US" sz="1200" dirty="0"/>
-          </a:p>
-          <a:p>
-            <a:pPr indent="0" marL="0">
-              <a:buNone/>
-            </a:pPr>
-            <a:r>
-              <a:rPr lang="en-US" sz="1200" dirty="0">
-                <a:solidFill>
-                  <a:srgbClr val="64748B"/>
-                </a:solidFill>
-                <a:latin typeface="Calibri" pitchFamily="34" charset="0"/>
-                <a:ea typeface="Calibri" pitchFamily="34" charset="-122"/>
-                <a:cs typeface="Calibri" pitchFamily="34" charset="-120"/>
-              </a:rPr>
-              <a:t>Which page? Which clause?</a:t>
-            </a:r>
-            <a:endParaRPr lang="en-US" sz="1200" dirty="0"/>
-          </a:p>
-          <a:p>
-            <a:pPr indent="0" marL="0">
-              <a:buNone/>
-            </a:pPr>
-            <a:r>
-              <a:rPr lang="en-US" sz="1200" dirty="0">
-                <a:solidFill>
-                  <a:srgbClr val="64748B"/>
-                </a:solidFill>
-                <a:latin typeface="Calibri" pitchFamily="34" charset="0"/>
-                <a:ea typeface="Calibri" pitchFamily="34" charset="-122"/>
-                <a:cs typeface="Calibri" pitchFamily="34" charset="-120"/>
-              </a:rPr>
-              <a:t>I can't submit a bid on faith."</a:t>
-            </a:r>
-            <a:endParaRPr lang="en-US" sz="1200" dirty="0"/>
-          </a:p>
-        </p:txBody>
-      </p:sp>
-      <p:sp>
-        <p:nvSpPr>
-          <p:cNvPr id="10" name="Shape 7"/>
-          <p:cNvSpPr/>
-          <p:nvPr/>
-        </p:nvSpPr>
-        <p:spPr>
-          <a:xfrm>
-            <a:off x="4754880" y="1554480"/>
-            <a:ext cx="3657600" cy="2286000"/>
-          </a:xfrm>
-          <a:prstGeom prst="rect">
-            <a:avLst/>
-          </a:prstGeom>
-          <a:solidFill>
-            <a:srgbClr val="FFFFFF"/>
-          </a:solidFill>
-          <a:ln/>
-          <a:effectLst>
-            <a:outerShdw sx="100000" sy="100000" kx="0" ky="0" algn="bl" rotWithShape="0" blurRad="76200" dist="25400" dir="8100000">
-              <a:srgbClr val="000000">
-                <a:alpha val="12000"/>
-              </a:srgbClr>
-            </a:outerShdw>
-          </a:effectLst>
-        </p:spPr>
-      </p:sp>
-      <p:sp>
-        <p:nvSpPr>
-          <p:cNvPr id="11" name="Shape 8"/>
-          <p:cNvSpPr/>
-          <p:nvPr/>
-        </p:nvSpPr>
-        <p:spPr>
-          <a:xfrm>
-            <a:off x="4754880" y="1554480"/>
-            <a:ext cx="3657600" cy="73152"/>
-          </a:xfrm>
-          <a:prstGeom prst="rect">
-            <a:avLst/>
-          </a:prstGeom>
-          <a:solidFill>
-            <a:srgbClr val="22C55E"/>
-          </a:solidFill>
-          <a:ln/>
-        </p:spPr>
-      </p:sp>
-      <p:pic>
-        <p:nvPicPr>
-          <p:cNvPr id="12" name="Image 1" descr="preencoded.png">    </p:cNvPr>
-          <p:cNvPicPr>
-            <a:picLocks noChangeAspect="1"/>
-          </p:cNvPicPr>
-          <p:nvPr/>
-        </p:nvPicPr>
-        <p:blipFill>
-          <a:blip r:embed="rId2"/>
-          <a:stretch>
-            <a:fillRect/>
-          </a:stretch>
-        </p:blipFill>
-        <p:spPr>
-          <a:xfrm>
-            <a:off x="5029200" y="1783080"/>
-            <a:ext cx="365760" cy="365760"/>
-          </a:xfrm>
-          <a:prstGeom prst="rect">
-            <a:avLst/>
-          </a:prstGeom>
-        </p:spPr>
-      </p:pic>
-      <p:sp>
-        <p:nvSpPr>
-          <p:cNvPr id="13" name="Text 9"/>
-          <p:cNvSpPr/>
-          <p:nvPr/>
-        </p:nvSpPr>
-        <p:spPr>
-          <a:xfrm>
-            <a:off x="5486400" y="1783080"/>
-            <a:ext cx="2560320" cy="365760"/>
-          </a:xfrm>
-          <a:prstGeom prst="rect">
-            <a:avLst/>
-          </a:prstGeom>
-          <a:noFill/>
-          <a:ln/>
-        </p:spPr>
-        <p:txBody>
-          <a:bodyPr wrap="square" lIns="0" tIns="0" rIns="0" bIns="0" rtlCol="0" anchor="ctr"/>
-          <a:lstStyle/>
-          <a:p>
-            <a:pPr indent="0" marL="0">
-              <a:buNone/>
-            </a:pPr>
-            <a:r>
-              <a:rPr lang="en-US" sz="1600" b="1" dirty="0">
-                <a:solidFill>
-                  <a:srgbClr val="22C55E"/>
-                </a:solidFill>
-                <a:latin typeface="Trebuchet MS" pitchFamily="34" charset="0"/>
-                <a:ea typeface="Trebuchet MS" pitchFamily="34" charset="-122"/>
-                <a:cs typeface="Trebuchet MS" pitchFamily="34" charset="-120"/>
-              </a:rPr>
-              <a:t>Clickable Citation</a:t>
-            </a:r>
-            <a:endParaRPr lang="en-US" sz="1600" dirty="0"/>
-          </a:p>
-        </p:txBody>
-      </p:sp>
-      <p:sp>
-        <p:nvSpPr>
-          <p:cNvPr id="14" name="Text 10"/>
-          <p:cNvSpPr/>
-          <p:nvPr/>
-        </p:nvSpPr>
-        <p:spPr>
-          <a:xfrm>
-            <a:off x="5029200" y="2286000"/>
-            <a:ext cx="3108960" cy="457200"/>
-          </a:xfrm>
-          <a:prstGeom prst="rect">
-            <a:avLst/>
-          </a:prstGeom>
-          <a:noFill/>
-          <a:ln/>
-        </p:spPr>
-        <p:txBody>
-          <a:bodyPr wrap="square" lIns="0" tIns="0" rIns="0" bIns="0" rtlCol="0" anchor="ctr"/>
-          <a:lstStyle/>
-          <a:p>
-            <a:pPr indent="0" marL="0">
-              <a:buNone/>
-            </a:pPr>
-            <a:r>
-              <a:rPr lang="en-US" sz="1100" dirty="0">
-                <a:solidFill>
-                  <a:srgbClr val="64748B"/>
-                </a:solidFill>
-                <a:latin typeface="Courier New" pitchFamily="34" charset="0"/>
-                <a:ea typeface="Courier New" pitchFamily="34" charset="-122"/>
-                <a:cs typeface="Courier New" pitchFamily="34" charset="-120"/>
-              </a:rPr>
-              <a:t>"The LD clause is 0.5% per week,</a:t>
-            </a:r>
-            <a:endParaRPr lang="en-US" sz="1100" dirty="0"/>
-          </a:p>
-          <a:p>
-            <a:pPr indent="0" marL="0">
-              <a:buNone/>
-            </a:pPr>
-            <a:r>
-              <a:rPr lang="en-US" sz="1100" dirty="0">
-                <a:solidFill>
-                  <a:srgbClr val="64748B"/>
-                </a:solidFill>
-                <a:latin typeface="Courier New" pitchFamily="34" charset="0"/>
-                <a:ea typeface="Courier New" pitchFamily="34" charset="-122"/>
-                <a:cs typeface="Courier New" pitchFamily="34" charset="-120"/>
-              </a:rPr>
-              <a:t>capped at 10%."</a:t>
-            </a:r>
-            <a:endParaRPr lang="en-US" sz="1100" dirty="0"/>
-          </a:p>
-        </p:txBody>
-      </p:sp>
-      <p:sp>
-        <p:nvSpPr>
-          <p:cNvPr id="15" name="Shape 11"/>
-          <p:cNvSpPr/>
-          <p:nvPr/>
-        </p:nvSpPr>
-        <p:spPr>
-          <a:xfrm>
-            <a:off x="5212080" y="2834640"/>
-            <a:ext cx="2926080" cy="320040"/>
-          </a:xfrm>
-          <a:prstGeom prst="rect">
-            <a:avLst/>
-          </a:prstGeom>
-          <a:solidFill>
-            <a:srgbClr val="22C55E"/>
-          </a:solidFill>
-          <a:ln/>
-        </p:spPr>
-      </p:sp>
-      <p:sp>
-        <p:nvSpPr>
-          <p:cNvPr id="16" name="Text 12"/>
-          <p:cNvSpPr/>
-          <p:nvPr/>
-        </p:nvSpPr>
-        <p:spPr>
-          <a:xfrm>
-            <a:off x="5212080" y="2834640"/>
-            <a:ext cx="2926080" cy="320040"/>
-          </a:xfrm>
-          <a:prstGeom prst="rect">
-            <a:avLst/>
-          </a:prstGeom>
-          <a:noFill/>
-          <a:ln/>
-        </p:spPr>
-        <p:txBody>
-          <a:bodyPr wrap="square" lIns="0" tIns="0" rIns="0" bIns="0" rtlCol="0" anchor="ctr"/>
-          <a:lstStyle/>
-          <a:p>
-            <a:pPr algn="ctr" indent="0" marL="0">
-              <a:buNone/>
-            </a:pPr>
-            <a:r>
-              <a:rPr lang="en-US" sz="1100" b="1" dirty="0">
-                <a:solidFill>
-                  <a:srgbClr val="FFFFFF"/>
-                </a:solidFill>
-                <a:latin typeface="Calibri" pitchFamily="34" charset="0"/>
-                <a:ea typeface="Calibri" pitchFamily="34" charset="-122"/>
-                <a:cs typeface="Calibri" pitchFamily="34" charset="-120"/>
-              </a:rPr>
-              <a:t>Source: pg. 42, Clause 14.2  →</a:t>
-            </a:r>
-            <a:endParaRPr lang="en-US" sz="1100" dirty="0"/>
-          </a:p>
-        </p:txBody>
-      </p:sp>
-      <p:sp>
-        <p:nvSpPr>
-          <p:cNvPr id="17" name="Text 13"/>
-          <p:cNvSpPr/>
-          <p:nvPr/>
-        </p:nvSpPr>
-        <p:spPr>
-          <a:xfrm>
-            <a:off x="5029200" y="3246120"/>
-            <a:ext cx="3108960" cy="411480"/>
-          </a:xfrm>
-          <a:prstGeom prst="rect">
-            <a:avLst/>
-          </a:prstGeom>
-          <a:noFill/>
-          <a:ln/>
-        </p:spPr>
-        <p:txBody>
-          <a:bodyPr wrap="square" lIns="0" tIns="0" rIns="0" bIns="0" rtlCol="0" anchor="ctr"/>
-          <a:lstStyle/>
-          <a:p>
-            <a:pPr indent="0" marL="0">
-              <a:buNone/>
-            </a:pPr>
-            <a:r>
-              <a:rPr lang="en-US" sz="1200" dirty="0">
-                <a:solidFill>
-                  <a:srgbClr val="64748B"/>
-                </a:solidFill>
-                <a:latin typeface="Calibri" pitchFamily="34" charset="0"/>
-                <a:ea typeface="Calibri" pitchFamily="34" charset="-122"/>
-                <a:cs typeface="Calibri" pitchFamily="34" charset="-120"/>
-              </a:rPr>
-              <a:t>One click → opens the PDF</a:t>
-            </a:r>
-            <a:endParaRPr lang="en-US" sz="1200" dirty="0"/>
-          </a:p>
-          <a:p>
-            <a:pPr indent="0" marL="0">
-              <a:buNone/>
-            </a:pPr>
-            <a:r>
-              <a:rPr lang="en-US" sz="1200" dirty="0">
-                <a:solidFill>
-                  <a:srgbClr val="64748B"/>
-                </a:solidFill>
-                <a:latin typeface="Calibri" pitchFamily="34" charset="0"/>
-                <a:ea typeface="Calibri" pitchFamily="34" charset="-122"/>
-                <a:cs typeface="Calibri" pitchFamily="34" charset="-120"/>
-              </a:rPr>
-              <a:t>at the exact page for verification.</a:t>
-            </a:r>
-            <a:endParaRPr lang="en-US" sz="1200" dirty="0"/>
-          </a:p>
-        </p:txBody>
-      </p:sp>
-      <p:sp>
-        <p:nvSpPr>
-          <p:cNvPr id="18" name="Shape 14"/>
-          <p:cNvSpPr/>
-          <p:nvPr/>
-        </p:nvSpPr>
-        <p:spPr>
-          <a:xfrm>
-            <a:off x="731520" y="4160520"/>
-            <a:ext cx="7680960" cy="502920"/>
-          </a:xfrm>
-          <a:prstGeom prst="rect">
-            <a:avLst/>
-          </a:prstGeom>
-          <a:solidFill>
-            <a:srgbClr val="F0FDF4"/>
-          </a:solidFill>
-          <a:ln/>
-        </p:spPr>
-      </p:sp>
-      <p:pic>
-        <p:nvPicPr>
-          <p:cNvPr id="19" name="Image 2" descr="preencoded.png">    </p:cNvPr>
+          <p:cNvPr id="6" name="Image 0" descr="preencoded.png"/>
           <p:cNvPicPr>
             <a:picLocks noChangeAspect="1"/>
           </p:cNvPicPr>
@@ -3322,6 +2595,499 @@
         </p:blipFill>
         <p:spPr>
           <a:xfrm>
+            <a:off x="1005840" y="1783080"/>
+            <a:ext cx="365760" cy="365760"/>
+          </a:xfrm>
+          <a:prstGeom prst="rect">
+            <a:avLst/>
+          </a:prstGeom>
+        </p:spPr>
+      </p:pic>
+      <p:sp>
+        <p:nvSpPr>
+          <p:cNvPr id="7" name="Text 4"/>
+          <p:cNvSpPr/>
+          <p:nvPr/>
+        </p:nvSpPr>
+        <p:spPr>
+          <a:xfrm>
+            <a:off x="1463040" y="1783080"/>
+            <a:ext cx="2560320" cy="365760"/>
+          </a:xfrm>
+          <a:prstGeom prst="rect">
+            <a:avLst/>
+          </a:prstGeom>
+          <a:noFill/>
+          <a:ln/>
+        </p:spPr>
+        <p:txBody>
+          <a:bodyPr wrap="square" lIns="0" tIns="0" rIns="0" bIns="0" rtlCol="0" anchor="ctr"/>
+          <a:lstStyle/>
+          <a:p>
+            <a:pPr marL="0" indent="0">
+              <a:buNone/>
+            </a:pPr>
+            <a:r>
+              <a:rPr lang="en-US" sz="1600" b="1" dirty="0">
+                <a:solidFill>
+                  <a:srgbClr val="EF4444"/>
+                </a:solidFill>
+                <a:latin typeface="Trebuchet MS" pitchFamily="34" charset="0"/>
+                <a:ea typeface="Trebuchet MS" pitchFamily="34" charset="-122"/>
+                <a:cs typeface="Trebuchet MS" pitchFamily="34" charset="-120"/>
+              </a:rPr>
+              <a:t>No Citation</a:t>
+            </a:r>
+            <a:endParaRPr lang="en-US" sz="1600" dirty="0"/>
+          </a:p>
+        </p:txBody>
+      </p:sp>
+      <p:sp>
+        <p:nvSpPr>
+          <p:cNvPr id="8" name="Text 5"/>
+          <p:cNvSpPr/>
+          <p:nvPr/>
+        </p:nvSpPr>
+        <p:spPr>
+          <a:xfrm>
+            <a:off x="1005840" y="2286000"/>
+            <a:ext cx="3108960" cy="457200"/>
+          </a:xfrm>
+          <a:prstGeom prst="rect">
+            <a:avLst/>
+          </a:prstGeom>
+          <a:noFill/>
+          <a:ln/>
+        </p:spPr>
+        <p:txBody>
+          <a:bodyPr wrap="square" lIns="0" tIns="0" rIns="0" bIns="0" rtlCol="0" anchor="ctr"/>
+          <a:lstStyle/>
+          <a:p>
+            <a:pPr marL="0" indent="0">
+              <a:buNone/>
+            </a:pPr>
+            <a:r>
+              <a:rPr lang="en-US" sz="1100" dirty="0">
+                <a:solidFill>
+                  <a:srgbClr val="64748B"/>
+                </a:solidFill>
+                <a:latin typeface="Courier New" pitchFamily="34" charset="0"/>
+                <a:ea typeface="Courier New" pitchFamily="34" charset="-122"/>
+                <a:cs typeface="Courier New" pitchFamily="34" charset="-120"/>
+              </a:rPr>
+              <a:t>"The LD clause is 0.5% per week,</a:t>
+            </a:r>
+            <a:endParaRPr lang="en-US" sz="1100" dirty="0"/>
+          </a:p>
+          <a:p>
+            <a:pPr marL="0" indent="0">
+              <a:buNone/>
+            </a:pPr>
+            <a:r>
+              <a:rPr lang="en-US" sz="1100" dirty="0">
+                <a:solidFill>
+                  <a:srgbClr val="64748B"/>
+                </a:solidFill>
+                <a:latin typeface="Courier New" pitchFamily="34" charset="0"/>
+                <a:ea typeface="Courier New" pitchFamily="34" charset="-122"/>
+                <a:cs typeface="Courier New" pitchFamily="34" charset="-120"/>
+              </a:rPr>
+              <a:t>capped at 10%."</a:t>
+            </a:r>
+            <a:endParaRPr lang="en-US" sz="1100" dirty="0"/>
+          </a:p>
+        </p:txBody>
+      </p:sp>
+      <p:sp>
+        <p:nvSpPr>
+          <p:cNvPr id="9" name="Text 6"/>
+          <p:cNvSpPr/>
+          <p:nvPr/>
+        </p:nvSpPr>
+        <p:spPr>
+          <a:xfrm>
+            <a:off x="1005840" y="2880360"/>
+            <a:ext cx="3108960" cy="640080"/>
+          </a:xfrm>
+          <a:prstGeom prst="rect">
+            <a:avLst/>
+          </a:prstGeom>
+          <a:noFill/>
+          <a:ln/>
+        </p:spPr>
+        <p:txBody>
+          <a:bodyPr wrap="square" lIns="0" tIns="0" rIns="0" bIns="0" rtlCol="0" anchor="ctr"/>
+          <a:lstStyle/>
+          <a:p>
+            <a:pPr marL="0" indent="0">
+              <a:buNone/>
+            </a:pPr>
+            <a:r>
+              <a:rPr lang="en-US" sz="1200" dirty="0">
+                <a:solidFill>
+                  <a:srgbClr val="64748B"/>
+                </a:solidFill>
+                <a:latin typeface="Calibri" pitchFamily="34" charset="0"/>
+                <a:ea typeface="Calibri" pitchFamily="34" charset="-122"/>
+                <a:cs typeface="Calibri" pitchFamily="34" charset="-120"/>
+              </a:rPr>
+              <a:t>The manager thinks: "Is this right?</a:t>
+            </a:r>
+            <a:endParaRPr lang="en-US" sz="1200" dirty="0"/>
+          </a:p>
+          <a:p>
+            <a:pPr marL="0" indent="0">
+              <a:buNone/>
+            </a:pPr>
+            <a:r>
+              <a:rPr lang="en-US" sz="1200" dirty="0">
+                <a:solidFill>
+                  <a:srgbClr val="64748B"/>
+                </a:solidFill>
+                <a:latin typeface="Calibri" pitchFamily="34" charset="0"/>
+                <a:ea typeface="Calibri" pitchFamily="34" charset="-122"/>
+                <a:cs typeface="Calibri" pitchFamily="34" charset="-120"/>
+              </a:rPr>
+              <a:t>Which page? Which clause?</a:t>
+            </a:r>
+            <a:endParaRPr lang="en-US" sz="1200" dirty="0"/>
+          </a:p>
+          <a:p>
+            <a:pPr marL="0" indent="0">
+              <a:buNone/>
+            </a:pPr>
+            <a:r>
+              <a:rPr lang="en-US" sz="1200" dirty="0">
+                <a:solidFill>
+                  <a:srgbClr val="64748B"/>
+                </a:solidFill>
+                <a:latin typeface="Calibri" pitchFamily="34" charset="0"/>
+                <a:ea typeface="Calibri" pitchFamily="34" charset="-122"/>
+                <a:cs typeface="Calibri" pitchFamily="34" charset="-120"/>
+              </a:rPr>
+              <a:t>I can't submit a bid on faith."</a:t>
+            </a:r>
+            <a:endParaRPr lang="en-US" sz="1200" dirty="0"/>
+          </a:p>
+        </p:txBody>
+      </p:sp>
+      <p:sp>
+        <p:nvSpPr>
+          <p:cNvPr id="10" name="Shape 7"/>
+          <p:cNvSpPr/>
+          <p:nvPr/>
+        </p:nvSpPr>
+        <p:spPr>
+          <a:xfrm>
+            <a:off x="4754880" y="1554480"/>
+            <a:ext cx="3657600" cy="2286000"/>
+          </a:xfrm>
+          <a:prstGeom prst="rect">
+            <a:avLst/>
+          </a:prstGeom>
+          <a:solidFill>
+            <a:srgbClr val="FFFFFF"/>
+          </a:solidFill>
+          <a:ln/>
+          <a:effectLst>
+            <a:outerShdw blurRad="76200" dist="25400" dir="8100000" algn="bl" rotWithShape="0">
+              <a:srgbClr val="000000">
+                <a:alpha val="12000"/>
+              </a:srgbClr>
+            </a:outerShdw>
+          </a:effectLst>
+        </p:spPr>
+      </p:sp>
+      <p:sp>
+        <p:nvSpPr>
+          <p:cNvPr id="11" name="Shape 8"/>
+          <p:cNvSpPr/>
+          <p:nvPr/>
+        </p:nvSpPr>
+        <p:spPr>
+          <a:xfrm>
+            <a:off x="4754880" y="1554480"/>
+            <a:ext cx="3657600" cy="73152"/>
+          </a:xfrm>
+          <a:prstGeom prst="rect">
+            <a:avLst/>
+          </a:prstGeom>
+          <a:solidFill>
+            <a:srgbClr val="22C55E"/>
+          </a:solidFill>
+          <a:ln/>
+        </p:spPr>
+      </p:sp>
+      <p:pic>
+        <p:nvPicPr>
+          <p:cNvPr id="12" name="Image 1" descr="preencoded.png"/>
+          <p:cNvPicPr>
+            <a:picLocks noChangeAspect="1"/>
+          </p:cNvPicPr>
+          <p:nvPr/>
+        </p:nvPicPr>
+        <p:blipFill>
+          <a:blip r:embed="rId4"/>
+          <a:stretch>
+            <a:fillRect/>
+          </a:stretch>
+        </p:blipFill>
+        <p:spPr>
+          <a:xfrm>
+            <a:off x="5029200" y="1783080"/>
+            <a:ext cx="365760" cy="365760"/>
+          </a:xfrm>
+          <a:prstGeom prst="rect">
+            <a:avLst/>
+          </a:prstGeom>
+        </p:spPr>
+      </p:pic>
+      <p:sp>
+        <p:nvSpPr>
+          <p:cNvPr id="13" name="Text 9"/>
+          <p:cNvSpPr/>
+          <p:nvPr/>
+        </p:nvSpPr>
+        <p:spPr>
+          <a:xfrm>
+            <a:off x="5486400" y="1783080"/>
+            <a:ext cx="2560320" cy="365760"/>
+          </a:xfrm>
+          <a:prstGeom prst="rect">
+            <a:avLst/>
+          </a:prstGeom>
+          <a:noFill/>
+          <a:ln/>
+        </p:spPr>
+        <p:txBody>
+          <a:bodyPr wrap="square" lIns="0" tIns="0" rIns="0" bIns="0" rtlCol="0" anchor="ctr"/>
+          <a:lstStyle/>
+          <a:p>
+            <a:pPr marL="0" indent="0">
+              <a:buNone/>
+            </a:pPr>
+            <a:r>
+              <a:rPr lang="en-US" sz="1600" b="1" dirty="0">
+                <a:solidFill>
+                  <a:srgbClr val="22C55E"/>
+                </a:solidFill>
+                <a:latin typeface="Trebuchet MS" pitchFamily="34" charset="0"/>
+                <a:ea typeface="Trebuchet MS" pitchFamily="34" charset="-122"/>
+                <a:cs typeface="Trebuchet MS" pitchFamily="34" charset="-120"/>
+              </a:rPr>
+              <a:t>Clickable Citation</a:t>
+            </a:r>
+            <a:endParaRPr lang="en-US" sz="1600" dirty="0"/>
+          </a:p>
+        </p:txBody>
+      </p:sp>
+      <p:sp>
+        <p:nvSpPr>
+          <p:cNvPr id="14" name="Text 10"/>
+          <p:cNvSpPr/>
+          <p:nvPr/>
+        </p:nvSpPr>
+        <p:spPr>
+          <a:xfrm>
+            <a:off x="5029200" y="2286000"/>
+            <a:ext cx="3108960" cy="457200"/>
+          </a:xfrm>
+          <a:prstGeom prst="rect">
+            <a:avLst/>
+          </a:prstGeom>
+          <a:noFill/>
+          <a:ln/>
+        </p:spPr>
+        <p:txBody>
+          <a:bodyPr wrap="square" lIns="0" tIns="0" rIns="0" bIns="0" rtlCol="0" anchor="ctr"/>
+          <a:lstStyle/>
+          <a:p>
+            <a:pPr marL="0" indent="0">
+              <a:buNone/>
+            </a:pPr>
+            <a:r>
+              <a:rPr lang="en-US" sz="1100" dirty="0">
+                <a:solidFill>
+                  <a:srgbClr val="64748B"/>
+                </a:solidFill>
+                <a:latin typeface="Courier New" pitchFamily="34" charset="0"/>
+                <a:ea typeface="Courier New" pitchFamily="34" charset="-122"/>
+                <a:cs typeface="Courier New" pitchFamily="34" charset="-120"/>
+              </a:rPr>
+              <a:t>"The LD clause is 0.5% per week,</a:t>
+            </a:r>
+            <a:endParaRPr lang="en-US" sz="1100" dirty="0"/>
+          </a:p>
+          <a:p>
+            <a:pPr marL="0" indent="0">
+              <a:buNone/>
+            </a:pPr>
+            <a:r>
+              <a:rPr lang="en-US" sz="1100" dirty="0">
+                <a:solidFill>
+                  <a:srgbClr val="64748B"/>
+                </a:solidFill>
+                <a:latin typeface="Courier New" pitchFamily="34" charset="0"/>
+                <a:ea typeface="Courier New" pitchFamily="34" charset="-122"/>
+                <a:cs typeface="Courier New" pitchFamily="34" charset="-120"/>
+              </a:rPr>
+              <a:t>capped at 10%."</a:t>
+            </a:r>
+            <a:endParaRPr lang="en-US" sz="1100" dirty="0"/>
+          </a:p>
+        </p:txBody>
+      </p:sp>
+      <p:sp>
+        <p:nvSpPr>
+          <p:cNvPr id="15" name="Shape 11"/>
+          <p:cNvSpPr/>
+          <p:nvPr/>
+        </p:nvSpPr>
+        <p:spPr>
+          <a:xfrm>
+            <a:off x="5212080" y="2834640"/>
+            <a:ext cx="2926080" cy="320040"/>
+          </a:xfrm>
+          <a:prstGeom prst="rect">
+            <a:avLst/>
+          </a:prstGeom>
+          <a:solidFill>
+            <a:srgbClr val="22C55E"/>
+          </a:solidFill>
+          <a:ln/>
+        </p:spPr>
+      </p:sp>
+      <p:sp>
+        <p:nvSpPr>
+          <p:cNvPr id="16" name="Text 12"/>
+          <p:cNvSpPr/>
+          <p:nvPr/>
+        </p:nvSpPr>
+        <p:spPr>
+          <a:xfrm>
+            <a:off x="5212080" y="2834640"/>
+            <a:ext cx="2926080" cy="320040"/>
+          </a:xfrm>
+          <a:prstGeom prst="rect">
+            <a:avLst/>
+          </a:prstGeom>
+          <a:noFill/>
+          <a:ln/>
+        </p:spPr>
+        <p:txBody>
+          <a:bodyPr wrap="square" lIns="0" tIns="0" rIns="0" bIns="0" rtlCol="0" anchor="ctr"/>
+          <a:lstStyle/>
+          <a:p>
+            <a:pPr marL="0" indent="0" algn="ctr">
+              <a:buNone/>
+            </a:pPr>
+            <a:r>
+              <a:rPr lang="en-US" sz="1100" b="1" dirty="0">
+                <a:solidFill>
+                  <a:srgbClr val="FFFFFF"/>
+                </a:solidFill>
+                <a:latin typeface="Calibri" pitchFamily="34" charset="0"/>
+                <a:ea typeface="Calibri" pitchFamily="34" charset="-122"/>
+                <a:cs typeface="Calibri" pitchFamily="34" charset="-120"/>
+              </a:rPr>
+              <a:t>Source: pg. 42, Clause 14.2  →</a:t>
+            </a:r>
+            <a:endParaRPr lang="en-US" sz="1100" dirty="0"/>
+          </a:p>
+        </p:txBody>
+      </p:sp>
+      <p:sp>
+        <p:nvSpPr>
+          <p:cNvPr id="17" name="Text 13"/>
+          <p:cNvSpPr/>
+          <p:nvPr/>
+        </p:nvSpPr>
+        <p:spPr>
+          <a:xfrm>
+            <a:off x="5029200" y="3246120"/>
+            <a:ext cx="3108960" cy="411480"/>
+          </a:xfrm>
+          <a:prstGeom prst="rect">
+            <a:avLst/>
+          </a:prstGeom>
+          <a:noFill/>
+          <a:ln/>
+        </p:spPr>
+        <p:txBody>
+          <a:bodyPr wrap="square" lIns="0" tIns="0" rIns="0" bIns="0" rtlCol="0" anchor="ctr"/>
+          <a:lstStyle/>
+          <a:p>
+            <a:pPr marL="0" indent="0">
+              <a:buNone/>
+            </a:pPr>
+            <a:r>
+              <a:rPr lang="en-US" sz="1200" dirty="0">
+                <a:solidFill>
+                  <a:srgbClr val="64748B"/>
+                </a:solidFill>
+                <a:latin typeface="Calibri" pitchFamily="34" charset="0"/>
+                <a:ea typeface="Calibri" pitchFamily="34" charset="-122"/>
+                <a:cs typeface="Calibri" pitchFamily="34" charset="-120"/>
+              </a:rPr>
+              <a:t>One click → opens the PDF</a:t>
+            </a:r>
+            <a:endParaRPr lang="en-US" sz="1200" dirty="0"/>
+          </a:p>
+          <a:p>
+            <a:pPr marL="0" indent="0">
+              <a:buNone/>
+            </a:pPr>
+            <a:r>
+              <a:rPr lang="en-US" sz="1200" dirty="0">
+                <a:solidFill>
+                  <a:srgbClr val="64748B"/>
+                </a:solidFill>
+                <a:latin typeface="Calibri" pitchFamily="34" charset="0"/>
+                <a:ea typeface="Calibri" pitchFamily="34" charset="-122"/>
+                <a:cs typeface="Calibri" pitchFamily="34" charset="-120"/>
+              </a:rPr>
+              <a:t>at the exact page for verification.</a:t>
+            </a:r>
+            <a:endParaRPr lang="en-US" sz="1200" dirty="0"/>
+          </a:p>
+        </p:txBody>
+      </p:sp>
+      <p:sp>
+        <p:nvSpPr>
+          <p:cNvPr id="18" name="Shape 14"/>
+          <p:cNvSpPr/>
+          <p:nvPr/>
+        </p:nvSpPr>
+        <p:spPr>
+          <a:xfrm>
+            <a:off x="731520" y="4160520"/>
+            <a:ext cx="7680960" cy="502920"/>
+          </a:xfrm>
+          <a:prstGeom prst="rect">
+            <a:avLst/>
+          </a:prstGeom>
+          <a:solidFill>
+            <a:srgbClr val="F0FDF4"/>
+          </a:solidFill>
+          <a:ln/>
+        </p:spPr>
+      </p:sp>
+      <p:pic>
+        <p:nvPicPr>
+          <p:cNvPr id="19" name="Image 2" descr="preencoded.png"/>
+          <p:cNvPicPr>
+            <a:picLocks noChangeAspect="1"/>
+          </p:cNvPicPr>
+          <p:nvPr/>
+        </p:nvPicPr>
+        <p:blipFill>
+          <a:blip r:embed="rId5"/>
+          <a:stretch>
+            <a:fillRect/>
+          </a:stretch>
+        </p:blipFill>
+        <p:spPr>
+          <a:xfrm>
             <a:off x="914400" y="4233672"/>
             <a:ext cx="274320" cy="274320"/>
           </a:xfrm>
@@ -3351,7 +3117,7 @@
           <a:bodyPr wrap="square" lIns="0" tIns="0" rIns="0" bIns="0" rtlCol="0" anchor="ctr"/>
           <a:lstStyle/>
           <a:p>
-            <a:pPr indent="0" marL="0">
+            <a:pPr marL="0" indent="0">
               <a:buNone/>
             </a:pPr>
             <a:r>
@@ -3385,6 +3151,7 @@
         <a:solidFill>
           <a:srgbClr val="0F172A"/>
         </a:solidFill>
+        <a:effectLst/>
       </p:bgPr>
     </p:bg>
     <p:spTree>
@@ -3422,7 +3189,7 @@
           <a:bodyPr wrap="square" lIns="0" tIns="0" rIns="0" bIns="0" rtlCol="0" anchor="ctr"/>
           <a:lstStyle/>
           <a:p>
-            <a:pPr indent="0" marL="0">
+            <a:pPr marL="0" indent="0">
               <a:buNone/>
             </a:pPr>
             <a:r>
@@ -3459,7 +3226,7 @@
           </a:solidFill>
           <a:ln/>
           <a:effectLst>
-            <a:outerShdw sx="100000" sy="100000" kx="0" ky="0" algn="bl" rotWithShape="0" blurRad="76200" dist="25400" dir="8100000">
+            <a:outerShdw blurRad="76200" dist="25400" dir="8100000" algn="bl" rotWithShape="0">
               <a:srgbClr val="000000">
                 <a:alpha val="12000"/>
               </a:srgbClr>
@@ -3508,7 +3275,7 @@
           <a:bodyPr wrap="square" lIns="0" tIns="0" rIns="0" bIns="0" rtlCol="0" anchor="ctr"/>
           <a:lstStyle/>
           <a:p>
-            <a:pPr algn="ctr" indent="0" marL="0">
+            <a:pPr marL="0" indent="0" algn="ctr">
               <a:buNone/>
             </a:pPr>
             <a:r>
@@ -3528,270 +3295,7 @@
       </p:sp>
       <p:pic>
         <p:nvPicPr>
-          <p:cNvPr id="6" name="Image 0" descr="preencoded.png">    </p:cNvPr>
-          <p:cNvPicPr>
-            <a:picLocks noChangeAspect="1"/>
-          </p:cNvPicPr>
-          <p:nvPr/>
-        </p:nvPicPr>
-        <p:blipFill>
-          <a:blip r:embed="rId1"/>
-          <a:stretch>
-            <a:fillRect/>
-          </a:stretch>
-        </p:blipFill>
-        <p:spPr>
-          <a:xfrm>
-            <a:off x="1600200" y="2103120"/>
-            <a:ext cx="548640" cy="548640"/>
-          </a:xfrm>
-          <a:prstGeom prst="rect">
-            <a:avLst/>
-          </a:prstGeom>
-        </p:spPr>
-      </p:pic>
-      <p:sp>
-        <p:nvSpPr>
-          <p:cNvPr id="7" name="Text 4"/>
-          <p:cNvSpPr/>
-          <p:nvPr/>
-        </p:nvSpPr>
-        <p:spPr>
-          <a:xfrm>
-            <a:off x="731520" y="2788920"/>
-            <a:ext cx="2468880" cy="365760"/>
-          </a:xfrm>
-          <a:prstGeom prst="rect">
-            <a:avLst/>
-          </a:prstGeom>
-          <a:noFill/>
-          <a:ln/>
-        </p:spPr>
-        <p:txBody>
-          <a:bodyPr wrap="square" lIns="0" tIns="0" rIns="0" bIns="0" rtlCol="0" anchor="ctr"/>
-          <a:lstStyle/>
-          <a:p>
-            <a:pPr algn="ctr" indent="0" marL="0">
-              <a:buNone/>
-            </a:pPr>
-            <a:r>
-              <a:rPr lang="en-US" sz="1600" b="1" dirty="0">
-                <a:solidFill>
-                  <a:srgbClr val="F97316"/>
-                </a:solidFill>
-                <a:latin typeface="Trebuchet MS" pitchFamily="34" charset="0"/>
-                <a:ea typeface="Trebuchet MS" pitchFamily="34" charset="-122"/>
-                <a:cs typeface="Trebuchet MS" pitchFamily="34" charset="-120"/>
-              </a:rPr>
-              <a:t>Build the pipeline</a:t>
-            </a:r>
-            <a:endParaRPr lang="en-US" sz="1600" dirty="0"/>
-          </a:p>
-        </p:txBody>
-      </p:sp>
-      <p:sp>
-        <p:nvSpPr>
-          <p:cNvPr id="8" name="Text 5"/>
-          <p:cNvSpPr/>
-          <p:nvPr/>
-        </p:nvSpPr>
-        <p:spPr>
-          <a:xfrm>
-            <a:off x="868680" y="3200400"/>
-            <a:ext cx="2194560" cy="822960"/>
-          </a:xfrm>
-          <a:prstGeom prst="rect">
-            <a:avLst/>
-          </a:prstGeom>
-          <a:noFill/>
-          <a:ln/>
-        </p:spPr>
-        <p:txBody>
-          <a:bodyPr wrap="square" lIns="0" tIns="0" rIns="0" bIns="0" rtlCol="0" anchor="ctr"/>
-          <a:lstStyle/>
-          <a:p>
-            <a:pPr algn="ctr" indent="0" marL="0">
-              <a:buNone/>
-            </a:pPr>
-            <a:r>
-              <a:rPr lang="en-US" sz="1200" dirty="0">
-                <a:solidFill>
-                  <a:srgbClr val="94A3B8"/>
-                </a:solidFill>
-                <a:latin typeface="Calibri" pitchFamily="34" charset="0"/>
-                <a:ea typeface="Calibri" pitchFamily="34" charset="-122"/>
-                <a:cs typeface="Calibri" pitchFamily="34" charset="-120"/>
-              </a:rPr>
-              <a:t>Chunk the tender PDF,</a:t>
-            </a:r>
-            <a:endParaRPr lang="en-US" sz="1200" dirty="0"/>
-          </a:p>
-          <a:p>
-            <a:pPr algn="ctr" indent="0" marL="0">
-              <a:buNone/>
-            </a:pPr>
-            <a:r>
-              <a:rPr lang="en-US" sz="1200" dirty="0">
-                <a:solidFill>
-                  <a:srgbClr val="94A3B8"/>
-                </a:solidFill>
-                <a:latin typeface="Calibri" pitchFamily="34" charset="0"/>
-                <a:ea typeface="Calibri" pitchFamily="34" charset="-122"/>
-                <a:cs typeface="Calibri" pitchFamily="34" charset="-120"/>
-              </a:rPr>
-              <a:t>embed with OpenAI /</a:t>
-            </a:r>
-            <a:endParaRPr lang="en-US" sz="1200" dirty="0"/>
-          </a:p>
-          <a:p>
-            <a:pPr algn="ctr" indent="0" marL="0">
-              <a:buNone/>
-            </a:pPr>
-            <a:r>
-              <a:rPr lang="en-US" sz="1200" dirty="0">
-                <a:solidFill>
-                  <a:srgbClr val="94A3B8"/>
-                </a:solidFill>
-                <a:latin typeface="Calibri" pitchFamily="34" charset="0"/>
-                <a:ea typeface="Calibri" pitchFamily="34" charset="-122"/>
-                <a:cs typeface="Calibri" pitchFamily="34" charset="-120"/>
-              </a:rPr>
-              <a:t>Sentence-BERT, store in</a:t>
-            </a:r>
-            <a:endParaRPr lang="en-US" sz="1200" dirty="0"/>
-          </a:p>
-          <a:p>
-            <a:pPr algn="ctr" indent="0" marL="0">
-              <a:buNone/>
-            </a:pPr>
-            <a:r>
-              <a:rPr lang="en-US" sz="1200" dirty="0">
-                <a:solidFill>
-                  <a:srgbClr val="94A3B8"/>
-                </a:solidFill>
-                <a:latin typeface="Calibri" pitchFamily="34" charset="0"/>
-                <a:ea typeface="Calibri" pitchFamily="34" charset="-122"/>
-                <a:cs typeface="Calibri" pitchFamily="34" charset="-120"/>
-              </a:rPr>
-              <a:t>ChromaDB.</a:t>
-            </a:r>
-            <a:endParaRPr lang="en-US" sz="1200" dirty="0"/>
-          </a:p>
-        </p:txBody>
-      </p:sp>
-      <p:pic>
-        <p:nvPicPr>
-          <p:cNvPr id="9" name="Image 1" descr="preencoded.png">    </p:cNvPr>
-          <p:cNvPicPr>
-            <a:picLocks noChangeAspect="1"/>
-          </p:cNvPicPr>
-          <p:nvPr/>
-        </p:nvPicPr>
-        <p:blipFill>
-          <a:blip r:embed="rId2"/>
-          <a:stretch>
-            <a:fillRect/>
-          </a:stretch>
-        </p:blipFill>
-        <p:spPr>
-          <a:xfrm>
-            <a:off x="3246120" y="2240280"/>
-            <a:ext cx="274320" cy="274320"/>
-          </a:xfrm>
-          <a:prstGeom prst="rect">
-            <a:avLst/>
-          </a:prstGeom>
-        </p:spPr>
-      </p:pic>
-      <p:sp>
-        <p:nvSpPr>
-          <p:cNvPr id="10" name="Shape 6"/>
-          <p:cNvSpPr/>
-          <p:nvPr/>
-        </p:nvSpPr>
-        <p:spPr>
-          <a:xfrm>
-            <a:off x="3566160" y="1188720"/>
-            <a:ext cx="2468880" cy="2926080"/>
-          </a:xfrm>
-          <a:prstGeom prst="rect">
-            <a:avLst/>
-          </a:prstGeom>
-          <a:solidFill>
-            <a:srgbClr val="1E293B"/>
-          </a:solidFill>
-          <a:ln/>
-          <a:effectLst>
-            <a:outerShdw sx="100000" sy="100000" kx="0" ky="0" algn="bl" rotWithShape="0" blurRad="76200" dist="25400" dir="8100000">
-              <a:srgbClr val="000000">
-                <a:alpha val="12000"/>
-              </a:srgbClr>
-            </a:outerShdw>
-          </a:effectLst>
-        </p:spPr>
-      </p:sp>
-      <p:sp>
-        <p:nvSpPr>
-          <p:cNvPr id="11" name="Shape 7"/>
-          <p:cNvSpPr/>
-          <p:nvPr/>
-        </p:nvSpPr>
-        <p:spPr>
-          <a:xfrm>
-            <a:off x="4434840" y="1371600"/>
-            <a:ext cx="548640" cy="548640"/>
-          </a:xfrm>
-          <a:prstGeom prst="ellipse">
-            <a:avLst/>
-          </a:prstGeom>
-          <a:solidFill>
-            <a:srgbClr val="6366F1"/>
-          </a:solidFill>
-          <a:ln/>
-        </p:spPr>
-      </p:sp>
-      <p:sp>
-        <p:nvSpPr>
-          <p:cNvPr id="12" name="Text 8"/>
-          <p:cNvSpPr/>
-          <p:nvPr/>
-        </p:nvSpPr>
-        <p:spPr>
-          <a:xfrm>
-            <a:off x="4434840" y="1371600"/>
-            <a:ext cx="548640" cy="548640"/>
-          </a:xfrm>
-          <a:prstGeom prst="rect">
-            <a:avLst/>
-          </a:prstGeom>
-          <a:noFill/>
-          <a:ln/>
-        </p:spPr>
-        <p:txBody>
-          <a:bodyPr wrap="square" lIns="0" tIns="0" rIns="0" bIns="0" rtlCol="0" anchor="ctr"/>
-          <a:lstStyle/>
-          <a:p>
-            <a:pPr algn="ctr" indent="0" marL="0">
-              <a:buNone/>
-            </a:pPr>
-            <a:r>
-              <a:rPr lang="en-US" sz="2000" dirty="0">
-                <a:solidFill>
-                  <a:srgbClr val="FFFFFF"/>
-                </a:solidFill>
-                <a:latin typeface="Trebuchet MS" pitchFamily="34" charset="0"/>
-                <a:ea typeface="Trebuchet MS" pitchFamily="34" charset="-122"/>
-                <a:cs typeface="Trebuchet MS" pitchFamily="34" charset="-120"/>
-              </a:rPr>
-              <a:t>2</a:t>
-            </a:r>
-            <a:endParaRPr lang="en-US" sz="2000" dirty="0"/>
-          </a:p>
-        </p:txBody>
-      </p:sp>
-      <p:pic>
-        <p:nvPicPr>
-          <p:cNvPr id="13" name="Image 2" descr="preencoded.png">    </p:cNvPr>
+          <p:cNvPr id="6" name="Image 0" descr="preencoded.png"/>
           <p:cNvPicPr>
             <a:picLocks noChangeAspect="1"/>
           </p:cNvPicPr>
@@ -3805,7 +3309,7 @@
         </p:blipFill>
         <p:spPr>
           <a:xfrm>
-            <a:off x="4434840" y="2103120"/>
+            <a:off x="1600200" y="2103120"/>
             <a:ext cx="548640" cy="548640"/>
           </a:xfrm>
           <a:prstGeom prst="rect">
@@ -3815,13 +3319,13 @@
       </p:pic>
       <p:sp>
         <p:nvSpPr>
-          <p:cNvPr id="14" name="Text 9"/>
-          <p:cNvSpPr/>
-          <p:nvPr/>
-        </p:nvSpPr>
-        <p:spPr>
-          <a:xfrm>
-            <a:off x="3566160" y="2788920"/>
+          <p:cNvPr id="7" name="Text 4"/>
+          <p:cNvSpPr/>
+          <p:nvPr/>
+        </p:nvSpPr>
+        <p:spPr>
+          <a:xfrm>
+            <a:off x="731520" y="2788920"/>
             <a:ext cx="2468880" cy="365760"/>
           </a:xfrm>
           <a:prstGeom prst="rect">
@@ -3834,7 +3338,7 @@
           <a:bodyPr wrap="square" lIns="0" tIns="0" rIns="0" bIns="0" rtlCol="0" anchor="ctr"/>
           <a:lstStyle/>
           <a:p>
-            <a:pPr algn="ctr" indent="0" marL="0">
+            <a:pPr marL="0" indent="0" algn="ctr">
               <a:buNone/>
             </a:pPr>
             <a:r>
@@ -3846,7 +3350,7 @@
                 <a:ea typeface="Trebuchet MS" pitchFamily="34" charset="-122"/>
                 <a:cs typeface="Trebuchet MS" pitchFamily="34" charset="-120"/>
               </a:rPr>
-              <a:t>Wire up the chat</a:t>
+              <a:t>Build the pipeline</a:t>
             </a:r>
             <a:endParaRPr lang="en-US" sz="1600" dirty="0"/>
           </a:p>
@@ -3854,13 +3358,13 @@
       </p:sp>
       <p:sp>
         <p:nvSpPr>
-          <p:cNvPr id="15" name="Text 10"/>
-          <p:cNvSpPr/>
-          <p:nvPr/>
-        </p:nvSpPr>
-        <p:spPr>
-          <a:xfrm>
-            <a:off x="3703320" y="3200400"/>
+          <p:cNvPr id="8" name="Text 5"/>
+          <p:cNvSpPr/>
+          <p:nvPr/>
+        </p:nvSpPr>
+        <p:spPr>
+          <a:xfrm>
+            <a:off x="868680" y="3200400"/>
             <a:ext cx="2194560" cy="822960"/>
           </a:xfrm>
           <a:prstGeom prst="rect">
@@ -3873,7 +3377,7 @@
           <a:bodyPr wrap="square" lIns="0" tIns="0" rIns="0" bIns="0" rtlCol="0" anchor="ctr"/>
           <a:lstStyle/>
           <a:p>
-            <a:pPr algn="ctr" indent="0" marL="0">
+            <a:pPr marL="0" indent="0" algn="ctr">
               <a:buNone/>
             </a:pPr>
             <a:r>
@@ -3885,12 +3389,12 @@
                 <a:ea typeface="Calibri" pitchFamily="34" charset="-122"/>
                 <a:cs typeface="Calibri" pitchFamily="34" charset="-120"/>
               </a:rPr>
-              <a:t>Implement run_rag_pipeline()</a:t>
+              <a:t>Chunk the tender PDF,</a:t>
             </a:r>
             <a:endParaRPr lang="en-US" sz="1200" dirty="0"/>
           </a:p>
           <a:p>
-            <a:pPr algn="ctr" indent="0" marL="0">
+            <a:pPr marL="0" indent="0" algn="ctr">
               <a:buNone/>
             </a:pPr>
             <a:r>
@@ -3902,12 +3406,12 @@
                 <a:ea typeface="Calibri" pitchFamily="34" charset="-122"/>
                 <a:cs typeface="Calibri" pitchFamily="34" charset="-120"/>
               </a:rPr>
-              <a:t>using LangChain. Query +</a:t>
+              <a:t>embed with OpenAI /</a:t>
             </a:r>
             <a:endParaRPr lang="en-US" sz="1200" dirty="0"/>
           </a:p>
           <a:p>
-            <a:pPr algn="ctr" indent="0" marL="0">
+            <a:pPr marL="0" indent="0" algn="ctr">
               <a:buNone/>
             </a:pPr>
             <a:r>
@@ -3919,12 +3423,12 @@
                 <a:ea typeface="Calibri" pitchFamily="34" charset="-122"/>
                 <a:cs typeface="Calibri" pitchFamily="34" charset="-120"/>
               </a:rPr>
-              <a:t>retrieve + generate with</a:t>
+              <a:t>Sentence-BERT, store in</a:t>
             </a:r>
             <a:endParaRPr lang="en-US" sz="1200" dirty="0"/>
           </a:p>
           <a:p>
-            <a:pPr algn="ctr" indent="0" marL="0">
+            <a:pPr marL="0" indent="0" algn="ctr">
               <a:buNone/>
             </a:pPr>
             <a:r>
@@ -3936,7 +3440,7 @@
                 <a:ea typeface="Calibri" pitchFamily="34" charset="-122"/>
                 <a:cs typeface="Calibri" pitchFamily="34" charset="-120"/>
               </a:rPr>
-              <a:t>an LLM.</a:t>
+              <a:t>ChromaDB.</a:t>
             </a:r>
             <a:endParaRPr lang="en-US" sz="1200" dirty="0"/>
           </a:p>
@@ -3944,7 +3448,7 @@
       </p:sp>
       <p:pic>
         <p:nvPicPr>
-          <p:cNvPr id="16" name="Image 3" descr="preencoded.png">    </p:cNvPr>
+          <p:cNvPr id="9" name="Image 1" descr="preencoded.png"/>
           <p:cNvPicPr>
             <a:picLocks noChangeAspect="1"/>
           </p:cNvPicPr>
@@ -3958,7 +3462,7 @@
         </p:blipFill>
         <p:spPr>
           <a:xfrm>
-            <a:off x="6080760" y="2240280"/>
+            <a:off x="3246120" y="2240280"/>
             <a:ext cx="274320" cy="274320"/>
           </a:xfrm>
           <a:prstGeom prst="rect">
@@ -3968,13 +3472,13 @@
       </p:pic>
       <p:sp>
         <p:nvSpPr>
-          <p:cNvPr id="17" name="Shape 11"/>
-          <p:cNvSpPr/>
-          <p:nvPr/>
-        </p:nvSpPr>
-        <p:spPr>
-          <a:xfrm>
-            <a:off x="6400800" y="1188720"/>
+          <p:cNvPr id="10" name="Shape 6"/>
+          <p:cNvSpPr/>
+          <p:nvPr/>
+        </p:nvSpPr>
+        <p:spPr>
+          <a:xfrm>
+            <a:off x="3566160" y="1188720"/>
             <a:ext cx="2468880" cy="2926080"/>
           </a:xfrm>
           <a:prstGeom prst="rect">
@@ -3985,7 +3489,7 @@
           </a:solidFill>
           <a:ln/>
           <a:effectLst>
-            <a:outerShdw sx="100000" sy="100000" kx="0" ky="0" algn="bl" rotWithShape="0" blurRad="76200" dist="25400" dir="8100000">
+            <a:outerShdw blurRad="76200" dist="25400" dir="8100000" algn="bl" rotWithShape="0">
               <a:srgbClr val="000000">
                 <a:alpha val="12000"/>
               </a:srgbClr>
@@ -3995,13 +3499,13 @@
       </p:sp>
       <p:sp>
         <p:nvSpPr>
-          <p:cNvPr id="18" name="Shape 12"/>
-          <p:cNvSpPr/>
-          <p:nvPr/>
-        </p:nvSpPr>
-        <p:spPr>
-          <a:xfrm>
-            <a:off x="7269480" y="1371600"/>
+          <p:cNvPr id="11" name="Shape 7"/>
+          <p:cNvSpPr/>
+          <p:nvPr/>
+        </p:nvSpPr>
+        <p:spPr>
+          <a:xfrm>
+            <a:off x="4434840" y="1371600"/>
             <a:ext cx="548640" cy="548640"/>
           </a:xfrm>
           <a:prstGeom prst="ellipse">
@@ -4015,13 +3519,13 @@
       </p:sp>
       <p:sp>
         <p:nvSpPr>
-          <p:cNvPr id="19" name="Text 13"/>
-          <p:cNvSpPr/>
-          <p:nvPr/>
-        </p:nvSpPr>
-        <p:spPr>
-          <a:xfrm>
-            <a:off x="7269480" y="1371600"/>
+          <p:cNvPr id="12" name="Text 8"/>
+          <p:cNvSpPr/>
+          <p:nvPr/>
+        </p:nvSpPr>
+        <p:spPr>
+          <a:xfrm>
+            <a:off x="4434840" y="1371600"/>
             <a:ext cx="548640" cy="548640"/>
           </a:xfrm>
           <a:prstGeom prst="rect">
@@ -4034,7 +3538,7 @@
           <a:bodyPr wrap="square" lIns="0" tIns="0" rIns="0" bIns="0" rtlCol="0" anchor="ctr"/>
           <a:lstStyle/>
           <a:p>
-            <a:pPr algn="ctr" indent="0" marL="0">
+            <a:pPr marL="0" indent="0" algn="ctr">
               <a:buNone/>
             </a:pPr>
             <a:r>
@@ -4046,7 +3550,7 @@
                 <a:ea typeface="Trebuchet MS" pitchFamily="34" charset="-122"/>
                 <a:cs typeface="Trebuchet MS" pitchFamily="34" charset="-120"/>
               </a:rPr>
-              <a:t>3</a:t>
+              <a:t>2</a:t>
             </a:r>
             <a:endParaRPr lang="en-US" sz="2000" dirty="0"/>
           </a:p>
@@ -4054,7 +3558,7 @@
       </p:sp>
       <p:pic>
         <p:nvPicPr>
-          <p:cNvPr id="20" name="Image 4" descr="preencoded.png">    </p:cNvPr>
+          <p:cNvPr id="13" name="Image 2" descr="preencoded.png"/>
           <p:cNvPicPr>
             <a:picLocks noChangeAspect="1"/>
           </p:cNvPicPr>
@@ -4068,7 +3572,7 @@
         </p:blipFill>
         <p:spPr>
           <a:xfrm>
-            <a:off x="7269480" y="2103120"/>
+            <a:off x="4434840" y="2103120"/>
             <a:ext cx="548640" cy="548640"/>
           </a:xfrm>
           <a:prstGeom prst="rect">
@@ -4078,13 +3582,13 @@
       </p:pic>
       <p:sp>
         <p:nvSpPr>
-          <p:cNvPr id="21" name="Text 14"/>
-          <p:cNvSpPr/>
-          <p:nvPr/>
-        </p:nvSpPr>
-        <p:spPr>
-          <a:xfrm>
-            <a:off x="6400800" y="2788920"/>
+          <p:cNvPr id="14" name="Text 9"/>
+          <p:cNvSpPr/>
+          <p:nvPr/>
+        </p:nvSpPr>
+        <p:spPr>
+          <a:xfrm>
+            <a:off x="3566160" y="2788920"/>
             <a:ext cx="2468880" cy="365760"/>
           </a:xfrm>
           <a:prstGeom prst="rect">
@@ -4097,7 +3601,7 @@
           <a:bodyPr wrap="square" lIns="0" tIns="0" rIns="0" bIns="0" rtlCol="0" anchor="ctr"/>
           <a:lstStyle/>
           <a:p>
-            <a:pPr algn="ctr" indent="0" marL="0">
+            <a:pPr marL="0" indent="0" algn="ctr">
               <a:buNone/>
             </a:pPr>
             <a:r>
@@ -4109,7 +3613,7 @@
                 <a:ea typeface="Trebuchet MS" pitchFamily="34" charset="-122"/>
                 <a:cs typeface="Trebuchet MS" pitchFamily="34" charset="-120"/>
               </a:rPr>
-              <a:t>Add citations</a:t>
+              <a:t>Wire up the chat</a:t>
             </a:r>
             <a:endParaRPr lang="en-US" sz="1600" dirty="0"/>
           </a:p>
@@ -4117,13 +3621,13 @@
       </p:sp>
       <p:sp>
         <p:nvSpPr>
-          <p:cNvPr id="22" name="Text 15"/>
-          <p:cNvSpPr/>
-          <p:nvPr/>
-        </p:nvSpPr>
-        <p:spPr>
-          <a:xfrm>
-            <a:off x="6537960" y="3200400"/>
+          <p:cNvPr id="15" name="Text 10"/>
+          <p:cNvSpPr/>
+          <p:nvPr/>
+        </p:nvSpPr>
+        <p:spPr>
+          <a:xfrm>
+            <a:off x="3703320" y="3200400"/>
             <a:ext cx="2194560" cy="822960"/>
           </a:xfrm>
           <a:prstGeom prst="rect">
@@ -4136,7 +3640,7 @@
           <a:bodyPr wrap="square" lIns="0" tIns="0" rIns="0" bIns="0" rtlCol="0" anchor="ctr"/>
           <a:lstStyle/>
           <a:p>
-            <a:pPr algn="ctr" indent="0" marL="0">
+            <a:pPr marL="0" indent="0" algn="ctr">
               <a:buNone/>
             </a:pPr>
             <a:r>
@@ -4148,12 +3652,12 @@
                 <a:ea typeface="Calibri" pitchFamily="34" charset="-122"/>
                 <a:cs typeface="Calibri" pitchFamily="34" charset="-120"/>
               </a:rPr>
-              <a:t>Force every answer to include</a:t>
+              <a:t>Implement run_rag_pipeline()</a:t>
             </a:r>
             <a:endParaRPr lang="en-US" sz="1200" dirty="0"/>
           </a:p>
           <a:p>
-            <a:pPr algn="ctr" indent="0" marL="0">
+            <a:pPr marL="0" indent="0" algn="ctr">
               <a:buNone/>
             </a:pPr>
             <a:r>
@@ -4165,12 +3669,12 @@
                 <a:ea typeface="Calibri" pitchFamily="34" charset="-122"/>
                 <a:cs typeface="Calibri" pitchFamily="34" charset="-120"/>
               </a:rPr>
-              <a:t>"Source: pg. X, Clause Y."</a:t>
+              <a:t>using LangChain. Query +</a:t>
             </a:r>
             <a:endParaRPr lang="en-US" sz="1200" dirty="0"/>
           </a:p>
           <a:p>
-            <a:pPr algn="ctr" indent="0" marL="0">
+            <a:pPr marL="0" indent="0" algn="ctr">
               <a:buNone/>
             </a:pPr>
             <a:r>
@@ -4182,12 +3686,12 @@
                 <a:ea typeface="Calibri" pitchFamily="34" charset="-122"/>
                 <a:cs typeface="Calibri" pitchFamily="34" charset="-120"/>
               </a:rPr>
-              <a:t>Make it a clickable link</a:t>
+              <a:t>retrieve + generate with</a:t>
             </a:r>
             <a:endParaRPr lang="en-US" sz="1200" dirty="0"/>
           </a:p>
           <a:p>
-            <a:pPr algn="ctr" indent="0" marL="0">
+            <a:pPr marL="0" indent="0" algn="ctr">
               <a:buNone/>
             </a:pPr>
             <a:r>
@@ -4199,35 +3703,125 @@
                 <a:ea typeface="Calibri" pitchFamily="34" charset="-122"/>
                 <a:cs typeface="Calibri" pitchFamily="34" charset="-120"/>
               </a:rPr>
-              <a:t>to the original PDF page.</a:t>
+              <a:t>an LLM.</a:t>
             </a:r>
             <a:endParaRPr lang="en-US" sz="1200" dirty="0"/>
           </a:p>
         </p:txBody>
-      </p:sp>
-      <p:sp>
-        <p:nvSpPr>
-          <p:cNvPr id="23" name="Shape 16"/>
-          <p:cNvSpPr/>
-          <p:nvPr/>
-        </p:nvSpPr>
-        <p:spPr>
-          <a:xfrm>
-            <a:off x="731520" y="4389120"/>
-            <a:ext cx="7680960" cy="502920"/>
-          </a:xfrm>
-          <a:prstGeom prst="rect">
-            <a:avLst/>
-          </a:prstGeom>
-          <a:solidFill>
-            <a:srgbClr val="FFFBEB"/>
-          </a:solidFill>
-          <a:ln/>
-        </p:spPr>
       </p:sp>
       <p:pic>
         <p:nvPicPr>
-          <p:cNvPr id="24" name="Image 5" descr="preencoded.png">    </p:cNvPr>
+          <p:cNvPr id="16" name="Image 3" descr="preencoded.png"/>
+          <p:cNvPicPr>
+            <a:picLocks noChangeAspect="1"/>
+          </p:cNvPicPr>
+          <p:nvPr/>
+        </p:nvPicPr>
+        <p:blipFill>
+          <a:blip r:embed="rId4"/>
+          <a:stretch>
+            <a:fillRect/>
+          </a:stretch>
+        </p:blipFill>
+        <p:spPr>
+          <a:xfrm>
+            <a:off x="6080760" y="2240280"/>
+            <a:ext cx="274320" cy="274320"/>
+          </a:xfrm>
+          <a:prstGeom prst="rect">
+            <a:avLst/>
+          </a:prstGeom>
+        </p:spPr>
+      </p:pic>
+      <p:sp>
+        <p:nvSpPr>
+          <p:cNvPr id="17" name="Shape 11"/>
+          <p:cNvSpPr/>
+          <p:nvPr/>
+        </p:nvSpPr>
+        <p:spPr>
+          <a:xfrm>
+            <a:off x="6400800" y="1188720"/>
+            <a:ext cx="2468880" cy="2926080"/>
+          </a:xfrm>
+          <a:prstGeom prst="rect">
+            <a:avLst/>
+          </a:prstGeom>
+          <a:solidFill>
+            <a:srgbClr val="1E293B"/>
+          </a:solidFill>
+          <a:ln/>
+          <a:effectLst>
+            <a:outerShdw blurRad="76200" dist="25400" dir="8100000" algn="bl" rotWithShape="0">
+              <a:srgbClr val="000000">
+                <a:alpha val="12000"/>
+              </a:srgbClr>
+            </a:outerShdw>
+          </a:effectLst>
+        </p:spPr>
+      </p:sp>
+      <p:sp>
+        <p:nvSpPr>
+          <p:cNvPr id="18" name="Shape 12"/>
+          <p:cNvSpPr/>
+          <p:nvPr/>
+        </p:nvSpPr>
+        <p:spPr>
+          <a:xfrm>
+            <a:off x="7269480" y="1371600"/>
+            <a:ext cx="548640" cy="548640"/>
+          </a:xfrm>
+          <a:prstGeom prst="ellipse">
+            <a:avLst/>
+          </a:prstGeom>
+          <a:solidFill>
+            <a:srgbClr val="6366F1"/>
+          </a:solidFill>
+          <a:ln/>
+        </p:spPr>
+      </p:sp>
+      <p:sp>
+        <p:nvSpPr>
+          <p:cNvPr id="19" name="Text 13"/>
+          <p:cNvSpPr/>
+          <p:nvPr/>
+        </p:nvSpPr>
+        <p:spPr>
+          <a:xfrm>
+            <a:off x="7269480" y="1371600"/>
+            <a:ext cx="548640" cy="548640"/>
+          </a:xfrm>
+          <a:prstGeom prst="rect">
+            <a:avLst/>
+          </a:prstGeom>
+          <a:noFill/>
+          <a:ln/>
+        </p:spPr>
+        <p:txBody>
+          <a:bodyPr wrap="square" lIns="0" tIns="0" rIns="0" bIns="0" rtlCol="0" anchor="ctr"/>
+          <a:lstStyle/>
+          <a:p>
+            <a:pPr marL="0" indent="0" algn="ctr">
+              <a:buNone/>
+            </a:pPr>
+            <a:r>
+              <a:rPr lang="en-US" sz="2000" dirty="0">
+                <a:solidFill>
+                  <a:srgbClr val="FFFFFF"/>
+                </a:solidFill>
+                <a:latin typeface="Trebuchet MS" pitchFamily="34" charset="0"/>
+                <a:ea typeface="Trebuchet MS" pitchFamily="34" charset="-122"/>
+                <a:cs typeface="Trebuchet MS" pitchFamily="34" charset="-120"/>
+              </a:rPr>
+              <a:t>3</a:t>
+            </a:r>
+            <a:endParaRPr lang="en-US" sz="2000" dirty="0"/>
+          </a:p>
+        </p:txBody>
+      </p:sp>
+      <p:pic>
+        <p:nvPicPr>
+          <p:cNvPr id="20" name="Image 4" descr="preencoded.png"/>
           <p:cNvPicPr>
             <a:picLocks noChangeAspect="1"/>
           </p:cNvPicPr>
@@ -4241,6 +3835,179 @@
         </p:blipFill>
         <p:spPr>
           <a:xfrm>
+            <a:off x="7269480" y="2103120"/>
+            <a:ext cx="548640" cy="548640"/>
+          </a:xfrm>
+          <a:prstGeom prst="rect">
+            <a:avLst/>
+          </a:prstGeom>
+        </p:spPr>
+      </p:pic>
+      <p:sp>
+        <p:nvSpPr>
+          <p:cNvPr id="21" name="Text 14"/>
+          <p:cNvSpPr/>
+          <p:nvPr/>
+        </p:nvSpPr>
+        <p:spPr>
+          <a:xfrm>
+            <a:off x="6400800" y="2788920"/>
+            <a:ext cx="2468880" cy="365760"/>
+          </a:xfrm>
+          <a:prstGeom prst="rect">
+            <a:avLst/>
+          </a:prstGeom>
+          <a:noFill/>
+          <a:ln/>
+        </p:spPr>
+        <p:txBody>
+          <a:bodyPr wrap="square" lIns="0" tIns="0" rIns="0" bIns="0" rtlCol="0" anchor="ctr"/>
+          <a:lstStyle/>
+          <a:p>
+            <a:pPr marL="0" indent="0" algn="ctr">
+              <a:buNone/>
+            </a:pPr>
+            <a:r>
+              <a:rPr lang="en-US" sz="1600" b="1" dirty="0">
+                <a:solidFill>
+                  <a:srgbClr val="F97316"/>
+                </a:solidFill>
+                <a:latin typeface="Trebuchet MS" pitchFamily="34" charset="0"/>
+                <a:ea typeface="Trebuchet MS" pitchFamily="34" charset="-122"/>
+                <a:cs typeface="Trebuchet MS" pitchFamily="34" charset="-120"/>
+              </a:rPr>
+              <a:t>Add citations</a:t>
+            </a:r>
+            <a:endParaRPr lang="en-US" sz="1600" dirty="0"/>
+          </a:p>
+        </p:txBody>
+      </p:sp>
+      <p:sp>
+        <p:nvSpPr>
+          <p:cNvPr id="22" name="Text 15"/>
+          <p:cNvSpPr/>
+          <p:nvPr/>
+        </p:nvSpPr>
+        <p:spPr>
+          <a:xfrm>
+            <a:off x="6537960" y="3200400"/>
+            <a:ext cx="2194560" cy="822960"/>
+          </a:xfrm>
+          <a:prstGeom prst="rect">
+            <a:avLst/>
+          </a:prstGeom>
+          <a:noFill/>
+          <a:ln/>
+        </p:spPr>
+        <p:txBody>
+          <a:bodyPr wrap="square" lIns="0" tIns="0" rIns="0" bIns="0" rtlCol="0" anchor="ctr"/>
+          <a:lstStyle/>
+          <a:p>
+            <a:pPr marL="0" indent="0" algn="ctr">
+              <a:buNone/>
+            </a:pPr>
+            <a:r>
+              <a:rPr lang="en-US" sz="1200" dirty="0">
+                <a:solidFill>
+                  <a:srgbClr val="94A3B8"/>
+                </a:solidFill>
+                <a:latin typeface="Calibri" pitchFamily="34" charset="0"/>
+                <a:ea typeface="Calibri" pitchFamily="34" charset="-122"/>
+                <a:cs typeface="Calibri" pitchFamily="34" charset="-120"/>
+              </a:rPr>
+              <a:t>Force every answer to include</a:t>
+            </a:r>
+            <a:endParaRPr lang="en-US" sz="1200" dirty="0"/>
+          </a:p>
+          <a:p>
+            <a:pPr marL="0" indent="0" algn="ctr">
+              <a:buNone/>
+            </a:pPr>
+            <a:r>
+              <a:rPr lang="en-US" sz="1200" dirty="0">
+                <a:solidFill>
+                  <a:srgbClr val="94A3B8"/>
+                </a:solidFill>
+                <a:latin typeface="Calibri" pitchFamily="34" charset="0"/>
+                <a:ea typeface="Calibri" pitchFamily="34" charset="-122"/>
+                <a:cs typeface="Calibri" pitchFamily="34" charset="-120"/>
+              </a:rPr>
+              <a:t>"Source: pg. X, Clause Y."</a:t>
+            </a:r>
+            <a:endParaRPr lang="en-US" sz="1200" dirty="0"/>
+          </a:p>
+          <a:p>
+            <a:pPr marL="0" indent="0" algn="ctr">
+              <a:buNone/>
+            </a:pPr>
+            <a:r>
+              <a:rPr lang="en-US" sz="1200" dirty="0">
+                <a:solidFill>
+                  <a:srgbClr val="94A3B8"/>
+                </a:solidFill>
+                <a:latin typeface="Calibri" pitchFamily="34" charset="0"/>
+                <a:ea typeface="Calibri" pitchFamily="34" charset="-122"/>
+                <a:cs typeface="Calibri" pitchFamily="34" charset="-120"/>
+              </a:rPr>
+              <a:t>Make it a clickable link</a:t>
+            </a:r>
+            <a:endParaRPr lang="en-US" sz="1200" dirty="0"/>
+          </a:p>
+          <a:p>
+            <a:pPr marL="0" indent="0" algn="ctr">
+              <a:buNone/>
+            </a:pPr>
+            <a:r>
+              <a:rPr lang="en-US" sz="1200" dirty="0">
+                <a:solidFill>
+                  <a:srgbClr val="94A3B8"/>
+                </a:solidFill>
+                <a:latin typeface="Calibri" pitchFamily="34" charset="0"/>
+                <a:ea typeface="Calibri" pitchFamily="34" charset="-122"/>
+                <a:cs typeface="Calibri" pitchFamily="34" charset="-120"/>
+              </a:rPr>
+              <a:t>to the original PDF page.</a:t>
+            </a:r>
+            <a:endParaRPr lang="en-US" sz="1200" dirty="0"/>
+          </a:p>
+        </p:txBody>
+      </p:sp>
+      <p:sp>
+        <p:nvSpPr>
+          <p:cNvPr id="23" name="Shape 16"/>
+          <p:cNvSpPr/>
+          <p:nvPr/>
+        </p:nvSpPr>
+        <p:spPr>
+          <a:xfrm>
+            <a:off x="731520" y="4389120"/>
+            <a:ext cx="7680960" cy="502920"/>
+          </a:xfrm>
+          <a:prstGeom prst="rect">
+            <a:avLst/>
+          </a:prstGeom>
+          <a:solidFill>
+            <a:srgbClr val="FFFBEB"/>
+          </a:solidFill>
+          <a:ln/>
+        </p:spPr>
+      </p:sp>
+      <p:pic>
+        <p:nvPicPr>
+          <p:cNvPr id="24" name="Image 5" descr="preencoded.png"/>
+          <p:cNvPicPr>
+            <a:picLocks noChangeAspect="1"/>
+          </p:cNvPicPr>
+          <p:nvPr/>
+        </p:nvPicPr>
+        <p:blipFill>
+          <a:blip r:embed="rId7"/>
+          <a:stretch>
+            <a:fillRect/>
+          </a:stretch>
+        </p:blipFill>
+        <p:spPr>
+          <a:xfrm>
             <a:off x="914400" y="4462272"/>
             <a:ext cx="274320" cy="274320"/>
           </a:xfrm>
@@ -4270,7 +4037,7 @@
           <a:bodyPr wrap="square" lIns="0" tIns="0" rIns="0" bIns="0" rtlCol="0" anchor="ctr"/>
           <a:lstStyle/>
           <a:p>
-            <a:pPr indent="0" marL="0">
+            <a:pPr marL="0" indent="0">
               <a:buNone/>
             </a:pPr>
             <a:r>
@@ -4304,6 +4071,7 @@
         <a:solidFill>
           <a:srgbClr val="0F172A"/>
         </a:solidFill>
+        <a:effectLst/>
       </p:bgPr>
     </p:bg>
     <p:spTree>
@@ -4341,7 +4109,7 @@
           <a:bodyPr wrap="square" lIns="0" tIns="0" rIns="0" bIns="0" rtlCol="0" anchor="ctr"/>
           <a:lstStyle/>
           <a:p>
-            <a:pPr indent="0" marL="0">
+            <a:pPr marL="0" indent="0">
               <a:buNone/>
             </a:pPr>
             <a:r>
@@ -4380,7 +4148,7 @@
           <a:bodyPr wrap="square" lIns="0" tIns="0" rIns="0" bIns="0" rtlCol="0" anchor="ctr"/>
           <a:lstStyle/>
           <a:p>
-            <a:pPr indent="0" marL="0">
+            <a:pPr marL="0" indent="0">
               <a:lnSpc>
                 <a:spcPct val="130000"/>
               </a:lnSpc>
@@ -4400,7 +4168,7 @@
             <a:endParaRPr lang="en-US" sz="2800" dirty="0"/>
           </a:p>
           <a:p>
-            <a:pPr indent="0" marL="0">
+            <a:pPr marL="0" indent="0">
               <a:lnSpc>
                 <a:spcPct val="130000"/>
               </a:lnSpc>
@@ -4420,7 +4188,7 @@
             <a:endParaRPr lang="en-US" sz="2800" dirty="0"/>
           </a:p>
           <a:p>
-            <a:pPr indent="0" marL="0">
+            <a:pPr marL="0" indent="0">
               <a:lnSpc>
                 <a:spcPct val="130000"/>
               </a:lnSpc>
@@ -4462,7 +4230,7 @@
           <a:bodyPr wrap="square" lIns="0" tIns="0" rIns="0" bIns="0" rtlCol="0" anchor="ctr"/>
           <a:lstStyle/>
           <a:p>
-            <a:pPr indent="0" marL="0">
+            <a:pPr marL="0" indent="0">
               <a:buNone/>
             </a:pPr>
             <a:r>
@@ -4479,7 +4247,7 @@
             <a:endParaRPr lang="en-US" sz="1600" dirty="0"/>
           </a:p>
           <a:p>
-            <a:pPr indent="0" marL="0">
+            <a:pPr marL="0" indent="0">
               <a:buNone/>
             </a:pPr>
             <a:r>
@@ -4516,7 +4284,7 @@
           </a:solidFill>
           <a:ln/>
           <a:effectLst>
-            <a:outerShdw sx="100000" sy="100000" kx="0" ky="0" algn="bl" rotWithShape="0" blurRad="76200" dist="25400" dir="8100000">
+            <a:outerShdw blurRad="76200" dist="25400" dir="8100000" algn="bl" rotWithShape="0">
               <a:srgbClr val="000000">
                 <a:alpha val="12000"/>
               </a:srgbClr>
@@ -4526,14 +4294,14 @@
       </p:sp>
       <p:pic>
         <p:nvPicPr>
-          <p:cNvPr id="6" name="Image 0" descr="preencoded.png">    </p:cNvPr>
+          <p:cNvPr id="6" name="Image 0" descr="preencoded.png"/>
           <p:cNvPicPr>
             <a:picLocks noChangeAspect="1"/>
           </p:cNvPicPr>
           <p:nvPr/>
         </p:nvPicPr>
         <p:blipFill>
-          <a:blip r:embed="rId1"/>
+          <a:blip r:embed="rId3"/>
           <a:stretch>
             <a:fillRect/>
           </a:stretch>
@@ -4569,7 +4337,7 @@
           <a:bodyPr wrap="square" lIns="0" tIns="0" rIns="0" bIns="0" rtlCol="0" anchor="ctr"/>
           <a:lstStyle/>
           <a:p>
-            <a:pPr indent="0" marL="0">
+            <a:pPr marL="0" indent="0">
               <a:buNone/>
             </a:pPr>
             <a:r>
@@ -4606,7 +4374,7 @@
           </a:solidFill>
           <a:ln/>
           <a:effectLst>
-            <a:outerShdw sx="100000" sy="100000" kx="0" ky="0" algn="bl" rotWithShape="0" blurRad="76200" dist="25400" dir="8100000">
+            <a:outerShdw blurRad="76200" dist="25400" dir="8100000" algn="bl" rotWithShape="0">
               <a:srgbClr val="000000">
                 <a:alpha val="12000"/>
               </a:srgbClr>
@@ -4616,14 +4384,14 @@
       </p:sp>
       <p:pic>
         <p:nvPicPr>
-          <p:cNvPr id="9" name="Image 1" descr="preencoded.png">    </p:cNvPr>
+          <p:cNvPr id="9" name="Image 1" descr="preencoded.png"/>
           <p:cNvPicPr>
             <a:picLocks noChangeAspect="1"/>
           </p:cNvPicPr>
           <p:nvPr/>
         </p:nvPicPr>
         <p:blipFill>
-          <a:blip r:embed="rId2"/>
+          <a:blip r:embed="rId4"/>
           <a:stretch>
             <a:fillRect/>
           </a:stretch>
@@ -4659,7 +4427,7 @@
           <a:bodyPr wrap="square" lIns="0" tIns="0" rIns="0" bIns="0" rtlCol="0" anchor="ctr"/>
           <a:lstStyle/>
           <a:p>
-            <a:pPr indent="0" marL="0">
+            <a:pPr marL="0" indent="0">
               <a:buNone/>
             </a:pPr>
             <a:r>
@@ -4718,7 +4486,7 @@
           <a:bodyPr wrap="square" lIns="0" tIns="0" rIns="0" bIns="0" rtlCol="0" anchor="ctr"/>
           <a:lstStyle/>
           <a:p>
-            <a:pPr indent="0" marL="0">
+            <a:pPr marL="0" indent="0">
               <a:buNone/>
             </a:pPr>
             <a:r>
@@ -4752,6 +4520,7 @@
         <a:solidFill>
           <a:srgbClr val="0F172A"/>
         </a:solidFill>
+        <a:effectLst/>
       </p:bgPr>
     </p:bg>
     <p:spTree>
@@ -4789,7 +4558,7 @@
           <a:bodyPr wrap="square" lIns="0" tIns="0" rIns="0" bIns="0" rtlCol="0" anchor="ctr"/>
           <a:lstStyle/>
           <a:p>
-            <a:pPr indent="0" marL="0">
+            <a:pPr marL="0" indent="0">
               <a:buNone/>
             </a:pPr>
             <a:r>
@@ -4828,7 +4597,7 @@
           <a:bodyPr wrap="square" lIns="0" tIns="0" rIns="0" bIns="0" rtlCol="0" anchor="ctr"/>
           <a:lstStyle/>
           <a:p>
-            <a:pPr indent="0" marL="0">
+            <a:pPr marL="0" indent="0">
               <a:buNone/>
             </a:pPr>
             <a:r>
@@ -4865,7 +4634,7 @@
           </a:solidFill>
           <a:ln/>
           <a:effectLst>
-            <a:outerShdw sx="100000" sy="100000" kx="0" ky="0" algn="bl" rotWithShape="0" blurRad="76200" dist="25400" dir="8100000">
+            <a:outerShdw blurRad="76200" dist="25400" dir="8100000" algn="bl" rotWithShape="0">
               <a:srgbClr val="000000">
                 <a:alpha val="12000"/>
               </a:srgbClr>
@@ -4875,367 +4644,7 @@
       </p:sp>
       <p:pic>
         <p:nvPicPr>
-          <p:cNvPr id="5" name="Image 0" descr="preencoded.png">    </p:cNvPr>
-          <p:cNvPicPr>
-            <a:picLocks noChangeAspect="1"/>
-          </p:cNvPicPr>
-          <p:nvPr/>
-        </p:nvPicPr>
-        <p:blipFill>
-          <a:blip r:embed="rId1"/>
-          <a:stretch>
-            <a:fillRect/>
-          </a:stretch>
-        </p:blipFill>
-        <p:spPr>
-          <a:xfrm>
-            <a:off x="1554480" y="1965960"/>
-            <a:ext cx="640080" cy="640080"/>
-          </a:xfrm>
-          <a:prstGeom prst="rect">
-            <a:avLst/>
-          </a:prstGeom>
-        </p:spPr>
-      </p:pic>
-      <p:sp>
-        <p:nvSpPr>
-          <p:cNvPr id="6" name="Text 3"/>
-          <p:cNvSpPr/>
-          <p:nvPr/>
-        </p:nvSpPr>
-        <p:spPr>
-          <a:xfrm>
-            <a:off x="731520" y="2743200"/>
-            <a:ext cx="2468880" cy="365760"/>
-          </a:xfrm>
-          <a:prstGeom prst="rect">
-            <a:avLst/>
-          </a:prstGeom>
-          <a:noFill/>
-          <a:ln/>
-        </p:spPr>
-        <p:txBody>
-          <a:bodyPr wrap="square" lIns="0" tIns="0" rIns="0" bIns="0" rtlCol="0" anchor="ctr"/>
-          <a:lstStyle/>
-          <a:p>
-            <a:pPr algn="ctr" indent="0" marL="0">
-              <a:buNone/>
-            </a:pPr>
-            <a:r>
-              <a:rPr lang="en-US" sz="1600" b="1" dirty="0">
-                <a:solidFill>
-                  <a:srgbClr val="EF4444"/>
-                </a:solidFill>
-                <a:latin typeface="Trebuchet MS" pitchFamily="34" charset="0"/>
-                <a:ea typeface="Trebuchet MS" pitchFamily="34" charset="-122"/>
-                <a:cs typeface="Trebuchet MS" pitchFamily="34" charset="-120"/>
-              </a:rPr>
-              <a:t>Volume</a:t>
-            </a:r>
-            <a:endParaRPr lang="en-US" sz="1600" dirty="0"/>
-          </a:p>
-        </p:txBody>
-      </p:sp>
-      <p:sp>
-        <p:nvSpPr>
-          <p:cNvPr id="7" name="Text 4"/>
-          <p:cNvSpPr/>
-          <p:nvPr/>
-        </p:nvSpPr>
-        <p:spPr>
-          <a:xfrm>
-            <a:off x="914400" y="3154680"/>
-            <a:ext cx="2103120" cy="914400"/>
-          </a:xfrm>
-          <a:prstGeom prst="rect">
-            <a:avLst/>
-          </a:prstGeom>
-          <a:noFill/>
-          <a:ln/>
-        </p:spPr>
-        <p:txBody>
-          <a:bodyPr wrap="square" lIns="0" tIns="0" rIns="0" bIns="0" rtlCol="0" anchor="ctr"/>
-          <a:lstStyle/>
-          <a:p>
-            <a:pPr algn="ctr" indent="0" marL="0">
-              <a:buNone/>
-            </a:pPr>
-            <a:r>
-              <a:rPr lang="en-US" sz="1300" dirty="0">
-                <a:solidFill>
-                  <a:srgbClr val="94A3B8"/>
-                </a:solidFill>
-                <a:latin typeface="Calibri" pitchFamily="34" charset="0"/>
-                <a:ea typeface="Calibri" pitchFamily="34" charset="-122"/>
-                <a:cs typeface="Calibri" pitchFamily="34" charset="-120"/>
-              </a:rPr>
-              <a:t>500–1,000 pages per tender.</a:t>
-            </a:r>
-            <a:endParaRPr lang="en-US" sz="1300" dirty="0"/>
-          </a:p>
-          <a:p>
-            <a:pPr algn="ctr" indent="0" marL="0">
-              <a:buNone/>
-            </a:pPr>
-            <a:r>
-              <a:rPr lang="en-US" sz="1300" dirty="0">
-                <a:solidFill>
-                  <a:srgbClr val="94A3B8"/>
-                </a:solidFill>
-                <a:latin typeface="Calibri" pitchFamily="34" charset="0"/>
-                <a:ea typeface="Calibri" pitchFamily="34" charset="-122"/>
-                <a:cs typeface="Calibri" pitchFamily="34" charset="-120"/>
-              </a:rPr>
-              <a:t>LD clauses, payment terms,</a:t>
-            </a:r>
-            <a:endParaRPr lang="en-US" sz="1300" dirty="0"/>
-          </a:p>
-          <a:p>
-            <a:pPr algn="ctr" indent="0" marL="0">
-              <a:buNone/>
-            </a:pPr>
-            <a:r>
-              <a:rPr lang="en-US" sz="1300" dirty="0">
-                <a:solidFill>
-                  <a:srgbClr val="94A3B8"/>
-                </a:solidFill>
-                <a:latin typeface="Calibri" pitchFamily="34" charset="0"/>
-                <a:ea typeface="Calibri" pitchFamily="34" charset="-122"/>
-                <a:cs typeface="Calibri" pitchFamily="34" charset="-120"/>
-              </a:rPr>
-              <a:t>technical specs buried deep</a:t>
-            </a:r>
-            <a:endParaRPr lang="en-US" sz="1300" dirty="0"/>
-          </a:p>
-          <a:p>
-            <a:pPr algn="ctr" indent="0" marL="0">
-              <a:buNone/>
-            </a:pPr>
-            <a:r>
-              <a:rPr lang="en-US" sz="1300" dirty="0">
-                <a:solidFill>
-                  <a:srgbClr val="94A3B8"/>
-                </a:solidFill>
-                <a:latin typeface="Calibri" pitchFamily="34" charset="0"/>
-                <a:ea typeface="Calibri" pitchFamily="34" charset="-122"/>
-                <a:cs typeface="Calibri" pitchFamily="34" charset="-120"/>
-              </a:rPr>
-              <a:t>in dense legalese.</a:t>
-            </a:r>
-            <a:endParaRPr lang="en-US" sz="1300" dirty="0"/>
-          </a:p>
-        </p:txBody>
-      </p:sp>
-      <p:sp>
-        <p:nvSpPr>
-          <p:cNvPr id="8" name="Shape 5"/>
-          <p:cNvSpPr/>
-          <p:nvPr/>
-        </p:nvSpPr>
-        <p:spPr>
-          <a:xfrm>
-            <a:off x="3474720" y="1737360"/>
-            <a:ext cx="2468880" cy="2560320"/>
-          </a:xfrm>
-          <a:prstGeom prst="rect">
-            <a:avLst/>
-          </a:prstGeom>
-          <a:solidFill>
-            <a:srgbClr val="1E293B"/>
-          </a:solidFill>
-          <a:ln/>
-          <a:effectLst>
-            <a:outerShdw sx="100000" sy="100000" kx="0" ky="0" algn="bl" rotWithShape="0" blurRad="76200" dist="25400" dir="8100000">
-              <a:srgbClr val="000000">
-                <a:alpha val="12000"/>
-              </a:srgbClr>
-            </a:outerShdw>
-          </a:effectLst>
-        </p:spPr>
-      </p:sp>
-      <p:pic>
-        <p:nvPicPr>
-          <p:cNvPr id="9" name="Image 1" descr="preencoded.png">    </p:cNvPr>
-          <p:cNvPicPr>
-            <a:picLocks noChangeAspect="1"/>
-          </p:cNvPicPr>
-          <p:nvPr/>
-        </p:nvPicPr>
-        <p:blipFill>
-          <a:blip r:embed="rId2"/>
-          <a:stretch>
-            <a:fillRect/>
-          </a:stretch>
-        </p:blipFill>
-        <p:spPr>
-          <a:xfrm>
-            <a:off x="4297680" y="1965960"/>
-            <a:ext cx="640080" cy="640080"/>
-          </a:xfrm>
-          <a:prstGeom prst="rect">
-            <a:avLst/>
-          </a:prstGeom>
-        </p:spPr>
-      </p:pic>
-      <p:sp>
-        <p:nvSpPr>
-          <p:cNvPr id="10" name="Text 6"/>
-          <p:cNvSpPr/>
-          <p:nvPr/>
-        </p:nvSpPr>
-        <p:spPr>
-          <a:xfrm>
-            <a:off x="3474720" y="2743200"/>
-            <a:ext cx="2468880" cy="365760"/>
-          </a:xfrm>
-          <a:prstGeom prst="rect">
-            <a:avLst/>
-          </a:prstGeom>
-          <a:noFill/>
-          <a:ln/>
-        </p:spPr>
-        <p:txBody>
-          <a:bodyPr wrap="square" lIns="0" tIns="0" rIns="0" bIns="0" rtlCol="0" anchor="ctr"/>
-          <a:lstStyle/>
-          <a:p>
-            <a:pPr algn="ctr" indent="0" marL="0">
-              <a:buNone/>
-            </a:pPr>
-            <a:r>
-              <a:rPr lang="en-US" sz="1600" b="1" dirty="0">
-                <a:solidFill>
-                  <a:srgbClr val="F97316"/>
-                </a:solidFill>
-                <a:latin typeface="Trebuchet MS" pitchFamily="34" charset="0"/>
-                <a:ea typeface="Trebuchet MS" pitchFamily="34" charset="-122"/>
-                <a:cs typeface="Trebuchet MS" pitchFamily="34" charset="-120"/>
-              </a:rPr>
-              <a:t>Precision</a:t>
-            </a:r>
-            <a:endParaRPr lang="en-US" sz="1600" dirty="0"/>
-          </a:p>
-        </p:txBody>
-      </p:sp>
-      <p:sp>
-        <p:nvSpPr>
-          <p:cNvPr id="11" name="Text 7"/>
-          <p:cNvSpPr/>
-          <p:nvPr/>
-        </p:nvSpPr>
-        <p:spPr>
-          <a:xfrm>
-            <a:off x="3657600" y="3154680"/>
-            <a:ext cx="2103120" cy="914400"/>
-          </a:xfrm>
-          <a:prstGeom prst="rect">
-            <a:avLst/>
-          </a:prstGeom>
-          <a:noFill/>
-          <a:ln/>
-        </p:spPr>
-        <p:txBody>
-          <a:bodyPr wrap="square" lIns="0" tIns="0" rIns="0" bIns="0" rtlCol="0" anchor="ctr"/>
-          <a:lstStyle/>
-          <a:p>
-            <a:pPr algn="ctr" indent="0" marL="0">
-              <a:buNone/>
-            </a:pPr>
-            <a:r>
-              <a:rPr lang="en-US" sz="1300" dirty="0">
-                <a:solidFill>
-                  <a:srgbClr val="94A3B8"/>
-                </a:solidFill>
-                <a:latin typeface="Calibri" pitchFamily="34" charset="0"/>
-                <a:ea typeface="Calibri" pitchFamily="34" charset="-122"/>
-                <a:cs typeface="Calibri" pitchFamily="34" charset="-120"/>
-              </a:rPr>
-              <a:t>One missed clause =</a:t>
-            </a:r>
-            <a:endParaRPr lang="en-US" sz="1300" dirty="0"/>
-          </a:p>
-          <a:p>
-            <a:pPr algn="ctr" indent="0" marL="0">
-              <a:buNone/>
-            </a:pPr>
-            <a:r>
-              <a:rPr lang="en-US" sz="1300" dirty="0">
-                <a:solidFill>
-                  <a:srgbClr val="94A3B8"/>
-                </a:solidFill>
-                <a:latin typeface="Calibri" pitchFamily="34" charset="0"/>
-                <a:ea typeface="Calibri" pitchFamily="34" charset="-122"/>
-                <a:cs typeface="Calibri" pitchFamily="34" charset="-120"/>
-              </a:rPr>
-              <a:t>millions in penalties.</a:t>
-            </a:r>
-            <a:endParaRPr lang="en-US" sz="1300" dirty="0"/>
-          </a:p>
-          <a:p>
-            <a:pPr algn="ctr" indent="0" marL="0">
-              <a:buNone/>
-            </a:pPr>
-            <a:r>
-              <a:rPr lang="en-US" sz="1300" dirty="0">
-                <a:solidFill>
-                  <a:srgbClr val="94A3B8"/>
-                </a:solidFill>
-                <a:latin typeface="Calibri" pitchFamily="34" charset="0"/>
-                <a:ea typeface="Calibri" pitchFamily="34" charset="-122"/>
-                <a:cs typeface="Calibri" pitchFamily="34" charset="-120"/>
-              </a:rPr>
-              <a:t>Bidding managers need</a:t>
-            </a:r>
-            <a:endParaRPr lang="en-US" sz="1300" dirty="0"/>
-          </a:p>
-          <a:p>
-            <a:pPr algn="ctr" indent="0" marL="0">
-              <a:buNone/>
-            </a:pPr>
-            <a:r>
-              <a:rPr lang="en-US" sz="1300" dirty="0">
-                <a:solidFill>
-                  <a:srgbClr val="94A3B8"/>
-                </a:solidFill>
-                <a:latin typeface="Calibri" pitchFamily="34" charset="0"/>
-                <a:ea typeface="Calibri" pitchFamily="34" charset="-122"/>
-                <a:cs typeface="Calibri" pitchFamily="34" charset="-120"/>
-              </a:rPr>
-              <a:t>exact answers, not guesses.</a:t>
-            </a:r>
-            <a:endParaRPr lang="en-US" sz="1300" dirty="0"/>
-          </a:p>
-        </p:txBody>
-      </p:sp>
-      <p:sp>
-        <p:nvSpPr>
-          <p:cNvPr id="12" name="Shape 8"/>
-          <p:cNvSpPr/>
-          <p:nvPr/>
-        </p:nvSpPr>
-        <p:spPr>
-          <a:xfrm>
-            <a:off x="6217920" y="1737360"/>
-            <a:ext cx="2468880" cy="2560320"/>
-          </a:xfrm>
-          <a:prstGeom prst="rect">
-            <a:avLst/>
-          </a:prstGeom>
-          <a:solidFill>
-            <a:srgbClr val="1E293B"/>
-          </a:solidFill>
-          <a:ln/>
-          <a:effectLst>
-            <a:outerShdw sx="100000" sy="100000" kx="0" ky="0" algn="bl" rotWithShape="0" blurRad="76200" dist="25400" dir="8100000">
-              <a:srgbClr val="000000">
-                <a:alpha val="12000"/>
-              </a:srgbClr>
-            </a:outerShdw>
-          </a:effectLst>
-        </p:spPr>
-      </p:sp>
-      <p:pic>
-        <p:nvPicPr>
-          <p:cNvPr id="13" name="Image 2" descr="preencoded.png">    </p:cNvPr>
+          <p:cNvPr id="5" name="Image 0" descr="preencoded.png"/>
           <p:cNvPicPr>
             <a:picLocks noChangeAspect="1"/>
           </p:cNvPicPr>
@@ -5249,7 +4658,7 @@
         </p:blipFill>
         <p:spPr>
           <a:xfrm>
-            <a:off x="7040880" y="1965960"/>
+            <a:off x="1554480" y="1965960"/>
             <a:ext cx="640080" cy="640080"/>
           </a:xfrm>
           <a:prstGeom prst="rect">
@@ -5259,13 +4668,13 @@
       </p:pic>
       <p:sp>
         <p:nvSpPr>
-          <p:cNvPr id="14" name="Text 9"/>
-          <p:cNvSpPr/>
-          <p:nvPr/>
-        </p:nvSpPr>
-        <p:spPr>
-          <a:xfrm>
-            <a:off x="6217920" y="2743200"/>
+          <p:cNvPr id="6" name="Text 3"/>
+          <p:cNvSpPr/>
+          <p:nvPr/>
+        </p:nvSpPr>
+        <p:spPr>
+          <a:xfrm>
+            <a:off x="731520" y="2743200"/>
             <a:ext cx="2468880" cy="365760"/>
           </a:xfrm>
           <a:prstGeom prst="rect">
@@ -5278,18 +4687,378 @@
           <a:bodyPr wrap="square" lIns="0" tIns="0" rIns="0" bIns="0" rtlCol="0" anchor="ctr"/>
           <a:lstStyle/>
           <a:p>
-            <a:pPr algn="ctr" indent="0" marL="0">
+            <a:pPr marL="0" indent="0" algn="ctr">
               <a:buNone/>
             </a:pPr>
             <a:r>
               <a:rPr lang="en-US" sz="1600" b="1" dirty="0">
                 <a:solidFill>
-                  <a:srgbClr val="6366F1"/>
+                  <a:srgbClr val="EF4444"/>
                 </a:solidFill>
                 <a:latin typeface="Trebuchet MS" pitchFamily="34" charset="0"/>
                 <a:ea typeface="Trebuchet MS" pitchFamily="34" charset="-122"/>
                 <a:cs typeface="Trebuchet MS" pitchFamily="34" charset="-120"/>
               </a:rPr>
+              <a:t>Volume</a:t>
+            </a:r>
+            <a:endParaRPr lang="en-US" sz="1600" dirty="0"/>
+          </a:p>
+        </p:txBody>
+      </p:sp>
+      <p:sp>
+        <p:nvSpPr>
+          <p:cNvPr id="7" name="Text 4"/>
+          <p:cNvSpPr/>
+          <p:nvPr/>
+        </p:nvSpPr>
+        <p:spPr>
+          <a:xfrm>
+            <a:off x="914400" y="3154680"/>
+            <a:ext cx="2103120" cy="914400"/>
+          </a:xfrm>
+          <a:prstGeom prst="rect">
+            <a:avLst/>
+          </a:prstGeom>
+          <a:noFill/>
+          <a:ln/>
+        </p:spPr>
+        <p:txBody>
+          <a:bodyPr wrap="square" lIns="0" tIns="0" rIns="0" bIns="0" rtlCol="0" anchor="ctr"/>
+          <a:lstStyle/>
+          <a:p>
+            <a:pPr marL="0" indent="0" algn="ctr">
+              <a:buNone/>
+            </a:pPr>
+            <a:r>
+              <a:rPr lang="en-US" sz="1300" dirty="0">
+                <a:solidFill>
+                  <a:srgbClr val="94A3B8"/>
+                </a:solidFill>
+                <a:latin typeface="Calibri" pitchFamily="34" charset="0"/>
+                <a:ea typeface="Calibri" pitchFamily="34" charset="-122"/>
+                <a:cs typeface="Calibri" pitchFamily="34" charset="-120"/>
+              </a:rPr>
+              <a:t>500–1,000 pages per tender.</a:t>
+            </a:r>
+            <a:endParaRPr lang="en-US" sz="1300" dirty="0"/>
+          </a:p>
+          <a:p>
+            <a:pPr marL="0" indent="0" algn="ctr">
+              <a:buNone/>
+            </a:pPr>
+            <a:r>
+              <a:rPr lang="en-US" sz="1300" dirty="0">
+                <a:solidFill>
+                  <a:srgbClr val="94A3B8"/>
+                </a:solidFill>
+                <a:latin typeface="Calibri" pitchFamily="34" charset="0"/>
+                <a:ea typeface="Calibri" pitchFamily="34" charset="-122"/>
+                <a:cs typeface="Calibri" pitchFamily="34" charset="-120"/>
+              </a:rPr>
+              <a:t>LD clauses, payment terms,</a:t>
+            </a:r>
+            <a:endParaRPr lang="en-US" sz="1300" dirty="0"/>
+          </a:p>
+          <a:p>
+            <a:pPr marL="0" indent="0" algn="ctr">
+              <a:buNone/>
+            </a:pPr>
+            <a:r>
+              <a:rPr lang="en-US" sz="1300" dirty="0">
+                <a:solidFill>
+                  <a:srgbClr val="94A3B8"/>
+                </a:solidFill>
+                <a:latin typeface="Calibri" pitchFamily="34" charset="0"/>
+                <a:ea typeface="Calibri" pitchFamily="34" charset="-122"/>
+                <a:cs typeface="Calibri" pitchFamily="34" charset="-120"/>
+              </a:rPr>
+              <a:t>technical specs buried deep</a:t>
+            </a:r>
+            <a:endParaRPr lang="en-US" sz="1300" dirty="0"/>
+          </a:p>
+          <a:p>
+            <a:pPr marL="0" indent="0" algn="ctr">
+              <a:buNone/>
+            </a:pPr>
+            <a:r>
+              <a:rPr lang="en-US" sz="1300" dirty="0">
+                <a:solidFill>
+                  <a:srgbClr val="94A3B8"/>
+                </a:solidFill>
+                <a:latin typeface="Calibri" pitchFamily="34" charset="0"/>
+                <a:ea typeface="Calibri" pitchFamily="34" charset="-122"/>
+                <a:cs typeface="Calibri" pitchFamily="34" charset="-120"/>
+              </a:rPr>
+              <a:t>in dense legalese.</a:t>
+            </a:r>
+            <a:endParaRPr lang="en-US" sz="1300" dirty="0"/>
+          </a:p>
+        </p:txBody>
+      </p:sp>
+      <p:sp>
+        <p:nvSpPr>
+          <p:cNvPr id="8" name="Shape 5"/>
+          <p:cNvSpPr/>
+          <p:nvPr/>
+        </p:nvSpPr>
+        <p:spPr>
+          <a:xfrm>
+            <a:off x="3474720" y="1737360"/>
+            <a:ext cx="2468880" cy="2560320"/>
+          </a:xfrm>
+          <a:prstGeom prst="rect">
+            <a:avLst/>
+          </a:prstGeom>
+          <a:solidFill>
+            <a:srgbClr val="1E293B"/>
+          </a:solidFill>
+          <a:ln/>
+          <a:effectLst>
+            <a:outerShdw blurRad="76200" dist="25400" dir="8100000" algn="bl" rotWithShape="0">
+              <a:srgbClr val="000000">
+                <a:alpha val="12000"/>
+              </a:srgbClr>
+            </a:outerShdw>
+          </a:effectLst>
+        </p:spPr>
+      </p:sp>
+      <p:pic>
+        <p:nvPicPr>
+          <p:cNvPr id="9" name="Image 1" descr="preencoded.png"/>
+          <p:cNvPicPr>
+            <a:picLocks noChangeAspect="1"/>
+          </p:cNvPicPr>
+          <p:nvPr/>
+        </p:nvPicPr>
+        <p:blipFill>
+          <a:blip r:embed="rId4"/>
+          <a:stretch>
+            <a:fillRect/>
+          </a:stretch>
+        </p:blipFill>
+        <p:spPr>
+          <a:xfrm>
+            <a:off x="4297680" y="1965960"/>
+            <a:ext cx="640080" cy="640080"/>
+          </a:xfrm>
+          <a:prstGeom prst="rect">
+            <a:avLst/>
+          </a:prstGeom>
+        </p:spPr>
+      </p:pic>
+      <p:sp>
+        <p:nvSpPr>
+          <p:cNvPr id="10" name="Text 6"/>
+          <p:cNvSpPr/>
+          <p:nvPr/>
+        </p:nvSpPr>
+        <p:spPr>
+          <a:xfrm>
+            <a:off x="3474720" y="2743200"/>
+            <a:ext cx="2468880" cy="365760"/>
+          </a:xfrm>
+          <a:prstGeom prst="rect">
+            <a:avLst/>
+          </a:prstGeom>
+          <a:noFill/>
+          <a:ln/>
+        </p:spPr>
+        <p:txBody>
+          <a:bodyPr wrap="square" lIns="0" tIns="0" rIns="0" bIns="0" rtlCol="0" anchor="ctr"/>
+          <a:lstStyle/>
+          <a:p>
+            <a:pPr marL="0" indent="0" algn="ctr">
+              <a:buNone/>
+            </a:pPr>
+            <a:r>
+              <a:rPr lang="en-US" sz="1600" b="1" dirty="0">
+                <a:solidFill>
+                  <a:srgbClr val="F97316"/>
+                </a:solidFill>
+                <a:latin typeface="Trebuchet MS" pitchFamily="34" charset="0"/>
+                <a:ea typeface="Trebuchet MS" pitchFamily="34" charset="-122"/>
+                <a:cs typeface="Trebuchet MS" pitchFamily="34" charset="-120"/>
+              </a:rPr>
+              <a:t>Precision</a:t>
+            </a:r>
+            <a:endParaRPr lang="en-US" sz="1600" dirty="0"/>
+          </a:p>
+        </p:txBody>
+      </p:sp>
+      <p:sp>
+        <p:nvSpPr>
+          <p:cNvPr id="11" name="Text 7"/>
+          <p:cNvSpPr/>
+          <p:nvPr/>
+        </p:nvSpPr>
+        <p:spPr>
+          <a:xfrm>
+            <a:off x="3657600" y="3154680"/>
+            <a:ext cx="2103120" cy="914400"/>
+          </a:xfrm>
+          <a:prstGeom prst="rect">
+            <a:avLst/>
+          </a:prstGeom>
+          <a:noFill/>
+          <a:ln/>
+        </p:spPr>
+        <p:txBody>
+          <a:bodyPr wrap="square" lIns="0" tIns="0" rIns="0" bIns="0" rtlCol="0" anchor="ctr"/>
+          <a:lstStyle/>
+          <a:p>
+            <a:pPr marL="0" indent="0" algn="ctr">
+              <a:buNone/>
+            </a:pPr>
+            <a:r>
+              <a:rPr lang="en-US" sz="1300" dirty="0">
+                <a:solidFill>
+                  <a:srgbClr val="94A3B8"/>
+                </a:solidFill>
+                <a:latin typeface="Calibri" pitchFamily="34" charset="0"/>
+                <a:ea typeface="Calibri" pitchFamily="34" charset="-122"/>
+                <a:cs typeface="Calibri" pitchFamily="34" charset="-120"/>
+              </a:rPr>
+              <a:t>One missed clause =</a:t>
+            </a:r>
+            <a:endParaRPr lang="en-US" sz="1300" dirty="0"/>
+          </a:p>
+          <a:p>
+            <a:pPr marL="0" indent="0" algn="ctr">
+              <a:buNone/>
+            </a:pPr>
+            <a:r>
+              <a:rPr lang="en-US" sz="1300" dirty="0">
+                <a:solidFill>
+                  <a:srgbClr val="94A3B8"/>
+                </a:solidFill>
+                <a:latin typeface="Calibri" pitchFamily="34" charset="0"/>
+                <a:ea typeface="Calibri" pitchFamily="34" charset="-122"/>
+                <a:cs typeface="Calibri" pitchFamily="34" charset="-120"/>
+              </a:rPr>
+              <a:t>millions in penalties.</a:t>
+            </a:r>
+            <a:endParaRPr lang="en-US" sz="1300" dirty="0"/>
+          </a:p>
+          <a:p>
+            <a:pPr marL="0" indent="0" algn="ctr">
+              <a:buNone/>
+            </a:pPr>
+            <a:r>
+              <a:rPr lang="en-US" sz="1300" dirty="0">
+                <a:solidFill>
+                  <a:srgbClr val="94A3B8"/>
+                </a:solidFill>
+                <a:latin typeface="Calibri" pitchFamily="34" charset="0"/>
+                <a:ea typeface="Calibri" pitchFamily="34" charset="-122"/>
+                <a:cs typeface="Calibri" pitchFamily="34" charset="-120"/>
+              </a:rPr>
+              <a:t>Bidding managers need</a:t>
+            </a:r>
+            <a:endParaRPr lang="en-US" sz="1300" dirty="0"/>
+          </a:p>
+          <a:p>
+            <a:pPr marL="0" indent="0" algn="ctr">
+              <a:buNone/>
+            </a:pPr>
+            <a:r>
+              <a:rPr lang="en-US" sz="1300" dirty="0">
+                <a:solidFill>
+                  <a:srgbClr val="94A3B8"/>
+                </a:solidFill>
+                <a:latin typeface="Calibri" pitchFamily="34" charset="0"/>
+                <a:ea typeface="Calibri" pitchFamily="34" charset="-122"/>
+                <a:cs typeface="Calibri" pitchFamily="34" charset="-120"/>
+              </a:rPr>
+              <a:t>exact answers, not guesses.</a:t>
+            </a:r>
+            <a:endParaRPr lang="en-US" sz="1300" dirty="0"/>
+          </a:p>
+        </p:txBody>
+      </p:sp>
+      <p:sp>
+        <p:nvSpPr>
+          <p:cNvPr id="12" name="Shape 8"/>
+          <p:cNvSpPr/>
+          <p:nvPr/>
+        </p:nvSpPr>
+        <p:spPr>
+          <a:xfrm>
+            <a:off x="6217920" y="1737360"/>
+            <a:ext cx="2468880" cy="2560320"/>
+          </a:xfrm>
+          <a:prstGeom prst="rect">
+            <a:avLst/>
+          </a:prstGeom>
+          <a:solidFill>
+            <a:srgbClr val="1E293B"/>
+          </a:solidFill>
+          <a:ln/>
+          <a:effectLst>
+            <a:outerShdw blurRad="76200" dist="25400" dir="8100000" algn="bl" rotWithShape="0">
+              <a:srgbClr val="000000">
+                <a:alpha val="12000"/>
+              </a:srgbClr>
+            </a:outerShdw>
+          </a:effectLst>
+        </p:spPr>
+      </p:sp>
+      <p:pic>
+        <p:nvPicPr>
+          <p:cNvPr id="13" name="Image 2" descr="preencoded.png"/>
+          <p:cNvPicPr>
+            <a:picLocks noChangeAspect="1"/>
+          </p:cNvPicPr>
+          <p:nvPr/>
+        </p:nvPicPr>
+        <p:blipFill>
+          <a:blip r:embed="rId5"/>
+          <a:stretch>
+            <a:fillRect/>
+          </a:stretch>
+        </p:blipFill>
+        <p:spPr>
+          <a:xfrm>
+            <a:off x="7040880" y="1965960"/>
+            <a:ext cx="640080" cy="640080"/>
+          </a:xfrm>
+          <a:prstGeom prst="rect">
+            <a:avLst/>
+          </a:prstGeom>
+        </p:spPr>
+      </p:pic>
+      <p:sp>
+        <p:nvSpPr>
+          <p:cNvPr id="14" name="Text 9"/>
+          <p:cNvSpPr/>
+          <p:nvPr/>
+        </p:nvSpPr>
+        <p:spPr>
+          <a:xfrm>
+            <a:off x="6217920" y="2743200"/>
+            <a:ext cx="2468880" cy="365760"/>
+          </a:xfrm>
+          <a:prstGeom prst="rect">
+            <a:avLst/>
+          </a:prstGeom>
+          <a:noFill/>
+          <a:ln/>
+        </p:spPr>
+        <p:txBody>
+          <a:bodyPr wrap="square" lIns="0" tIns="0" rIns="0" bIns="0" rtlCol="0" anchor="ctr"/>
+          <a:lstStyle/>
+          <a:p>
+            <a:pPr marL="0" indent="0" algn="ctr">
+              <a:buNone/>
+            </a:pPr>
+            <a:r>
+              <a:rPr lang="en-US" sz="1600" b="1" dirty="0">
+                <a:solidFill>
+                  <a:srgbClr val="6366F1"/>
+                </a:solidFill>
+                <a:latin typeface="Trebuchet MS" pitchFamily="34" charset="0"/>
+                <a:ea typeface="Trebuchet MS" pitchFamily="34" charset="-122"/>
+                <a:cs typeface="Trebuchet MS" pitchFamily="34" charset="-120"/>
+              </a:rPr>
               <a:t>Time Pressure</a:t>
             </a:r>
             <a:endParaRPr lang="en-US" sz="1600" dirty="0"/>
@@ -5317,7 +5086,7 @@
           <a:bodyPr wrap="square" lIns="0" tIns="0" rIns="0" bIns="0" rtlCol="0" anchor="ctr"/>
           <a:lstStyle/>
           <a:p>
-            <a:pPr algn="ctr" indent="0" marL="0">
+            <a:pPr marL="0" indent="0" algn="ctr">
               <a:buNone/>
             </a:pPr>
             <a:r>
@@ -5334,7 +5103,7 @@
             <a:endParaRPr lang="en-US" sz="1300" dirty="0"/>
           </a:p>
           <a:p>
-            <a:pPr algn="ctr" indent="0" marL="0">
+            <a:pPr marL="0" indent="0" algn="ctr">
               <a:buNone/>
             </a:pPr>
             <a:r>
@@ -5351,7 +5120,7 @@
             <a:endParaRPr lang="en-US" sz="1300" dirty="0"/>
           </a:p>
           <a:p>
-            <a:pPr algn="ctr" indent="0" marL="0">
+            <a:pPr marL="0" indent="0" algn="ctr">
               <a:buNone/>
             </a:pPr>
             <a:r>
@@ -5368,7 +5137,7 @@
             <a:endParaRPr lang="en-US" sz="1300" dirty="0"/>
           </a:p>
           <a:p>
-            <a:pPr algn="ctr" indent="0" marL="0">
+            <a:pPr marL="0" indent="0" algn="ctr">
               <a:buNone/>
             </a:pPr>
             <a:r>
@@ -5407,7 +5176,7 @@
           <a:bodyPr wrap="square" lIns="0" tIns="0" rIns="0" bIns="0" rtlCol="0" anchor="ctr"/>
           <a:lstStyle/>
           <a:p>
-            <a:pPr indent="0" marL="0">
+            <a:pPr marL="0" indent="0">
               <a:buNone/>
             </a:pPr>
             <a:r>
@@ -5441,6 +5210,7 @@
         <a:solidFill>
           <a:srgbClr val="F8FAFC"/>
         </a:solidFill>
+        <a:effectLst/>
       </p:bgPr>
     </p:bg>
     <p:spTree>
@@ -5478,7 +5248,7 @@
           <a:bodyPr wrap="square" lIns="0" tIns="0" rIns="0" bIns="0" rtlCol="0" anchor="ctr"/>
           <a:lstStyle/>
           <a:p>
-            <a:pPr indent="0" marL="0">
+            <a:pPr marL="0" indent="0">
               <a:buNone/>
             </a:pPr>
             <a:r>
@@ -5517,7 +5287,7 @@
           <a:bodyPr wrap="square" lIns="0" tIns="0" rIns="0" bIns="0" rtlCol="0" anchor="ctr"/>
           <a:lstStyle/>
           <a:p>
-            <a:pPr indent="0" marL="0">
+            <a:pPr marL="0" indent="0">
               <a:buNone/>
             </a:pPr>
             <a:r>
@@ -5554,7 +5324,7 @@
           </a:solidFill>
           <a:ln/>
           <a:effectLst>
-            <a:outerShdw sx="100000" sy="100000" kx="0" ky="0" algn="bl" rotWithShape="0" blurRad="76200" dist="25400" dir="8100000">
+            <a:outerShdw blurRad="76200" dist="25400" dir="8100000" algn="bl" rotWithShape="0">
               <a:srgbClr val="000000">
                 <a:alpha val="12000"/>
               </a:srgbClr>
@@ -5584,412 +5354,7 @@
       </p:sp>
       <p:pic>
         <p:nvPicPr>
-          <p:cNvPr id="6" name="Image 0" descr="preencoded.png">    </p:cNvPr>
-          <p:cNvPicPr>
-            <a:picLocks noChangeAspect="1"/>
-          </p:cNvPicPr>
-          <p:nvPr/>
-        </p:nvPicPr>
-        <p:blipFill>
-          <a:blip r:embed="rId1"/>
-          <a:stretch>
-            <a:fillRect/>
-          </a:stretch>
-        </p:blipFill>
-        <p:spPr>
-          <a:xfrm>
-            <a:off x="1005840" y="1783080"/>
-            <a:ext cx="457200" cy="457200"/>
-          </a:xfrm>
-          <a:prstGeom prst="rect">
-            <a:avLst/>
-          </a:prstGeom>
-        </p:spPr>
-      </p:pic>
-      <p:sp>
-        <p:nvSpPr>
-          <p:cNvPr id="7" name="Text 4"/>
-          <p:cNvSpPr/>
-          <p:nvPr/>
-        </p:nvSpPr>
-        <p:spPr>
-          <a:xfrm>
-            <a:off x="1600200" y="1783080"/>
-            <a:ext cx="2560320" cy="457200"/>
-          </a:xfrm>
-          <a:prstGeom prst="rect">
-            <a:avLst/>
-          </a:prstGeom>
-          <a:noFill/>
-          <a:ln/>
-        </p:spPr>
-        <p:txBody>
-          <a:bodyPr wrap="square" lIns="0" tIns="0" rIns="0" bIns="0" rtlCol="0" anchor="ctr"/>
-          <a:lstStyle/>
-          <a:p>
-            <a:pPr indent="0" marL="0">
-              <a:buNone/>
-            </a:pPr>
-            <a:r>
-              <a:rPr lang="en-US" sz="1800" b="1" dirty="0">
-                <a:solidFill>
-                  <a:srgbClr val="EF4444"/>
-                </a:solidFill>
-                <a:latin typeface="Trebuchet MS" pitchFamily="34" charset="0"/>
-                <a:ea typeface="Trebuchet MS" pitchFamily="34" charset="-122"/>
-                <a:cs typeface="Trebuchet MS" pitchFamily="34" charset="-120"/>
-              </a:rPr>
-              <a:t>LLM Alone</a:t>
-            </a:r>
-            <a:endParaRPr lang="en-US" sz="1800" dirty="0"/>
-          </a:p>
-        </p:txBody>
-      </p:sp>
-      <p:sp>
-        <p:nvSpPr>
-          <p:cNvPr id="8" name="Text 5"/>
-          <p:cNvSpPr/>
-          <p:nvPr/>
-        </p:nvSpPr>
-        <p:spPr>
-          <a:xfrm>
-            <a:off x="1005840" y="2377440"/>
-            <a:ext cx="3108960" cy="1463040"/>
-          </a:xfrm>
-          <a:prstGeom prst="rect">
-            <a:avLst/>
-          </a:prstGeom>
-          <a:noFill/>
-          <a:ln/>
-        </p:spPr>
-        <p:txBody>
-          <a:bodyPr wrap="square" lIns="0" tIns="0" rIns="0" bIns="0" rtlCol="0" anchor="ctr"/>
-          <a:lstStyle/>
-          <a:p>
-            <a:pPr marL="342900" indent="-342900">
-              <a:spcAft>
-                <a:spcPts val="600"/>
-              </a:spcAft>
-              <a:buSzPct val="100000"/>
-              <a:buChar char="•"/>
-            </a:pPr>
-            <a:r>
-              <a:rPr lang="en-US" sz="1300" dirty="0">
-                <a:solidFill>
-                  <a:srgbClr val="1E293B"/>
-                </a:solidFill>
-                <a:latin typeface="Calibri" pitchFamily="34" charset="0"/>
-                <a:ea typeface="Calibri" pitchFamily="34" charset="-122"/>
-                <a:cs typeface="Calibri" pitchFamily="34" charset="-120"/>
-              </a:rPr>
-              <a:t>Trained on public internet data</a:t>
-            </a:r>
-            <a:endParaRPr lang="en-US" sz="1300" dirty="0"/>
-          </a:p>
-          <a:p>
-            <a:pPr marL="342900" indent="-342900">
-              <a:spcAft>
-                <a:spcPts val="600"/>
-              </a:spcAft>
-              <a:buSzPct val="100000"/>
-              <a:buChar char="•"/>
-            </a:pPr>
-            <a:r>
-              <a:rPr lang="en-US" sz="1300" dirty="0">
-                <a:solidFill>
-                  <a:srgbClr val="1E293B"/>
-                </a:solidFill>
-                <a:latin typeface="Calibri" pitchFamily="34" charset="0"/>
-                <a:ea typeface="Calibri" pitchFamily="34" charset="-122"/>
-                <a:cs typeface="Calibri" pitchFamily="34" charset="-120"/>
-              </a:rPr>
-              <a:t>Has never seen your tender docs</a:t>
-            </a:r>
-            <a:endParaRPr lang="en-US" sz="1300" dirty="0"/>
-          </a:p>
-          <a:p>
-            <a:pPr marL="342900" indent="-342900">
-              <a:spcAft>
-                <a:spcPts val="600"/>
-              </a:spcAft>
-              <a:buSzPct val="100000"/>
-              <a:buChar char="•"/>
-            </a:pPr>
-            <a:r>
-              <a:rPr lang="en-US" sz="1300" dirty="0">
-                <a:solidFill>
-                  <a:srgbClr val="1E293B"/>
-                </a:solidFill>
-                <a:latin typeface="Calibri" pitchFamily="34" charset="0"/>
-                <a:ea typeface="Calibri" pitchFamily="34" charset="-122"/>
-                <a:cs typeface="Calibri" pitchFamily="34" charset="-120"/>
-              </a:rPr>
-              <a:t>Confidently invents plausible answers</a:t>
-            </a:r>
-            <a:endParaRPr lang="en-US" sz="1300" dirty="0"/>
-          </a:p>
-          <a:p>
-            <a:pPr marL="342900" indent="-342900">
-              <a:spcAft>
-                <a:spcPts val="600"/>
-              </a:spcAft>
-              <a:buSzPct val="100000"/>
-              <a:buChar char="•"/>
-            </a:pPr>
-            <a:r>
-              <a:rPr lang="en-US" sz="1300" dirty="0">
-                <a:solidFill>
-                  <a:srgbClr val="EF4444"/>
-                </a:solidFill>
-                <a:latin typeface="Calibri" pitchFamily="34" charset="0"/>
-                <a:ea typeface="Calibri" pitchFamily="34" charset="-122"/>
-                <a:cs typeface="Calibri" pitchFamily="34" charset="-120"/>
-              </a:rPr>
-              <a:t>"The LD clause is 5%..." (made up)</a:t>
-            </a:r>
-            <a:endParaRPr lang="en-US" sz="1300" dirty="0"/>
-          </a:p>
-        </p:txBody>
-      </p:sp>
-      <p:sp>
-        <p:nvSpPr>
-          <p:cNvPr id="9" name="Shape 6"/>
-          <p:cNvSpPr/>
-          <p:nvPr/>
-        </p:nvSpPr>
-        <p:spPr>
-          <a:xfrm>
-            <a:off x="4754880" y="1554480"/>
-            <a:ext cx="3657600" cy="2560320"/>
-          </a:xfrm>
-          <a:prstGeom prst="rect">
-            <a:avLst/>
-          </a:prstGeom>
-          <a:solidFill>
-            <a:srgbClr val="FFFFFF"/>
-          </a:solidFill>
-          <a:ln/>
-          <a:effectLst>
-            <a:outerShdw sx="100000" sy="100000" kx="0" ky="0" algn="bl" rotWithShape="0" blurRad="76200" dist="25400" dir="8100000">
-              <a:srgbClr val="000000">
-                <a:alpha val="12000"/>
-              </a:srgbClr>
-            </a:outerShdw>
-          </a:effectLst>
-        </p:spPr>
-      </p:sp>
-      <p:sp>
-        <p:nvSpPr>
-          <p:cNvPr id="10" name="Shape 7"/>
-          <p:cNvSpPr/>
-          <p:nvPr/>
-        </p:nvSpPr>
-        <p:spPr>
-          <a:xfrm>
-            <a:off x="4754880" y="1554480"/>
-            <a:ext cx="3657600" cy="73152"/>
-          </a:xfrm>
-          <a:prstGeom prst="rect">
-            <a:avLst/>
-          </a:prstGeom>
-          <a:solidFill>
-            <a:srgbClr val="22C55E"/>
-          </a:solidFill>
-          <a:ln/>
-        </p:spPr>
-      </p:sp>
-      <p:pic>
-        <p:nvPicPr>
-          <p:cNvPr id="11" name="Image 1" descr="preencoded.png">    </p:cNvPr>
-          <p:cNvPicPr>
-            <a:picLocks noChangeAspect="1"/>
-          </p:cNvPicPr>
-          <p:nvPr/>
-        </p:nvPicPr>
-        <p:blipFill>
-          <a:blip r:embed="rId2"/>
-          <a:stretch>
-            <a:fillRect/>
-          </a:stretch>
-        </p:blipFill>
-        <p:spPr>
-          <a:xfrm>
-            <a:off x="5029200" y="1783080"/>
-            <a:ext cx="457200" cy="457200"/>
-          </a:xfrm>
-          <a:prstGeom prst="rect">
-            <a:avLst/>
-          </a:prstGeom>
-        </p:spPr>
-      </p:pic>
-      <p:sp>
-        <p:nvSpPr>
-          <p:cNvPr id="12" name="Text 8"/>
-          <p:cNvSpPr/>
-          <p:nvPr/>
-        </p:nvSpPr>
-        <p:spPr>
-          <a:xfrm>
-            <a:off x="5623560" y="1783080"/>
-            <a:ext cx="2560320" cy="457200"/>
-          </a:xfrm>
-          <a:prstGeom prst="rect">
-            <a:avLst/>
-          </a:prstGeom>
-          <a:noFill/>
-          <a:ln/>
-        </p:spPr>
-        <p:txBody>
-          <a:bodyPr wrap="square" lIns="0" tIns="0" rIns="0" bIns="0" rtlCol="0" anchor="ctr"/>
-          <a:lstStyle/>
-          <a:p>
-            <a:pPr indent="0" marL="0">
-              <a:buNone/>
-            </a:pPr>
-            <a:r>
-              <a:rPr lang="en-US" sz="1800" b="1" dirty="0">
-                <a:solidFill>
-                  <a:srgbClr val="22C55E"/>
-                </a:solidFill>
-                <a:latin typeface="Trebuchet MS" pitchFamily="34" charset="0"/>
-                <a:ea typeface="Trebuchet MS" pitchFamily="34" charset="-122"/>
-                <a:cs typeface="Trebuchet MS" pitchFamily="34" charset="-120"/>
-              </a:rPr>
-              <a:t>LLM + RAG</a:t>
-            </a:r>
-            <a:endParaRPr lang="en-US" sz="1800" dirty="0"/>
-          </a:p>
-        </p:txBody>
-      </p:sp>
-      <p:sp>
-        <p:nvSpPr>
-          <p:cNvPr id="13" name="Text 9"/>
-          <p:cNvSpPr/>
-          <p:nvPr/>
-        </p:nvSpPr>
-        <p:spPr>
-          <a:xfrm>
-            <a:off x="5029200" y="2377440"/>
-            <a:ext cx="3108960" cy="1463040"/>
-          </a:xfrm>
-          <a:prstGeom prst="rect">
-            <a:avLst/>
-          </a:prstGeom>
-          <a:noFill/>
-          <a:ln/>
-        </p:spPr>
-        <p:txBody>
-          <a:bodyPr wrap="square" lIns="0" tIns="0" rIns="0" bIns="0" rtlCol="0" anchor="ctr"/>
-          <a:lstStyle/>
-          <a:p>
-            <a:pPr marL="342900" indent="-342900">
-              <a:spcAft>
-                <a:spcPts val="600"/>
-              </a:spcAft>
-              <a:buSzPct val="100000"/>
-              <a:buChar char="•"/>
-            </a:pPr>
-            <a:r>
-              <a:rPr lang="en-US" sz="1300" dirty="0">
-                <a:solidFill>
-                  <a:srgbClr val="1E293B"/>
-                </a:solidFill>
-                <a:latin typeface="Calibri" pitchFamily="34" charset="0"/>
-                <a:ea typeface="Calibri" pitchFamily="34" charset="-122"/>
-                <a:cs typeface="Calibri" pitchFamily="34" charset="-120"/>
-              </a:rPr>
-              <a:t>Retrieves relevant chunks first</a:t>
-            </a:r>
-            <a:endParaRPr lang="en-US" sz="1300" dirty="0"/>
-          </a:p>
-          <a:p>
-            <a:pPr marL="342900" indent="-342900">
-              <a:spcAft>
-                <a:spcPts val="600"/>
-              </a:spcAft>
-              <a:buSzPct val="100000"/>
-              <a:buChar char="•"/>
-            </a:pPr>
-            <a:r>
-              <a:rPr lang="en-US" sz="1300" dirty="0">
-                <a:solidFill>
-                  <a:srgbClr val="1E293B"/>
-                </a:solidFill>
-                <a:latin typeface="Calibri" pitchFamily="34" charset="0"/>
-                <a:ea typeface="Calibri" pitchFamily="34" charset="-122"/>
-                <a:cs typeface="Calibri" pitchFamily="34" charset="-120"/>
-              </a:rPr>
-              <a:t>LLM reads your actual documents</a:t>
-            </a:r>
-            <a:endParaRPr lang="en-US" sz="1300" dirty="0"/>
-          </a:p>
-          <a:p>
-            <a:pPr marL="342900" indent="-342900">
-              <a:spcAft>
-                <a:spcPts val="600"/>
-              </a:spcAft>
-              <a:buSzPct val="100000"/>
-              <a:buChar char="•"/>
-            </a:pPr>
-            <a:r>
-              <a:rPr lang="en-US" sz="1300" dirty="0">
-                <a:solidFill>
-                  <a:srgbClr val="1E293B"/>
-                </a:solidFill>
-                <a:latin typeface="Calibri" pitchFamily="34" charset="0"/>
-                <a:ea typeface="Calibri" pitchFamily="34" charset="-122"/>
-                <a:cs typeface="Calibri" pitchFamily="34" charset="-120"/>
-              </a:rPr>
-              <a:t>Answers grounded in real source text</a:t>
-            </a:r>
-            <a:endParaRPr lang="en-US" sz="1300" dirty="0"/>
-          </a:p>
-          <a:p>
-            <a:pPr marL="342900" indent="-342900">
-              <a:spcAft>
-                <a:spcPts val="600"/>
-              </a:spcAft>
-              <a:buSzPct val="100000"/>
-              <a:buChar char="•"/>
-            </a:pPr>
-            <a:r>
-              <a:rPr lang="en-US" sz="1300" dirty="0">
-                <a:solidFill>
-                  <a:srgbClr val="22C55E"/>
-                </a:solidFill>
-                <a:latin typeface="Calibri" pitchFamily="34" charset="0"/>
-                <a:ea typeface="Calibri" pitchFamily="34" charset="-122"/>
-                <a:cs typeface="Calibri" pitchFamily="34" charset="-120"/>
-              </a:rPr>
-              <a:t>"LD is 0.5%/week..." (Source: pg. 42)</a:t>
-            </a:r>
-            <a:endParaRPr lang="en-US" sz="1300" dirty="0"/>
-          </a:p>
-        </p:txBody>
-      </p:sp>
-      <p:sp>
-        <p:nvSpPr>
-          <p:cNvPr id="14" name="Shape 10"/>
-          <p:cNvSpPr/>
-          <p:nvPr/>
-        </p:nvSpPr>
-        <p:spPr>
-          <a:xfrm>
-            <a:off x="731520" y="4389120"/>
-            <a:ext cx="7680960" cy="502920"/>
-          </a:xfrm>
-          <a:prstGeom prst="rect">
-            <a:avLst/>
-          </a:prstGeom>
-          <a:solidFill>
-            <a:srgbClr val="EEF2FF"/>
-          </a:solidFill>
-          <a:ln/>
-        </p:spPr>
-      </p:sp>
-      <p:pic>
-        <p:nvPicPr>
-          <p:cNvPr id="15" name="Image 2" descr="preencoded.png">    </p:cNvPr>
+          <p:cNvPr id="6" name="Image 0" descr="preencoded.png"/>
           <p:cNvPicPr>
             <a:picLocks noChangeAspect="1"/>
           </p:cNvPicPr>
@@ -6003,6 +5368,411 @@
         </p:blipFill>
         <p:spPr>
           <a:xfrm>
+            <a:off x="1005840" y="1783080"/>
+            <a:ext cx="457200" cy="457200"/>
+          </a:xfrm>
+          <a:prstGeom prst="rect">
+            <a:avLst/>
+          </a:prstGeom>
+        </p:spPr>
+      </p:pic>
+      <p:sp>
+        <p:nvSpPr>
+          <p:cNvPr id="7" name="Text 4"/>
+          <p:cNvSpPr/>
+          <p:nvPr/>
+        </p:nvSpPr>
+        <p:spPr>
+          <a:xfrm>
+            <a:off x="1600200" y="1783080"/>
+            <a:ext cx="2560320" cy="457200"/>
+          </a:xfrm>
+          <a:prstGeom prst="rect">
+            <a:avLst/>
+          </a:prstGeom>
+          <a:noFill/>
+          <a:ln/>
+        </p:spPr>
+        <p:txBody>
+          <a:bodyPr wrap="square" lIns="0" tIns="0" rIns="0" bIns="0" rtlCol="0" anchor="ctr"/>
+          <a:lstStyle/>
+          <a:p>
+            <a:pPr marL="0" indent="0">
+              <a:buNone/>
+            </a:pPr>
+            <a:r>
+              <a:rPr lang="en-US" sz="1800" b="1" dirty="0">
+                <a:solidFill>
+                  <a:srgbClr val="EF4444"/>
+                </a:solidFill>
+                <a:latin typeface="Trebuchet MS" pitchFamily="34" charset="0"/>
+                <a:ea typeface="Trebuchet MS" pitchFamily="34" charset="-122"/>
+                <a:cs typeface="Trebuchet MS" pitchFamily="34" charset="-120"/>
+              </a:rPr>
+              <a:t>LLM Alone</a:t>
+            </a:r>
+            <a:endParaRPr lang="en-US" sz="1800" dirty="0"/>
+          </a:p>
+        </p:txBody>
+      </p:sp>
+      <p:sp>
+        <p:nvSpPr>
+          <p:cNvPr id="8" name="Text 5"/>
+          <p:cNvSpPr/>
+          <p:nvPr/>
+        </p:nvSpPr>
+        <p:spPr>
+          <a:xfrm>
+            <a:off x="1005840" y="2377440"/>
+            <a:ext cx="3108960" cy="1463040"/>
+          </a:xfrm>
+          <a:prstGeom prst="rect">
+            <a:avLst/>
+          </a:prstGeom>
+          <a:noFill/>
+          <a:ln/>
+        </p:spPr>
+        <p:txBody>
+          <a:bodyPr wrap="square" lIns="0" tIns="0" rIns="0" bIns="0" rtlCol="0" anchor="ctr"/>
+          <a:lstStyle/>
+          <a:p>
+            <a:pPr marL="342900" indent="-342900">
+              <a:spcAft>
+                <a:spcPts val="600"/>
+              </a:spcAft>
+              <a:buSzPct val="100000"/>
+              <a:buChar char="•"/>
+            </a:pPr>
+            <a:r>
+              <a:rPr lang="en-US" sz="1300" dirty="0">
+                <a:solidFill>
+                  <a:srgbClr val="1E293B"/>
+                </a:solidFill>
+                <a:latin typeface="Calibri" pitchFamily="34" charset="0"/>
+                <a:ea typeface="Calibri" pitchFamily="34" charset="-122"/>
+                <a:cs typeface="Calibri" pitchFamily="34" charset="-120"/>
+              </a:rPr>
+              <a:t>Trained on public internet data</a:t>
+            </a:r>
+            <a:endParaRPr lang="en-US" sz="1300" dirty="0"/>
+          </a:p>
+          <a:p>
+            <a:pPr marL="342900" indent="-342900">
+              <a:spcAft>
+                <a:spcPts val="600"/>
+              </a:spcAft>
+              <a:buSzPct val="100000"/>
+              <a:buChar char="•"/>
+            </a:pPr>
+            <a:r>
+              <a:rPr lang="en-US" sz="1300" dirty="0">
+                <a:solidFill>
+                  <a:srgbClr val="1E293B"/>
+                </a:solidFill>
+                <a:latin typeface="Calibri" pitchFamily="34" charset="0"/>
+                <a:ea typeface="Calibri" pitchFamily="34" charset="-122"/>
+                <a:cs typeface="Calibri" pitchFamily="34" charset="-120"/>
+              </a:rPr>
+              <a:t>Has never seen your tender docs</a:t>
+            </a:r>
+            <a:endParaRPr lang="en-US" sz="1300" dirty="0"/>
+          </a:p>
+          <a:p>
+            <a:pPr marL="342900" indent="-342900">
+              <a:spcAft>
+                <a:spcPts val="600"/>
+              </a:spcAft>
+              <a:buSzPct val="100000"/>
+              <a:buChar char="•"/>
+            </a:pPr>
+            <a:r>
+              <a:rPr lang="en-US" sz="1300" dirty="0">
+                <a:solidFill>
+                  <a:srgbClr val="1E293B"/>
+                </a:solidFill>
+                <a:latin typeface="Calibri" pitchFamily="34" charset="0"/>
+                <a:ea typeface="Calibri" pitchFamily="34" charset="-122"/>
+                <a:cs typeface="Calibri" pitchFamily="34" charset="-120"/>
+              </a:rPr>
+              <a:t>Confidently invents plausible answers</a:t>
+            </a:r>
+            <a:endParaRPr lang="en-US" sz="1300" dirty="0"/>
+          </a:p>
+          <a:p>
+            <a:pPr marL="342900" indent="-342900">
+              <a:spcAft>
+                <a:spcPts val="600"/>
+              </a:spcAft>
+              <a:buSzPct val="100000"/>
+              <a:buChar char="•"/>
+            </a:pPr>
+            <a:r>
+              <a:rPr lang="en-US" sz="1300" dirty="0">
+                <a:solidFill>
+                  <a:srgbClr val="EF4444"/>
+                </a:solidFill>
+                <a:latin typeface="Calibri" pitchFamily="34" charset="0"/>
+                <a:ea typeface="Calibri" pitchFamily="34" charset="-122"/>
+                <a:cs typeface="Calibri" pitchFamily="34" charset="-120"/>
+              </a:rPr>
+              <a:t>"The LD clause is 5%..." (made up)</a:t>
+            </a:r>
+            <a:endParaRPr lang="en-US" sz="1300" dirty="0"/>
+          </a:p>
+        </p:txBody>
+      </p:sp>
+      <p:sp>
+        <p:nvSpPr>
+          <p:cNvPr id="9" name="Shape 6"/>
+          <p:cNvSpPr/>
+          <p:nvPr/>
+        </p:nvSpPr>
+        <p:spPr>
+          <a:xfrm>
+            <a:off x="4754880" y="1554480"/>
+            <a:ext cx="3657600" cy="2560320"/>
+          </a:xfrm>
+          <a:prstGeom prst="rect">
+            <a:avLst/>
+          </a:prstGeom>
+          <a:solidFill>
+            <a:srgbClr val="FFFFFF"/>
+          </a:solidFill>
+          <a:ln/>
+          <a:effectLst>
+            <a:outerShdw blurRad="76200" dist="25400" dir="8100000" algn="bl" rotWithShape="0">
+              <a:srgbClr val="000000">
+                <a:alpha val="12000"/>
+              </a:srgbClr>
+            </a:outerShdw>
+          </a:effectLst>
+        </p:spPr>
+      </p:sp>
+      <p:sp>
+        <p:nvSpPr>
+          <p:cNvPr id="10" name="Shape 7"/>
+          <p:cNvSpPr/>
+          <p:nvPr/>
+        </p:nvSpPr>
+        <p:spPr>
+          <a:xfrm>
+            <a:off x="4754880" y="1554480"/>
+            <a:ext cx="3657600" cy="73152"/>
+          </a:xfrm>
+          <a:prstGeom prst="rect">
+            <a:avLst/>
+          </a:prstGeom>
+          <a:solidFill>
+            <a:srgbClr val="22C55E"/>
+          </a:solidFill>
+          <a:ln/>
+        </p:spPr>
+      </p:sp>
+      <p:pic>
+        <p:nvPicPr>
+          <p:cNvPr id="11" name="Image 1" descr="preencoded.png"/>
+          <p:cNvPicPr>
+            <a:picLocks noChangeAspect="1"/>
+          </p:cNvPicPr>
+          <p:nvPr/>
+        </p:nvPicPr>
+        <p:blipFill>
+          <a:blip r:embed="rId4"/>
+          <a:stretch>
+            <a:fillRect/>
+          </a:stretch>
+        </p:blipFill>
+        <p:spPr>
+          <a:xfrm>
+            <a:off x="5029200" y="1783080"/>
+            <a:ext cx="457200" cy="457200"/>
+          </a:xfrm>
+          <a:prstGeom prst="rect">
+            <a:avLst/>
+          </a:prstGeom>
+        </p:spPr>
+      </p:pic>
+      <p:sp>
+        <p:nvSpPr>
+          <p:cNvPr id="12" name="Text 8"/>
+          <p:cNvSpPr/>
+          <p:nvPr/>
+        </p:nvSpPr>
+        <p:spPr>
+          <a:xfrm>
+            <a:off x="5623560" y="1783080"/>
+            <a:ext cx="2560320" cy="457200"/>
+          </a:xfrm>
+          <a:prstGeom prst="rect">
+            <a:avLst/>
+          </a:prstGeom>
+          <a:noFill/>
+          <a:ln/>
+        </p:spPr>
+        <p:txBody>
+          <a:bodyPr wrap="square" lIns="0" tIns="0" rIns="0" bIns="0" rtlCol="0" anchor="ctr"/>
+          <a:lstStyle/>
+          <a:p>
+            <a:pPr marL="0" indent="0">
+              <a:buNone/>
+            </a:pPr>
+            <a:r>
+              <a:rPr lang="en-US" sz="1800" b="1" dirty="0">
+                <a:solidFill>
+                  <a:srgbClr val="22C55E"/>
+                </a:solidFill>
+                <a:latin typeface="Trebuchet MS" pitchFamily="34" charset="0"/>
+                <a:ea typeface="Trebuchet MS" pitchFamily="34" charset="-122"/>
+                <a:cs typeface="Trebuchet MS" pitchFamily="34" charset="-120"/>
+              </a:rPr>
+              <a:t>LLM + RAG</a:t>
+            </a:r>
+            <a:endParaRPr lang="en-US" sz="1800" dirty="0"/>
+          </a:p>
+        </p:txBody>
+      </p:sp>
+      <p:sp>
+        <p:nvSpPr>
+          <p:cNvPr id="13" name="Text 9"/>
+          <p:cNvSpPr/>
+          <p:nvPr/>
+        </p:nvSpPr>
+        <p:spPr>
+          <a:xfrm>
+            <a:off x="5029200" y="2377440"/>
+            <a:ext cx="3108960" cy="1463040"/>
+          </a:xfrm>
+          <a:prstGeom prst="rect">
+            <a:avLst/>
+          </a:prstGeom>
+          <a:noFill/>
+          <a:ln/>
+        </p:spPr>
+        <p:txBody>
+          <a:bodyPr wrap="square" lIns="0" tIns="0" rIns="0" bIns="0" rtlCol="0" anchor="ctr"/>
+          <a:lstStyle/>
+          <a:p>
+            <a:pPr marL="342900" indent="-342900">
+              <a:spcAft>
+                <a:spcPts val="600"/>
+              </a:spcAft>
+              <a:buSzPct val="100000"/>
+              <a:buChar char="•"/>
+            </a:pPr>
+            <a:r>
+              <a:rPr lang="en-US" sz="1300" dirty="0">
+                <a:solidFill>
+                  <a:srgbClr val="1E293B"/>
+                </a:solidFill>
+                <a:latin typeface="Calibri" pitchFamily="34" charset="0"/>
+                <a:ea typeface="Calibri" pitchFamily="34" charset="-122"/>
+                <a:cs typeface="Calibri" pitchFamily="34" charset="-120"/>
+              </a:rPr>
+              <a:t>Retrieves relevant chunks first</a:t>
+            </a:r>
+            <a:endParaRPr lang="en-US" sz="1300" dirty="0"/>
+          </a:p>
+          <a:p>
+            <a:pPr marL="342900" indent="-342900">
+              <a:spcAft>
+                <a:spcPts val="600"/>
+              </a:spcAft>
+              <a:buSzPct val="100000"/>
+              <a:buChar char="•"/>
+            </a:pPr>
+            <a:r>
+              <a:rPr lang="en-US" sz="1300" dirty="0">
+                <a:solidFill>
+                  <a:srgbClr val="1E293B"/>
+                </a:solidFill>
+                <a:latin typeface="Calibri" pitchFamily="34" charset="0"/>
+                <a:ea typeface="Calibri" pitchFamily="34" charset="-122"/>
+                <a:cs typeface="Calibri" pitchFamily="34" charset="-120"/>
+              </a:rPr>
+              <a:t>LLM reads your actual documents</a:t>
+            </a:r>
+            <a:endParaRPr lang="en-US" sz="1300" dirty="0"/>
+          </a:p>
+          <a:p>
+            <a:pPr marL="342900" indent="-342900">
+              <a:spcAft>
+                <a:spcPts val="600"/>
+              </a:spcAft>
+              <a:buSzPct val="100000"/>
+              <a:buChar char="•"/>
+            </a:pPr>
+            <a:r>
+              <a:rPr lang="en-US" sz="1300" dirty="0">
+                <a:solidFill>
+                  <a:srgbClr val="1E293B"/>
+                </a:solidFill>
+                <a:latin typeface="Calibri" pitchFamily="34" charset="0"/>
+                <a:ea typeface="Calibri" pitchFamily="34" charset="-122"/>
+                <a:cs typeface="Calibri" pitchFamily="34" charset="-120"/>
+              </a:rPr>
+              <a:t>Answers grounded in real source text</a:t>
+            </a:r>
+            <a:endParaRPr lang="en-US" sz="1300" dirty="0"/>
+          </a:p>
+          <a:p>
+            <a:pPr marL="342900" indent="-342900">
+              <a:spcAft>
+                <a:spcPts val="600"/>
+              </a:spcAft>
+              <a:buSzPct val="100000"/>
+              <a:buChar char="•"/>
+            </a:pPr>
+            <a:r>
+              <a:rPr lang="en-US" sz="1300" dirty="0">
+                <a:solidFill>
+                  <a:srgbClr val="22C55E"/>
+                </a:solidFill>
+                <a:latin typeface="Calibri" pitchFamily="34" charset="0"/>
+                <a:ea typeface="Calibri" pitchFamily="34" charset="-122"/>
+                <a:cs typeface="Calibri" pitchFamily="34" charset="-120"/>
+              </a:rPr>
+              <a:t>"LD is 0.5%/week..." (Source: pg. 42)</a:t>
+            </a:r>
+            <a:endParaRPr lang="en-US" sz="1300" dirty="0"/>
+          </a:p>
+        </p:txBody>
+      </p:sp>
+      <p:sp>
+        <p:nvSpPr>
+          <p:cNvPr id="14" name="Shape 10"/>
+          <p:cNvSpPr/>
+          <p:nvPr/>
+        </p:nvSpPr>
+        <p:spPr>
+          <a:xfrm>
+            <a:off x="731520" y="4389120"/>
+            <a:ext cx="7680960" cy="502920"/>
+          </a:xfrm>
+          <a:prstGeom prst="rect">
+            <a:avLst/>
+          </a:prstGeom>
+          <a:solidFill>
+            <a:srgbClr val="EEF2FF"/>
+          </a:solidFill>
+          <a:ln/>
+        </p:spPr>
+      </p:sp>
+      <p:pic>
+        <p:nvPicPr>
+          <p:cNvPr id="15" name="Image 2" descr="preencoded.png"/>
+          <p:cNvPicPr>
+            <a:picLocks noChangeAspect="1"/>
+          </p:cNvPicPr>
+          <p:nvPr/>
+        </p:nvPicPr>
+        <p:blipFill>
+          <a:blip r:embed="rId5"/>
+          <a:stretch>
+            <a:fillRect/>
+          </a:stretch>
+        </p:blipFill>
+        <p:spPr>
+          <a:xfrm>
             <a:off x="914400" y="4462272"/>
             <a:ext cx="320040" cy="320040"/>
           </a:xfrm>
@@ -6032,7 +5802,7 @@
           <a:bodyPr wrap="square" lIns="0" tIns="0" rIns="0" bIns="0" rtlCol="0" anchor="ctr"/>
           <a:lstStyle/>
           <a:p>
-            <a:pPr indent="0" marL="0">
+            <a:pPr marL="0" indent="0">
               <a:buNone/>
             </a:pPr>
             <a:r>
@@ -6066,6 +5836,7 @@
         <a:solidFill>
           <a:srgbClr val="0F172A"/>
         </a:solidFill>
+        <a:effectLst/>
       </p:bgPr>
     </p:bg>
     <p:spTree>
@@ -6103,7 +5874,7 @@
           <a:bodyPr wrap="square" lIns="0" tIns="0" rIns="0" bIns="0" rtlCol="0" anchor="ctr"/>
           <a:lstStyle/>
           <a:p>
-            <a:pPr indent="0" marL="0">
+            <a:pPr marL="0" indent="0">
               <a:buNone/>
             </a:pPr>
             <a:r>
@@ -6142,7 +5913,7 @@
           <a:bodyPr wrap="square" lIns="0" tIns="0" rIns="0" bIns="0" rtlCol="0" anchor="ctr"/>
           <a:lstStyle/>
           <a:p>
-            <a:pPr indent="0" marL="0">
+            <a:pPr marL="0" indent="0">
               <a:buNone/>
             </a:pPr>
             <a:r>
@@ -6179,7 +5950,7 @@
           </a:solidFill>
           <a:ln/>
           <a:effectLst>
-            <a:outerShdw sx="100000" sy="100000" kx="0" ky="0" algn="bl" rotWithShape="0" blurRad="76200" dist="25400" dir="8100000">
+            <a:outerShdw blurRad="76200" dist="25400" dir="8100000" algn="bl" rotWithShape="0">
               <a:srgbClr val="000000">
                 <a:alpha val="12000"/>
               </a:srgbClr>
@@ -6228,7 +5999,7 @@
           <a:bodyPr wrap="square" lIns="0" tIns="0" rIns="0" bIns="0" rtlCol="0" anchor="ctr"/>
           <a:lstStyle/>
           <a:p>
-            <a:pPr algn="ctr" indent="0" marL="0">
+            <a:pPr marL="0" indent="0" algn="ctr">
               <a:buNone/>
             </a:pPr>
             <a:r>
@@ -6267,7 +6038,7 @@
           <a:bodyPr wrap="square" lIns="0" tIns="0" rIns="0" bIns="0" rtlCol="0" anchor="ctr"/>
           <a:lstStyle/>
           <a:p>
-            <a:pPr algn="ctr" indent="0" marL="0">
+            <a:pPr marL="0" indent="0" algn="ctr">
               <a:buNone/>
             </a:pPr>
             <a:r>
@@ -6284,7 +6055,7 @@
             <a:endParaRPr lang="en-US" sz="1200" dirty="0"/>
           </a:p>
           <a:p>
-            <a:pPr algn="ctr" indent="0" marL="0">
+            <a:pPr marL="0" indent="0" algn="ctr">
               <a:buNone/>
             </a:pPr>
             <a:r>
@@ -6301,7 +6072,7 @@
             <a:endParaRPr lang="en-US" sz="1200" dirty="0"/>
           </a:p>
           <a:p>
-            <a:pPr algn="ctr" indent="0" marL="0">
+            <a:pPr marL="0" indent="0" algn="ctr">
               <a:buNone/>
             </a:pPr>
             <a:r>
@@ -6318,7 +6089,7 @@
             <a:endParaRPr lang="en-US" sz="1200" dirty="0"/>
           </a:p>
           <a:p>
-            <a:pPr algn="ctr" indent="0" marL="0">
+            <a:pPr marL="0" indent="0" algn="ctr">
               <a:buNone/>
             </a:pPr>
             <a:r>
@@ -6357,7 +6128,7 @@
           <a:bodyPr wrap="square" lIns="0" tIns="0" rIns="0" bIns="0" rtlCol="0" anchor="ctr"/>
           <a:lstStyle/>
           <a:p>
-            <a:pPr algn="ctr" indent="0" marL="0">
+            <a:pPr marL="0" indent="0" algn="ctr">
               <a:buNone/>
             </a:pPr>
             <a:r>
@@ -6394,7 +6165,7 @@
           </a:solidFill>
           <a:ln/>
           <a:effectLst>
-            <a:outerShdw sx="100000" sy="100000" kx="0" ky="0" algn="bl" rotWithShape="0" blurRad="76200" dist="25400" dir="8100000">
+            <a:outerShdw blurRad="76200" dist="25400" dir="8100000" algn="bl" rotWithShape="0">
               <a:srgbClr val="000000">
                 <a:alpha val="12000"/>
               </a:srgbClr>
@@ -6443,7 +6214,7 @@
           <a:bodyPr wrap="square" lIns="0" tIns="0" rIns="0" bIns="0" rtlCol="0" anchor="ctr"/>
           <a:lstStyle/>
           <a:p>
-            <a:pPr algn="ctr" indent="0" marL="0">
+            <a:pPr marL="0" indent="0" algn="ctr">
               <a:buNone/>
             </a:pPr>
             <a:r>
@@ -6482,7 +6253,7 @@
           <a:bodyPr wrap="square" lIns="0" tIns="0" rIns="0" bIns="0" rtlCol="0" anchor="ctr"/>
           <a:lstStyle/>
           <a:p>
-            <a:pPr algn="ctr" indent="0" marL="0">
+            <a:pPr marL="0" indent="0" algn="ctr">
               <a:buNone/>
             </a:pPr>
             <a:r>
@@ -6499,7 +6270,7 @@
             <a:endParaRPr lang="en-US" sz="1200" dirty="0"/>
           </a:p>
           <a:p>
-            <a:pPr algn="ctr" indent="0" marL="0">
+            <a:pPr marL="0" indent="0" algn="ctr">
               <a:buNone/>
             </a:pPr>
             <a:r>
@@ -6516,7 +6287,7 @@
             <a:endParaRPr lang="en-US" sz="1200" dirty="0"/>
           </a:p>
           <a:p>
-            <a:pPr algn="ctr" indent="0" marL="0">
+            <a:pPr marL="0" indent="0" algn="ctr">
               <a:buNone/>
             </a:pPr>
             <a:r>
@@ -6533,7 +6304,7 @@
             <a:endParaRPr lang="en-US" sz="1200" dirty="0"/>
           </a:p>
           <a:p>
-            <a:pPr algn="ctr" indent="0" marL="0">
+            <a:pPr marL="0" indent="0" algn="ctr">
               <a:buNone/>
             </a:pPr>
             <a:r>
@@ -6572,7 +6343,7 @@
           <a:bodyPr wrap="square" lIns="0" tIns="0" rIns="0" bIns="0" rtlCol="0" anchor="ctr"/>
           <a:lstStyle/>
           <a:p>
-            <a:pPr algn="ctr" indent="0" marL="0">
+            <a:pPr marL="0" indent="0" algn="ctr">
               <a:buNone/>
             </a:pPr>
             <a:r>
@@ -6609,7 +6380,7 @@
           </a:solidFill>
           <a:ln/>
           <a:effectLst>
-            <a:outerShdw sx="100000" sy="100000" kx="0" ky="0" algn="bl" rotWithShape="0" blurRad="76200" dist="25400" dir="8100000">
+            <a:outerShdw blurRad="76200" dist="25400" dir="8100000" algn="bl" rotWithShape="0">
               <a:srgbClr val="000000">
                 <a:alpha val="12000"/>
               </a:srgbClr>
@@ -6658,7 +6429,7 @@
           <a:bodyPr wrap="square" lIns="0" tIns="0" rIns="0" bIns="0" rtlCol="0" anchor="ctr"/>
           <a:lstStyle/>
           <a:p>
-            <a:pPr algn="ctr" indent="0" marL="0">
+            <a:pPr marL="0" indent="0" algn="ctr">
               <a:buNone/>
             </a:pPr>
             <a:r>
@@ -6697,7 +6468,7 @@
           <a:bodyPr wrap="square" lIns="0" tIns="0" rIns="0" bIns="0" rtlCol="0" anchor="ctr"/>
           <a:lstStyle/>
           <a:p>
-            <a:pPr algn="ctr" indent="0" marL="0">
+            <a:pPr marL="0" indent="0" algn="ctr">
               <a:buNone/>
             </a:pPr>
             <a:r>
@@ -6714,7 +6485,7 @@
             <a:endParaRPr lang="en-US" sz="1200" dirty="0"/>
           </a:p>
           <a:p>
-            <a:pPr algn="ctr" indent="0" marL="0">
+            <a:pPr marL="0" indent="0" algn="ctr">
               <a:buNone/>
             </a:pPr>
             <a:r>
@@ -6731,7 +6502,7 @@
             <a:endParaRPr lang="en-US" sz="1200" dirty="0"/>
           </a:p>
           <a:p>
-            <a:pPr algn="ctr" indent="0" marL="0">
+            <a:pPr marL="0" indent="0" algn="ctr">
               <a:buNone/>
             </a:pPr>
             <a:r>
@@ -6748,7 +6519,7 @@
             <a:endParaRPr lang="en-US" sz="1200" dirty="0"/>
           </a:p>
           <a:p>
-            <a:pPr algn="ctr" indent="0" marL="0">
+            <a:pPr marL="0" indent="0" algn="ctr">
               <a:buNone/>
             </a:pPr>
             <a:r>
@@ -6765,7 +6536,7 @@
             <a:endParaRPr lang="en-US" sz="1200" dirty="0"/>
           </a:p>
           <a:p>
-            <a:pPr algn="ctr" indent="0" marL="0">
+            <a:pPr marL="0" indent="0" algn="ctr">
               <a:buNone/>
             </a:pPr>
             <a:r>
@@ -6804,7 +6575,7 @@
           <a:bodyPr wrap="square" lIns="0" tIns="0" rIns="0" bIns="0" rtlCol="0" anchor="ctr"/>
           <a:lstStyle/>
           <a:p>
-            <a:pPr algn="ctr" indent="0" marL="0">
+            <a:pPr marL="0" indent="0" algn="ctr">
               <a:buNone/>
             </a:pPr>
             <a:r>
@@ -6843,7 +6614,7 @@
           <a:bodyPr wrap="square" lIns="0" tIns="0" rIns="0" bIns="0" rtlCol="0" anchor="ctr"/>
           <a:lstStyle/>
           <a:p>
-            <a:pPr indent="0" marL="0">
+            <a:pPr marL="0" indent="0">
               <a:buNone/>
             </a:pPr>
             <a:r>
@@ -6877,6 +6648,7 @@
         <a:solidFill>
           <a:srgbClr val="F8FAFC"/>
         </a:solidFill>
+        <a:effectLst/>
       </p:bgPr>
     </p:bg>
     <p:spTree>
@@ -6914,7 +6686,7 @@
           <a:bodyPr wrap="square" lIns="0" tIns="0" rIns="0" bIns="0" rtlCol="0" anchor="ctr"/>
           <a:lstStyle/>
           <a:p>
-            <a:pPr indent="0" marL="0">
+            <a:pPr marL="0" indent="0">
               <a:buNone/>
             </a:pPr>
             <a:r>
@@ -6953,7 +6725,7 @@
           <a:bodyPr wrap="square" lIns="0" tIns="0" rIns="0" bIns="0" rtlCol="0" anchor="ctr"/>
           <a:lstStyle/>
           <a:p>
-            <a:pPr indent="0" marL="0">
+            <a:pPr marL="0" indent="0">
               <a:buNone/>
             </a:pPr>
             <a:r>
@@ -6990,7 +6762,7 @@
           </a:solidFill>
           <a:ln/>
           <a:effectLst>
-            <a:outerShdw sx="100000" sy="100000" kx="0" ky="0" algn="bl" rotWithShape="0" blurRad="76200" dist="25400" dir="8100000">
+            <a:outerShdw blurRad="76200" dist="25400" dir="8100000" algn="bl" rotWithShape="0">
               <a:srgbClr val="000000">
                 <a:alpha val="12000"/>
               </a:srgbClr>
@@ -7000,1031 +6772,7 @@
       </p:sp>
       <p:pic>
         <p:nvPicPr>
-          <p:cNvPr id="5" name="Image 0" descr="preencoded.png">    </p:cNvPr>
-          <p:cNvPicPr>
-            <a:picLocks noChangeAspect="1"/>
-          </p:cNvPicPr>
-          <p:nvPr/>
-        </p:nvPicPr>
-        <p:blipFill>
-          <a:blip r:embed="rId1"/>
-          <a:stretch>
-            <a:fillRect/>
-          </a:stretch>
-        </p:blipFill>
-        <p:spPr>
-          <a:xfrm>
-            <a:off x="1143000" y="1737360"/>
-            <a:ext cx="548640" cy="548640"/>
-          </a:xfrm>
-          <a:prstGeom prst="rect">
-            <a:avLst/>
-          </a:prstGeom>
-        </p:spPr>
-      </p:pic>
-      <p:sp>
-        <p:nvSpPr>
-          <p:cNvPr id="6" name="Text 3"/>
-          <p:cNvSpPr/>
-          <p:nvPr/>
-        </p:nvSpPr>
-        <p:spPr>
-          <a:xfrm>
-            <a:off x="457200" y="2377440"/>
-            <a:ext cx="2011680" cy="548640"/>
-          </a:xfrm>
-          <a:prstGeom prst="rect">
-            <a:avLst/>
-          </a:prstGeom>
-          <a:noFill/>
-          <a:ln/>
-        </p:spPr>
-        <p:txBody>
-          <a:bodyPr wrap="square" lIns="0" tIns="0" rIns="0" bIns="0" rtlCol="0" anchor="ctr"/>
-          <a:lstStyle/>
-          <a:p>
-            <a:pPr algn="ctr" indent="0" marL="0">
-              <a:buNone/>
-            </a:pPr>
-            <a:r>
-              <a:rPr lang="en-US" sz="1400" b="1" dirty="0">
-                <a:solidFill>
-                  <a:srgbClr val="1E293B"/>
-                </a:solidFill>
-                <a:latin typeface="Trebuchet MS" pitchFamily="34" charset="0"/>
-                <a:ea typeface="Trebuchet MS" pitchFamily="34" charset="-122"/>
-                <a:cs typeface="Trebuchet MS" pitchFamily="34" charset="-120"/>
-              </a:rPr>
-              <a:t>PGCIL Tender</a:t>
-            </a:r>
-            <a:endParaRPr lang="en-US" sz="1400" dirty="0"/>
-          </a:p>
-          <a:p>
-            <a:pPr algn="ctr" indent="0" marL="0">
-              <a:buNone/>
-            </a:pPr>
-            <a:r>
-              <a:rPr lang="en-US" sz="1400" b="1" dirty="0">
-                <a:solidFill>
-                  <a:srgbClr val="1E293B"/>
-                </a:solidFill>
-                <a:latin typeface="Trebuchet MS" pitchFamily="34" charset="0"/>
-                <a:ea typeface="Trebuchet MS" pitchFamily="34" charset="-122"/>
-                <a:cs typeface="Trebuchet MS" pitchFamily="34" charset="-120"/>
-              </a:rPr>
-              <a:t>500 Pages</a:t>
-            </a:r>
-            <a:endParaRPr lang="en-US" sz="1400" dirty="0"/>
-          </a:p>
-        </p:txBody>
-      </p:sp>
-      <p:sp>
-        <p:nvSpPr>
-          <p:cNvPr id="7" name="Shape 4"/>
-          <p:cNvSpPr/>
-          <p:nvPr/>
-        </p:nvSpPr>
-        <p:spPr>
-          <a:xfrm>
-            <a:off x="777240" y="3063240"/>
-            <a:ext cx="1371600" cy="54864"/>
-          </a:xfrm>
-          <a:prstGeom prst="rect">
-            <a:avLst/>
-          </a:prstGeom>
-          <a:solidFill>
-            <a:srgbClr val="94A3B8"/>
-          </a:solidFill>
-          <a:ln/>
-        </p:spPr>
-      </p:sp>
-      <p:sp>
-        <p:nvSpPr>
-          <p:cNvPr id="8" name="Shape 5"/>
-          <p:cNvSpPr/>
-          <p:nvPr/>
-        </p:nvSpPr>
-        <p:spPr>
-          <a:xfrm>
-            <a:off x="777240" y="3227832"/>
-            <a:ext cx="1371600" cy="54864"/>
-          </a:xfrm>
-          <a:prstGeom prst="rect">
-            <a:avLst/>
-          </a:prstGeom>
-          <a:solidFill>
-            <a:srgbClr val="64748B"/>
-          </a:solidFill>
-          <a:ln/>
-        </p:spPr>
-      </p:sp>
-      <p:sp>
-        <p:nvSpPr>
-          <p:cNvPr id="9" name="Shape 6"/>
-          <p:cNvSpPr/>
-          <p:nvPr/>
-        </p:nvSpPr>
-        <p:spPr>
-          <a:xfrm>
-            <a:off x="777240" y="3392424"/>
-            <a:ext cx="1371600" cy="54864"/>
-          </a:xfrm>
-          <a:prstGeom prst="rect">
-            <a:avLst/>
-          </a:prstGeom>
-          <a:solidFill>
-            <a:srgbClr val="94A3B8"/>
-          </a:solidFill>
-          <a:ln/>
-        </p:spPr>
-      </p:sp>
-      <p:sp>
-        <p:nvSpPr>
-          <p:cNvPr id="10" name="Shape 7"/>
-          <p:cNvSpPr/>
-          <p:nvPr/>
-        </p:nvSpPr>
-        <p:spPr>
-          <a:xfrm>
-            <a:off x="777240" y="3557016"/>
-            <a:ext cx="1371600" cy="54864"/>
-          </a:xfrm>
-          <a:prstGeom prst="rect">
-            <a:avLst/>
-          </a:prstGeom>
-          <a:solidFill>
-            <a:srgbClr val="64748B"/>
-          </a:solidFill>
-          <a:ln/>
-        </p:spPr>
-      </p:sp>
-      <p:sp>
-        <p:nvSpPr>
-          <p:cNvPr id="11" name="Shape 8"/>
-          <p:cNvSpPr/>
-          <p:nvPr/>
-        </p:nvSpPr>
-        <p:spPr>
-          <a:xfrm>
-            <a:off x="777240" y="3721608"/>
-            <a:ext cx="1371600" cy="54864"/>
-          </a:xfrm>
-          <a:prstGeom prst="rect">
-            <a:avLst/>
-          </a:prstGeom>
-          <a:solidFill>
-            <a:srgbClr val="94A3B8"/>
-          </a:solidFill>
-          <a:ln/>
-        </p:spPr>
-      </p:sp>
-      <p:pic>
-        <p:nvPicPr>
-          <p:cNvPr id="12" name="Image 1" descr="preencoded.png">    </p:cNvPr>
-          <p:cNvPicPr>
-            <a:picLocks noChangeAspect="1"/>
-          </p:cNvPicPr>
-          <p:nvPr/>
-        </p:nvPicPr>
-        <p:blipFill>
-          <a:blip r:embed="rId2"/>
-          <a:stretch>
-            <a:fillRect/>
-          </a:stretch>
-        </p:blipFill>
-        <p:spPr>
-          <a:xfrm>
-            <a:off x="2606040" y="2560320"/>
-            <a:ext cx="274320" cy="274320"/>
-          </a:xfrm>
-          <a:prstGeom prst="rect">
-            <a:avLst/>
-          </a:prstGeom>
-        </p:spPr>
-      </p:pic>
-      <p:sp>
-        <p:nvSpPr>
-          <p:cNvPr id="13" name="Shape 9"/>
-          <p:cNvSpPr/>
-          <p:nvPr/>
-        </p:nvSpPr>
-        <p:spPr>
-          <a:xfrm>
-            <a:off x="3108960" y="1554480"/>
-            <a:ext cx="1325880" cy="2560320"/>
-          </a:xfrm>
-          <a:prstGeom prst="rect">
-            <a:avLst/>
-          </a:prstGeom>
-          <a:solidFill>
-            <a:srgbClr val="FFFFFF"/>
-          </a:solidFill>
-          <a:ln/>
-          <a:effectLst>
-            <a:outerShdw sx="100000" sy="100000" kx="0" ky="0" algn="bl" rotWithShape="0" blurRad="76200" dist="25400" dir="8100000">
-              <a:srgbClr val="000000">
-                <a:alpha val="12000"/>
-              </a:srgbClr>
-            </a:outerShdw>
-          </a:effectLst>
-        </p:spPr>
-      </p:sp>
-      <p:sp>
-        <p:nvSpPr>
-          <p:cNvPr id="14" name="Shape 10"/>
-          <p:cNvSpPr/>
-          <p:nvPr/>
-        </p:nvSpPr>
-        <p:spPr>
-          <a:xfrm>
-            <a:off x="3108960" y="1554480"/>
-            <a:ext cx="1325880" cy="54864"/>
-          </a:xfrm>
-          <a:prstGeom prst="rect">
-            <a:avLst/>
-          </a:prstGeom>
-          <a:solidFill>
-            <a:srgbClr val="F97316"/>
-          </a:solidFill>
-          <a:ln/>
-        </p:spPr>
-      </p:sp>
-      <p:sp>
-        <p:nvSpPr>
-          <p:cNvPr id="15" name="Text 11"/>
-          <p:cNvSpPr/>
-          <p:nvPr/>
-        </p:nvSpPr>
-        <p:spPr>
-          <a:xfrm>
-            <a:off x="3108960" y="1828800"/>
-            <a:ext cx="1325880" cy="1097280"/>
-          </a:xfrm>
-          <a:prstGeom prst="rect">
-            <a:avLst/>
-          </a:prstGeom>
-          <a:noFill/>
-          <a:ln/>
-        </p:spPr>
-        <p:txBody>
-          <a:bodyPr wrap="square" lIns="0" tIns="0" rIns="0" bIns="0" rtlCol="0" anchor="t"/>
-          <a:lstStyle/>
-          <a:p>
-            <a:pPr algn="ctr" indent="0" marL="0">
-              <a:buNone/>
-            </a:pPr>
-            <a:r>
-              <a:rPr lang="en-US" sz="1000" dirty="0">
-                <a:solidFill>
-                  <a:srgbClr val="1E293B"/>
-                </a:solidFill>
-                <a:latin typeface="Calibri" pitchFamily="34" charset="0"/>
-                <a:ea typeface="Calibri" pitchFamily="34" charset="-122"/>
-                <a:cs typeface="Calibri" pitchFamily="34" charset="-120"/>
-              </a:rPr>
-              <a:t>Chunk 1</a:t>
-            </a:r>
-            <a:endParaRPr lang="en-US" sz="1000" dirty="0"/>
-          </a:p>
-          <a:p>
-            <a:pPr algn="ctr" indent="0" marL="0">
-              <a:buNone/>
-            </a:pPr>
-            <a:r>
-              <a:rPr lang="en-US" sz="1000" dirty="0">
-                <a:solidFill>
-                  <a:srgbClr val="1E293B"/>
-                </a:solidFill>
-                <a:latin typeface="Calibri" pitchFamily="34" charset="0"/>
-                <a:ea typeface="Calibri" pitchFamily="34" charset="-122"/>
-                <a:cs typeface="Calibri" pitchFamily="34" charset="-120"/>
-              </a:rPr>
-              <a:t>LD Clauses</a:t>
-            </a:r>
-            <a:endParaRPr lang="en-US" sz="1000" dirty="0"/>
-          </a:p>
-          <a:p>
-            <a:pPr algn="ctr" indent="0" marL="0">
-              <a:buNone/>
-            </a:pPr>
-            <a:r>
-              <a:rPr lang="en-US" sz="1000" dirty="0">
-                <a:solidFill>
-                  <a:srgbClr val="1E293B"/>
-                </a:solidFill>
-                <a:latin typeface="Calibri" pitchFamily="34" charset="0"/>
-                <a:ea typeface="Calibri" pitchFamily="34" charset="-122"/>
-                <a:cs typeface="Calibri" pitchFamily="34" charset="-120"/>
-              </a:rPr>
-              <a:t>(pg. 40–44)</a:t>
-            </a:r>
-            <a:endParaRPr lang="en-US" sz="1000" dirty="0"/>
-          </a:p>
-        </p:txBody>
-      </p:sp>
-      <p:sp>
-        <p:nvSpPr>
-          <p:cNvPr id="16" name="Shape 12"/>
-          <p:cNvSpPr/>
-          <p:nvPr/>
-        </p:nvSpPr>
-        <p:spPr>
-          <a:xfrm>
-            <a:off x="3246120" y="3017520"/>
-            <a:ext cx="1051560" cy="45720"/>
-          </a:xfrm>
-          <a:prstGeom prst="rect">
-            <a:avLst/>
-          </a:prstGeom>
-          <a:solidFill>
-            <a:srgbClr val="F97316"/>
-          </a:solidFill>
-          <a:ln/>
-        </p:spPr>
-      </p:sp>
-      <p:sp>
-        <p:nvSpPr>
-          <p:cNvPr id="17" name="Shape 13"/>
-          <p:cNvSpPr/>
-          <p:nvPr/>
-        </p:nvSpPr>
-        <p:spPr>
-          <a:xfrm>
-            <a:off x="3246120" y="3182112"/>
-            <a:ext cx="1051560" cy="45720"/>
-          </a:xfrm>
-          <a:prstGeom prst="rect">
-            <a:avLst/>
-          </a:prstGeom>
-          <a:solidFill>
-            <a:srgbClr val="F97316"/>
-          </a:solidFill>
-          <a:ln/>
-        </p:spPr>
-      </p:sp>
-      <p:sp>
-        <p:nvSpPr>
-          <p:cNvPr id="18" name="Shape 14"/>
-          <p:cNvSpPr/>
-          <p:nvPr/>
-        </p:nvSpPr>
-        <p:spPr>
-          <a:xfrm>
-            <a:off x="3246120" y="3346704"/>
-            <a:ext cx="1051560" cy="45720"/>
-          </a:xfrm>
-          <a:prstGeom prst="rect">
-            <a:avLst/>
-          </a:prstGeom>
-          <a:solidFill>
-            <a:srgbClr val="F97316"/>
-          </a:solidFill>
-          <a:ln/>
-        </p:spPr>
-      </p:sp>
-      <p:sp>
-        <p:nvSpPr>
-          <p:cNvPr id="19" name="Shape 15"/>
-          <p:cNvSpPr/>
-          <p:nvPr/>
-        </p:nvSpPr>
-        <p:spPr>
-          <a:xfrm>
-            <a:off x="3246120" y="3511296"/>
-            <a:ext cx="1051560" cy="45720"/>
-          </a:xfrm>
-          <a:prstGeom prst="rect">
-            <a:avLst/>
-          </a:prstGeom>
-          <a:solidFill>
-            <a:srgbClr val="F97316"/>
-          </a:solidFill>
-          <a:ln/>
-        </p:spPr>
-      </p:sp>
-      <p:sp>
-        <p:nvSpPr>
-          <p:cNvPr id="20" name="Shape 16"/>
-          <p:cNvSpPr/>
-          <p:nvPr/>
-        </p:nvSpPr>
-        <p:spPr>
-          <a:xfrm>
-            <a:off x="4617720" y="1554480"/>
-            <a:ext cx="1325880" cy="2560320"/>
-          </a:xfrm>
-          <a:prstGeom prst="rect">
-            <a:avLst/>
-          </a:prstGeom>
-          <a:solidFill>
-            <a:srgbClr val="FFFFFF"/>
-          </a:solidFill>
-          <a:ln/>
-          <a:effectLst>
-            <a:outerShdw sx="100000" sy="100000" kx="0" ky="0" algn="bl" rotWithShape="0" blurRad="76200" dist="25400" dir="8100000">
-              <a:srgbClr val="000000">
-                <a:alpha val="12000"/>
-              </a:srgbClr>
-            </a:outerShdw>
-          </a:effectLst>
-        </p:spPr>
-      </p:sp>
-      <p:sp>
-        <p:nvSpPr>
-          <p:cNvPr id="21" name="Shape 17"/>
-          <p:cNvSpPr/>
-          <p:nvPr/>
-        </p:nvSpPr>
-        <p:spPr>
-          <a:xfrm>
-            <a:off x="4617720" y="1554480"/>
-            <a:ext cx="1325880" cy="54864"/>
-          </a:xfrm>
-          <a:prstGeom prst="rect">
-            <a:avLst/>
-          </a:prstGeom>
-          <a:solidFill>
-            <a:srgbClr val="6366F1"/>
-          </a:solidFill>
-          <a:ln/>
-        </p:spPr>
-      </p:sp>
-      <p:sp>
-        <p:nvSpPr>
-          <p:cNvPr id="22" name="Text 18"/>
-          <p:cNvSpPr/>
-          <p:nvPr/>
-        </p:nvSpPr>
-        <p:spPr>
-          <a:xfrm>
-            <a:off x="4617720" y="1828800"/>
-            <a:ext cx="1325880" cy="1097280"/>
-          </a:xfrm>
-          <a:prstGeom prst="rect">
-            <a:avLst/>
-          </a:prstGeom>
-          <a:noFill/>
-          <a:ln/>
-        </p:spPr>
-        <p:txBody>
-          <a:bodyPr wrap="square" lIns="0" tIns="0" rIns="0" bIns="0" rtlCol="0" anchor="t"/>
-          <a:lstStyle/>
-          <a:p>
-            <a:pPr algn="ctr" indent="0" marL="0">
-              <a:buNone/>
-            </a:pPr>
-            <a:r>
-              <a:rPr lang="en-US" sz="1000" dirty="0">
-                <a:solidFill>
-                  <a:srgbClr val="1E293B"/>
-                </a:solidFill>
-                <a:latin typeface="Calibri" pitchFamily="34" charset="0"/>
-                <a:ea typeface="Calibri" pitchFamily="34" charset="-122"/>
-                <a:cs typeface="Calibri" pitchFamily="34" charset="-120"/>
-              </a:rPr>
-              <a:t>Chunk 2</a:t>
-            </a:r>
-            <a:endParaRPr lang="en-US" sz="1000" dirty="0"/>
-          </a:p>
-          <a:p>
-            <a:pPr algn="ctr" indent="0" marL="0">
-              <a:buNone/>
-            </a:pPr>
-            <a:r>
-              <a:rPr lang="en-US" sz="1000" dirty="0">
-                <a:solidFill>
-                  <a:srgbClr val="1E293B"/>
-                </a:solidFill>
-                <a:latin typeface="Calibri" pitchFamily="34" charset="0"/>
-                <a:ea typeface="Calibri" pitchFamily="34" charset="-122"/>
-                <a:cs typeface="Calibri" pitchFamily="34" charset="-120"/>
-              </a:rPr>
-              <a:t>Payment Terms</a:t>
-            </a:r>
-            <a:endParaRPr lang="en-US" sz="1000" dirty="0"/>
-          </a:p>
-          <a:p>
-            <a:pPr algn="ctr" indent="0" marL="0">
-              <a:buNone/>
-            </a:pPr>
-            <a:r>
-              <a:rPr lang="en-US" sz="1000" dirty="0">
-                <a:solidFill>
-                  <a:srgbClr val="1E293B"/>
-                </a:solidFill>
-                <a:latin typeface="Calibri" pitchFamily="34" charset="0"/>
-                <a:ea typeface="Calibri" pitchFamily="34" charset="-122"/>
-                <a:cs typeface="Calibri" pitchFamily="34" charset="-120"/>
-              </a:rPr>
-              <a:t>(pg. 55–58)</a:t>
-            </a:r>
-            <a:endParaRPr lang="en-US" sz="1000" dirty="0"/>
-          </a:p>
-        </p:txBody>
-      </p:sp>
-      <p:sp>
-        <p:nvSpPr>
-          <p:cNvPr id="23" name="Shape 19"/>
-          <p:cNvSpPr/>
-          <p:nvPr/>
-        </p:nvSpPr>
-        <p:spPr>
-          <a:xfrm>
-            <a:off x="4754880" y="3017520"/>
-            <a:ext cx="1051560" cy="45720"/>
-          </a:xfrm>
-          <a:prstGeom prst="rect">
-            <a:avLst/>
-          </a:prstGeom>
-          <a:solidFill>
-            <a:srgbClr val="6366F1"/>
-          </a:solidFill>
-          <a:ln/>
-        </p:spPr>
-      </p:sp>
-      <p:sp>
-        <p:nvSpPr>
-          <p:cNvPr id="24" name="Shape 20"/>
-          <p:cNvSpPr/>
-          <p:nvPr/>
-        </p:nvSpPr>
-        <p:spPr>
-          <a:xfrm>
-            <a:off x="4754880" y="3182112"/>
-            <a:ext cx="1051560" cy="45720"/>
-          </a:xfrm>
-          <a:prstGeom prst="rect">
-            <a:avLst/>
-          </a:prstGeom>
-          <a:solidFill>
-            <a:srgbClr val="6366F1"/>
-          </a:solidFill>
-          <a:ln/>
-        </p:spPr>
-      </p:sp>
-      <p:sp>
-        <p:nvSpPr>
-          <p:cNvPr id="25" name="Shape 21"/>
-          <p:cNvSpPr/>
-          <p:nvPr/>
-        </p:nvSpPr>
-        <p:spPr>
-          <a:xfrm>
-            <a:off x="4754880" y="3346704"/>
-            <a:ext cx="1051560" cy="45720"/>
-          </a:xfrm>
-          <a:prstGeom prst="rect">
-            <a:avLst/>
-          </a:prstGeom>
-          <a:solidFill>
-            <a:srgbClr val="6366F1"/>
-          </a:solidFill>
-          <a:ln/>
-        </p:spPr>
-      </p:sp>
-      <p:sp>
-        <p:nvSpPr>
-          <p:cNvPr id="26" name="Shape 22"/>
-          <p:cNvSpPr/>
-          <p:nvPr/>
-        </p:nvSpPr>
-        <p:spPr>
-          <a:xfrm>
-            <a:off x="4754880" y="3511296"/>
-            <a:ext cx="1051560" cy="45720"/>
-          </a:xfrm>
-          <a:prstGeom prst="rect">
-            <a:avLst/>
-          </a:prstGeom>
-          <a:solidFill>
-            <a:srgbClr val="6366F1"/>
-          </a:solidFill>
-          <a:ln/>
-        </p:spPr>
-      </p:sp>
-      <p:sp>
-        <p:nvSpPr>
-          <p:cNvPr id="27" name="Shape 23"/>
-          <p:cNvSpPr/>
-          <p:nvPr/>
-        </p:nvSpPr>
-        <p:spPr>
-          <a:xfrm>
-            <a:off x="6126480" y="1554480"/>
-            <a:ext cx="1325880" cy="2560320"/>
-          </a:xfrm>
-          <a:prstGeom prst="rect">
-            <a:avLst/>
-          </a:prstGeom>
-          <a:solidFill>
-            <a:srgbClr val="FFFFFF"/>
-          </a:solidFill>
-          <a:ln/>
-          <a:effectLst>
-            <a:outerShdw sx="100000" sy="100000" kx="0" ky="0" algn="bl" rotWithShape="0" blurRad="76200" dist="25400" dir="8100000">
-              <a:srgbClr val="000000">
-                <a:alpha val="12000"/>
-              </a:srgbClr>
-            </a:outerShdw>
-          </a:effectLst>
-        </p:spPr>
-      </p:sp>
-      <p:sp>
-        <p:nvSpPr>
-          <p:cNvPr id="28" name="Shape 24"/>
-          <p:cNvSpPr/>
-          <p:nvPr/>
-        </p:nvSpPr>
-        <p:spPr>
-          <a:xfrm>
-            <a:off x="6126480" y="1554480"/>
-            <a:ext cx="1325880" cy="54864"/>
-          </a:xfrm>
-          <a:prstGeom prst="rect">
-            <a:avLst/>
-          </a:prstGeom>
-          <a:solidFill>
-            <a:srgbClr val="22C55E"/>
-          </a:solidFill>
-          <a:ln/>
-        </p:spPr>
-      </p:sp>
-      <p:sp>
-        <p:nvSpPr>
-          <p:cNvPr id="29" name="Text 25"/>
-          <p:cNvSpPr/>
-          <p:nvPr/>
-        </p:nvSpPr>
-        <p:spPr>
-          <a:xfrm>
-            <a:off x="6126480" y="1828800"/>
-            <a:ext cx="1325880" cy="1097280"/>
-          </a:xfrm>
-          <a:prstGeom prst="rect">
-            <a:avLst/>
-          </a:prstGeom>
-          <a:noFill/>
-          <a:ln/>
-        </p:spPr>
-        <p:txBody>
-          <a:bodyPr wrap="square" lIns="0" tIns="0" rIns="0" bIns="0" rtlCol="0" anchor="t"/>
-          <a:lstStyle/>
-          <a:p>
-            <a:pPr algn="ctr" indent="0" marL="0">
-              <a:buNone/>
-            </a:pPr>
-            <a:r>
-              <a:rPr lang="en-US" sz="1000" dirty="0">
-                <a:solidFill>
-                  <a:srgbClr val="1E293B"/>
-                </a:solidFill>
-                <a:latin typeface="Calibri" pitchFamily="34" charset="0"/>
-                <a:ea typeface="Calibri" pitchFamily="34" charset="-122"/>
-                <a:cs typeface="Calibri" pitchFamily="34" charset="-120"/>
-              </a:rPr>
-              <a:t>Chunk 3</a:t>
-            </a:r>
-            <a:endParaRPr lang="en-US" sz="1000" dirty="0"/>
-          </a:p>
-          <a:p>
-            <a:pPr algn="ctr" indent="0" marL="0">
-              <a:buNone/>
-            </a:pPr>
-            <a:r>
-              <a:rPr lang="en-US" sz="1000" dirty="0">
-                <a:solidFill>
-                  <a:srgbClr val="1E293B"/>
-                </a:solidFill>
-                <a:latin typeface="Calibri" pitchFamily="34" charset="0"/>
-                <a:ea typeface="Calibri" pitchFamily="34" charset="-122"/>
-                <a:cs typeface="Calibri" pitchFamily="34" charset="-120"/>
-              </a:rPr>
-              <a:t>Tech Specs</a:t>
-            </a:r>
-            <a:endParaRPr lang="en-US" sz="1000" dirty="0"/>
-          </a:p>
-          <a:p>
-            <a:pPr algn="ctr" indent="0" marL="0">
-              <a:buNone/>
-            </a:pPr>
-            <a:r>
-              <a:rPr lang="en-US" sz="1000" dirty="0">
-                <a:solidFill>
-                  <a:srgbClr val="1E293B"/>
-                </a:solidFill>
-                <a:latin typeface="Calibri" pitchFamily="34" charset="0"/>
-                <a:ea typeface="Calibri" pitchFamily="34" charset="-122"/>
-                <a:cs typeface="Calibri" pitchFamily="34" charset="-120"/>
-              </a:rPr>
-              <a:t>(pg. 102–110)</a:t>
-            </a:r>
-            <a:endParaRPr lang="en-US" sz="1000" dirty="0"/>
-          </a:p>
-        </p:txBody>
-      </p:sp>
-      <p:sp>
-        <p:nvSpPr>
-          <p:cNvPr id="30" name="Shape 26"/>
-          <p:cNvSpPr/>
-          <p:nvPr/>
-        </p:nvSpPr>
-        <p:spPr>
-          <a:xfrm>
-            <a:off x="6263640" y="3017520"/>
-            <a:ext cx="1051560" cy="45720"/>
-          </a:xfrm>
-          <a:prstGeom prst="rect">
-            <a:avLst/>
-          </a:prstGeom>
-          <a:solidFill>
-            <a:srgbClr val="22C55E"/>
-          </a:solidFill>
-          <a:ln/>
-        </p:spPr>
-      </p:sp>
-      <p:sp>
-        <p:nvSpPr>
-          <p:cNvPr id="31" name="Shape 27"/>
-          <p:cNvSpPr/>
-          <p:nvPr/>
-        </p:nvSpPr>
-        <p:spPr>
-          <a:xfrm>
-            <a:off x="6263640" y="3182112"/>
-            <a:ext cx="1051560" cy="45720"/>
-          </a:xfrm>
-          <a:prstGeom prst="rect">
-            <a:avLst/>
-          </a:prstGeom>
-          <a:solidFill>
-            <a:srgbClr val="22C55E"/>
-          </a:solidFill>
-          <a:ln/>
-        </p:spPr>
-      </p:sp>
-      <p:sp>
-        <p:nvSpPr>
-          <p:cNvPr id="32" name="Shape 28"/>
-          <p:cNvSpPr/>
-          <p:nvPr/>
-        </p:nvSpPr>
-        <p:spPr>
-          <a:xfrm>
-            <a:off x="6263640" y="3346704"/>
-            <a:ext cx="1051560" cy="45720"/>
-          </a:xfrm>
-          <a:prstGeom prst="rect">
-            <a:avLst/>
-          </a:prstGeom>
-          <a:solidFill>
-            <a:srgbClr val="22C55E"/>
-          </a:solidFill>
-          <a:ln/>
-        </p:spPr>
-      </p:sp>
-      <p:sp>
-        <p:nvSpPr>
-          <p:cNvPr id="33" name="Shape 29"/>
-          <p:cNvSpPr/>
-          <p:nvPr/>
-        </p:nvSpPr>
-        <p:spPr>
-          <a:xfrm>
-            <a:off x="6263640" y="3511296"/>
-            <a:ext cx="1051560" cy="45720"/>
-          </a:xfrm>
-          <a:prstGeom prst="rect">
-            <a:avLst/>
-          </a:prstGeom>
-          <a:solidFill>
-            <a:srgbClr val="22C55E"/>
-          </a:solidFill>
-          <a:ln/>
-        </p:spPr>
-      </p:sp>
-      <p:sp>
-        <p:nvSpPr>
-          <p:cNvPr id="34" name="Shape 30"/>
-          <p:cNvSpPr/>
-          <p:nvPr/>
-        </p:nvSpPr>
-        <p:spPr>
-          <a:xfrm>
-            <a:off x="7635240" y="1554480"/>
-            <a:ext cx="1325880" cy="2560320"/>
-          </a:xfrm>
-          <a:prstGeom prst="rect">
-            <a:avLst/>
-          </a:prstGeom>
-          <a:solidFill>
-            <a:srgbClr val="FFFFFF"/>
-          </a:solidFill>
-          <a:ln/>
-          <a:effectLst>
-            <a:outerShdw sx="100000" sy="100000" kx="0" ky="0" algn="bl" rotWithShape="0" blurRad="76200" dist="25400" dir="8100000">
-              <a:srgbClr val="000000">
-                <a:alpha val="12000"/>
-              </a:srgbClr>
-            </a:outerShdw>
-          </a:effectLst>
-        </p:spPr>
-      </p:sp>
-      <p:sp>
-        <p:nvSpPr>
-          <p:cNvPr id="35" name="Shape 31"/>
-          <p:cNvSpPr/>
-          <p:nvPr/>
-        </p:nvSpPr>
-        <p:spPr>
-          <a:xfrm>
-            <a:off x="7635240" y="1554480"/>
-            <a:ext cx="1325880" cy="54864"/>
-          </a:xfrm>
-          <a:prstGeom prst="rect">
-            <a:avLst/>
-          </a:prstGeom>
-          <a:solidFill>
-            <a:srgbClr val="EF4444"/>
-          </a:solidFill>
-          <a:ln/>
-        </p:spPr>
-      </p:sp>
-      <p:sp>
-        <p:nvSpPr>
-          <p:cNvPr id="36" name="Text 32"/>
-          <p:cNvSpPr/>
-          <p:nvPr/>
-        </p:nvSpPr>
-        <p:spPr>
-          <a:xfrm>
-            <a:off x="7635240" y="1828800"/>
-            <a:ext cx="1325880" cy="1097280"/>
-          </a:xfrm>
-          <a:prstGeom prst="rect">
-            <a:avLst/>
-          </a:prstGeom>
-          <a:noFill/>
-          <a:ln/>
-        </p:spPr>
-        <p:txBody>
-          <a:bodyPr wrap="square" lIns="0" tIns="0" rIns="0" bIns="0" rtlCol="0" anchor="t"/>
-          <a:lstStyle/>
-          <a:p>
-            <a:pPr algn="ctr" indent="0" marL="0">
-              <a:buNone/>
-            </a:pPr>
-            <a:r>
-              <a:rPr lang="en-US" sz="1000" dirty="0">
-                <a:solidFill>
-                  <a:srgbClr val="1E293B"/>
-                </a:solidFill>
-                <a:latin typeface="Calibri" pitchFamily="34" charset="0"/>
-                <a:ea typeface="Calibri" pitchFamily="34" charset="-122"/>
-                <a:cs typeface="Calibri" pitchFamily="34" charset="-120"/>
-              </a:rPr>
-              <a:t>Chunk N</a:t>
-            </a:r>
-            <a:endParaRPr lang="en-US" sz="1000" dirty="0"/>
-          </a:p>
-          <a:p>
-            <a:pPr algn="ctr" indent="0" marL="0">
-              <a:buNone/>
-            </a:pPr>
-            <a:r>
-              <a:rPr lang="en-US" sz="1000" dirty="0">
-                <a:solidFill>
-                  <a:srgbClr val="1E293B"/>
-                </a:solidFill>
-                <a:latin typeface="Calibri" pitchFamily="34" charset="0"/>
-                <a:ea typeface="Calibri" pitchFamily="34" charset="-122"/>
-                <a:cs typeface="Calibri" pitchFamily="34" charset="-120"/>
-              </a:rPr>
-              <a:t>Warranty</a:t>
-            </a:r>
-            <a:endParaRPr lang="en-US" sz="1000" dirty="0"/>
-          </a:p>
-          <a:p>
-            <a:pPr algn="ctr" indent="0" marL="0">
-              <a:buNone/>
-            </a:pPr>
-            <a:r>
-              <a:rPr lang="en-US" sz="1000" dirty="0">
-                <a:solidFill>
-                  <a:srgbClr val="1E293B"/>
-                </a:solidFill>
-                <a:latin typeface="Calibri" pitchFamily="34" charset="0"/>
-                <a:ea typeface="Calibri" pitchFamily="34" charset="-122"/>
-                <a:cs typeface="Calibri" pitchFamily="34" charset="-120"/>
-              </a:rPr>
-              <a:t>(pg. 340–345)</a:t>
-            </a:r>
-            <a:endParaRPr lang="en-US" sz="1000" dirty="0"/>
-          </a:p>
-        </p:txBody>
-      </p:sp>
-      <p:sp>
-        <p:nvSpPr>
-          <p:cNvPr id="37" name="Shape 33"/>
-          <p:cNvSpPr/>
-          <p:nvPr/>
-        </p:nvSpPr>
-        <p:spPr>
-          <a:xfrm>
-            <a:off x="7772400" y="3017520"/>
-            <a:ext cx="1051560" cy="45720"/>
-          </a:xfrm>
-          <a:prstGeom prst="rect">
-            <a:avLst/>
-          </a:prstGeom>
-          <a:solidFill>
-            <a:srgbClr val="EF4444"/>
-          </a:solidFill>
-          <a:ln/>
-        </p:spPr>
-      </p:sp>
-      <p:sp>
-        <p:nvSpPr>
-          <p:cNvPr id="38" name="Shape 34"/>
-          <p:cNvSpPr/>
-          <p:nvPr/>
-        </p:nvSpPr>
-        <p:spPr>
-          <a:xfrm>
-            <a:off x="7772400" y="3182112"/>
-            <a:ext cx="1051560" cy="45720"/>
-          </a:xfrm>
-          <a:prstGeom prst="rect">
-            <a:avLst/>
-          </a:prstGeom>
-          <a:solidFill>
-            <a:srgbClr val="EF4444"/>
-          </a:solidFill>
-          <a:ln/>
-        </p:spPr>
-      </p:sp>
-      <p:sp>
-        <p:nvSpPr>
-          <p:cNvPr id="39" name="Shape 35"/>
-          <p:cNvSpPr/>
-          <p:nvPr/>
-        </p:nvSpPr>
-        <p:spPr>
-          <a:xfrm>
-            <a:off x="7772400" y="3346704"/>
-            <a:ext cx="1051560" cy="45720"/>
-          </a:xfrm>
-          <a:prstGeom prst="rect">
-            <a:avLst/>
-          </a:prstGeom>
-          <a:solidFill>
-            <a:srgbClr val="EF4444"/>
-          </a:solidFill>
-          <a:ln/>
-        </p:spPr>
-      </p:sp>
-      <p:sp>
-        <p:nvSpPr>
-          <p:cNvPr id="40" name="Shape 36"/>
-          <p:cNvSpPr/>
-          <p:nvPr/>
-        </p:nvSpPr>
-        <p:spPr>
-          <a:xfrm>
-            <a:off x="7772400" y="3511296"/>
-            <a:ext cx="1051560" cy="45720"/>
-          </a:xfrm>
-          <a:prstGeom prst="rect">
-            <a:avLst/>
-          </a:prstGeom>
-          <a:solidFill>
-            <a:srgbClr val="EF4444"/>
-          </a:solidFill>
-          <a:ln/>
-        </p:spPr>
-      </p:sp>
-      <p:sp>
-        <p:nvSpPr>
-          <p:cNvPr id="41" name="Shape 37"/>
-          <p:cNvSpPr/>
-          <p:nvPr/>
-        </p:nvSpPr>
-        <p:spPr>
-          <a:xfrm>
-            <a:off x="731520" y="4343400"/>
-            <a:ext cx="7680960" cy="594360"/>
-          </a:xfrm>
-          <a:prstGeom prst="rect">
-            <a:avLst/>
-          </a:prstGeom>
-          <a:solidFill>
-            <a:srgbClr val="EEF2FF"/>
-          </a:solidFill>
-          <a:ln/>
-        </p:spPr>
-      </p:sp>
-      <p:pic>
-        <p:nvPicPr>
-          <p:cNvPr id="42" name="Image 2" descr="preencoded.png">    </p:cNvPr>
+          <p:cNvPr id="5" name="Image 0" descr="preencoded.png"/>
           <p:cNvPicPr>
             <a:picLocks noChangeAspect="1"/>
           </p:cNvPicPr>
@@ -8038,6 +6786,1030 @@
         </p:blipFill>
         <p:spPr>
           <a:xfrm>
+            <a:off x="1143000" y="1737360"/>
+            <a:ext cx="548640" cy="548640"/>
+          </a:xfrm>
+          <a:prstGeom prst="rect">
+            <a:avLst/>
+          </a:prstGeom>
+        </p:spPr>
+      </p:pic>
+      <p:sp>
+        <p:nvSpPr>
+          <p:cNvPr id="6" name="Text 3"/>
+          <p:cNvSpPr/>
+          <p:nvPr/>
+        </p:nvSpPr>
+        <p:spPr>
+          <a:xfrm>
+            <a:off x="457200" y="2377440"/>
+            <a:ext cx="2011680" cy="548640"/>
+          </a:xfrm>
+          <a:prstGeom prst="rect">
+            <a:avLst/>
+          </a:prstGeom>
+          <a:noFill/>
+          <a:ln/>
+        </p:spPr>
+        <p:txBody>
+          <a:bodyPr wrap="square" lIns="0" tIns="0" rIns="0" bIns="0" rtlCol="0" anchor="ctr"/>
+          <a:lstStyle/>
+          <a:p>
+            <a:pPr marL="0" indent="0" algn="ctr">
+              <a:buNone/>
+            </a:pPr>
+            <a:r>
+              <a:rPr lang="en-US" sz="1400" b="1" dirty="0">
+                <a:solidFill>
+                  <a:srgbClr val="1E293B"/>
+                </a:solidFill>
+                <a:latin typeface="Trebuchet MS" pitchFamily="34" charset="0"/>
+                <a:ea typeface="Trebuchet MS" pitchFamily="34" charset="-122"/>
+                <a:cs typeface="Trebuchet MS" pitchFamily="34" charset="-120"/>
+              </a:rPr>
+              <a:t>PGCIL Tender</a:t>
+            </a:r>
+            <a:endParaRPr lang="en-US" sz="1400" dirty="0"/>
+          </a:p>
+          <a:p>
+            <a:pPr marL="0" indent="0" algn="ctr">
+              <a:buNone/>
+            </a:pPr>
+            <a:r>
+              <a:rPr lang="en-US" sz="1400" b="1" dirty="0">
+                <a:solidFill>
+                  <a:srgbClr val="1E293B"/>
+                </a:solidFill>
+                <a:latin typeface="Trebuchet MS" pitchFamily="34" charset="0"/>
+                <a:ea typeface="Trebuchet MS" pitchFamily="34" charset="-122"/>
+                <a:cs typeface="Trebuchet MS" pitchFamily="34" charset="-120"/>
+              </a:rPr>
+              <a:t>500 Pages</a:t>
+            </a:r>
+            <a:endParaRPr lang="en-US" sz="1400" dirty="0"/>
+          </a:p>
+        </p:txBody>
+      </p:sp>
+      <p:sp>
+        <p:nvSpPr>
+          <p:cNvPr id="7" name="Shape 4"/>
+          <p:cNvSpPr/>
+          <p:nvPr/>
+        </p:nvSpPr>
+        <p:spPr>
+          <a:xfrm>
+            <a:off x="777240" y="3063240"/>
+            <a:ext cx="1371600" cy="54864"/>
+          </a:xfrm>
+          <a:prstGeom prst="rect">
+            <a:avLst/>
+          </a:prstGeom>
+          <a:solidFill>
+            <a:srgbClr val="94A3B8"/>
+          </a:solidFill>
+          <a:ln/>
+        </p:spPr>
+      </p:sp>
+      <p:sp>
+        <p:nvSpPr>
+          <p:cNvPr id="8" name="Shape 5"/>
+          <p:cNvSpPr/>
+          <p:nvPr/>
+        </p:nvSpPr>
+        <p:spPr>
+          <a:xfrm>
+            <a:off x="777240" y="3227832"/>
+            <a:ext cx="1371600" cy="54864"/>
+          </a:xfrm>
+          <a:prstGeom prst="rect">
+            <a:avLst/>
+          </a:prstGeom>
+          <a:solidFill>
+            <a:srgbClr val="64748B"/>
+          </a:solidFill>
+          <a:ln/>
+        </p:spPr>
+      </p:sp>
+      <p:sp>
+        <p:nvSpPr>
+          <p:cNvPr id="9" name="Shape 6"/>
+          <p:cNvSpPr/>
+          <p:nvPr/>
+        </p:nvSpPr>
+        <p:spPr>
+          <a:xfrm>
+            <a:off x="777240" y="3392424"/>
+            <a:ext cx="1371600" cy="54864"/>
+          </a:xfrm>
+          <a:prstGeom prst="rect">
+            <a:avLst/>
+          </a:prstGeom>
+          <a:solidFill>
+            <a:srgbClr val="94A3B8"/>
+          </a:solidFill>
+          <a:ln/>
+        </p:spPr>
+      </p:sp>
+      <p:sp>
+        <p:nvSpPr>
+          <p:cNvPr id="10" name="Shape 7"/>
+          <p:cNvSpPr/>
+          <p:nvPr/>
+        </p:nvSpPr>
+        <p:spPr>
+          <a:xfrm>
+            <a:off x="777240" y="3557016"/>
+            <a:ext cx="1371600" cy="54864"/>
+          </a:xfrm>
+          <a:prstGeom prst="rect">
+            <a:avLst/>
+          </a:prstGeom>
+          <a:solidFill>
+            <a:srgbClr val="64748B"/>
+          </a:solidFill>
+          <a:ln/>
+        </p:spPr>
+      </p:sp>
+      <p:sp>
+        <p:nvSpPr>
+          <p:cNvPr id="11" name="Shape 8"/>
+          <p:cNvSpPr/>
+          <p:nvPr/>
+        </p:nvSpPr>
+        <p:spPr>
+          <a:xfrm>
+            <a:off x="777240" y="3721608"/>
+            <a:ext cx="1371600" cy="54864"/>
+          </a:xfrm>
+          <a:prstGeom prst="rect">
+            <a:avLst/>
+          </a:prstGeom>
+          <a:solidFill>
+            <a:srgbClr val="94A3B8"/>
+          </a:solidFill>
+          <a:ln/>
+        </p:spPr>
+      </p:sp>
+      <p:pic>
+        <p:nvPicPr>
+          <p:cNvPr id="12" name="Image 1" descr="preencoded.png"/>
+          <p:cNvPicPr>
+            <a:picLocks noChangeAspect="1"/>
+          </p:cNvPicPr>
+          <p:nvPr/>
+        </p:nvPicPr>
+        <p:blipFill>
+          <a:blip r:embed="rId4"/>
+          <a:stretch>
+            <a:fillRect/>
+          </a:stretch>
+        </p:blipFill>
+        <p:spPr>
+          <a:xfrm>
+            <a:off x="2606040" y="2560320"/>
+            <a:ext cx="274320" cy="274320"/>
+          </a:xfrm>
+          <a:prstGeom prst="rect">
+            <a:avLst/>
+          </a:prstGeom>
+        </p:spPr>
+      </p:pic>
+      <p:sp>
+        <p:nvSpPr>
+          <p:cNvPr id="13" name="Shape 9"/>
+          <p:cNvSpPr/>
+          <p:nvPr/>
+        </p:nvSpPr>
+        <p:spPr>
+          <a:xfrm>
+            <a:off x="3108960" y="1554480"/>
+            <a:ext cx="1325880" cy="2560320"/>
+          </a:xfrm>
+          <a:prstGeom prst="rect">
+            <a:avLst/>
+          </a:prstGeom>
+          <a:solidFill>
+            <a:srgbClr val="FFFFFF"/>
+          </a:solidFill>
+          <a:ln/>
+          <a:effectLst>
+            <a:outerShdw blurRad="76200" dist="25400" dir="8100000" algn="bl" rotWithShape="0">
+              <a:srgbClr val="000000">
+                <a:alpha val="12000"/>
+              </a:srgbClr>
+            </a:outerShdw>
+          </a:effectLst>
+        </p:spPr>
+      </p:sp>
+      <p:sp>
+        <p:nvSpPr>
+          <p:cNvPr id="14" name="Shape 10"/>
+          <p:cNvSpPr/>
+          <p:nvPr/>
+        </p:nvSpPr>
+        <p:spPr>
+          <a:xfrm>
+            <a:off x="3108960" y="1554480"/>
+            <a:ext cx="1325880" cy="54864"/>
+          </a:xfrm>
+          <a:prstGeom prst="rect">
+            <a:avLst/>
+          </a:prstGeom>
+          <a:solidFill>
+            <a:srgbClr val="F97316"/>
+          </a:solidFill>
+          <a:ln/>
+        </p:spPr>
+      </p:sp>
+      <p:sp>
+        <p:nvSpPr>
+          <p:cNvPr id="15" name="Text 11"/>
+          <p:cNvSpPr/>
+          <p:nvPr/>
+        </p:nvSpPr>
+        <p:spPr>
+          <a:xfrm>
+            <a:off x="3108960" y="1828800"/>
+            <a:ext cx="1325880" cy="1097280"/>
+          </a:xfrm>
+          <a:prstGeom prst="rect">
+            <a:avLst/>
+          </a:prstGeom>
+          <a:noFill/>
+          <a:ln/>
+        </p:spPr>
+        <p:txBody>
+          <a:bodyPr wrap="square" lIns="0" tIns="0" rIns="0" bIns="0" rtlCol="0" anchor="t"/>
+          <a:lstStyle/>
+          <a:p>
+            <a:pPr marL="0" indent="0" algn="ctr">
+              <a:buNone/>
+            </a:pPr>
+            <a:r>
+              <a:rPr lang="en-US" sz="1000" dirty="0">
+                <a:solidFill>
+                  <a:srgbClr val="1E293B"/>
+                </a:solidFill>
+                <a:latin typeface="Calibri" pitchFamily="34" charset="0"/>
+                <a:ea typeface="Calibri" pitchFamily="34" charset="-122"/>
+                <a:cs typeface="Calibri" pitchFamily="34" charset="-120"/>
+              </a:rPr>
+              <a:t>Chunk 1</a:t>
+            </a:r>
+            <a:endParaRPr lang="en-US" sz="1000" dirty="0"/>
+          </a:p>
+          <a:p>
+            <a:pPr marL="0" indent="0" algn="ctr">
+              <a:buNone/>
+            </a:pPr>
+            <a:r>
+              <a:rPr lang="en-US" sz="1000" dirty="0">
+                <a:solidFill>
+                  <a:srgbClr val="1E293B"/>
+                </a:solidFill>
+                <a:latin typeface="Calibri" pitchFamily="34" charset="0"/>
+                <a:ea typeface="Calibri" pitchFamily="34" charset="-122"/>
+                <a:cs typeface="Calibri" pitchFamily="34" charset="-120"/>
+              </a:rPr>
+              <a:t>LD Clauses</a:t>
+            </a:r>
+            <a:endParaRPr lang="en-US" sz="1000" dirty="0"/>
+          </a:p>
+          <a:p>
+            <a:pPr marL="0" indent="0" algn="ctr">
+              <a:buNone/>
+            </a:pPr>
+            <a:r>
+              <a:rPr lang="en-US" sz="1000" dirty="0">
+                <a:solidFill>
+                  <a:srgbClr val="1E293B"/>
+                </a:solidFill>
+                <a:latin typeface="Calibri" pitchFamily="34" charset="0"/>
+                <a:ea typeface="Calibri" pitchFamily="34" charset="-122"/>
+                <a:cs typeface="Calibri" pitchFamily="34" charset="-120"/>
+              </a:rPr>
+              <a:t>(pg. 40–44)</a:t>
+            </a:r>
+            <a:endParaRPr lang="en-US" sz="1000" dirty="0"/>
+          </a:p>
+        </p:txBody>
+      </p:sp>
+      <p:sp>
+        <p:nvSpPr>
+          <p:cNvPr id="16" name="Shape 12"/>
+          <p:cNvSpPr/>
+          <p:nvPr/>
+        </p:nvSpPr>
+        <p:spPr>
+          <a:xfrm>
+            <a:off x="3246120" y="3017520"/>
+            <a:ext cx="1051560" cy="45720"/>
+          </a:xfrm>
+          <a:prstGeom prst="rect">
+            <a:avLst/>
+          </a:prstGeom>
+          <a:solidFill>
+            <a:srgbClr val="F97316"/>
+          </a:solidFill>
+          <a:ln/>
+        </p:spPr>
+      </p:sp>
+      <p:sp>
+        <p:nvSpPr>
+          <p:cNvPr id="17" name="Shape 13"/>
+          <p:cNvSpPr/>
+          <p:nvPr/>
+        </p:nvSpPr>
+        <p:spPr>
+          <a:xfrm>
+            <a:off x="3246120" y="3182112"/>
+            <a:ext cx="1051560" cy="45720"/>
+          </a:xfrm>
+          <a:prstGeom prst="rect">
+            <a:avLst/>
+          </a:prstGeom>
+          <a:solidFill>
+            <a:srgbClr val="F97316"/>
+          </a:solidFill>
+          <a:ln/>
+        </p:spPr>
+      </p:sp>
+      <p:sp>
+        <p:nvSpPr>
+          <p:cNvPr id="18" name="Shape 14"/>
+          <p:cNvSpPr/>
+          <p:nvPr/>
+        </p:nvSpPr>
+        <p:spPr>
+          <a:xfrm>
+            <a:off x="3246120" y="3346704"/>
+            <a:ext cx="1051560" cy="45720"/>
+          </a:xfrm>
+          <a:prstGeom prst="rect">
+            <a:avLst/>
+          </a:prstGeom>
+          <a:solidFill>
+            <a:srgbClr val="F97316"/>
+          </a:solidFill>
+          <a:ln/>
+        </p:spPr>
+      </p:sp>
+      <p:sp>
+        <p:nvSpPr>
+          <p:cNvPr id="19" name="Shape 15"/>
+          <p:cNvSpPr/>
+          <p:nvPr/>
+        </p:nvSpPr>
+        <p:spPr>
+          <a:xfrm>
+            <a:off x="3246120" y="3511296"/>
+            <a:ext cx="1051560" cy="45720"/>
+          </a:xfrm>
+          <a:prstGeom prst="rect">
+            <a:avLst/>
+          </a:prstGeom>
+          <a:solidFill>
+            <a:srgbClr val="F97316"/>
+          </a:solidFill>
+          <a:ln/>
+        </p:spPr>
+      </p:sp>
+      <p:sp>
+        <p:nvSpPr>
+          <p:cNvPr id="20" name="Shape 16"/>
+          <p:cNvSpPr/>
+          <p:nvPr/>
+        </p:nvSpPr>
+        <p:spPr>
+          <a:xfrm>
+            <a:off x="4617720" y="1554480"/>
+            <a:ext cx="1325880" cy="2560320"/>
+          </a:xfrm>
+          <a:prstGeom prst="rect">
+            <a:avLst/>
+          </a:prstGeom>
+          <a:solidFill>
+            <a:srgbClr val="FFFFFF"/>
+          </a:solidFill>
+          <a:ln/>
+          <a:effectLst>
+            <a:outerShdw blurRad="76200" dist="25400" dir="8100000" algn="bl" rotWithShape="0">
+              <a:srgbClr val="000000">
+                <a:alpha val="12000"/>
+              </a:srgbClr>
+            </a:outerShdw>
+          </a:effectLst>
+        </p:spPr>
+      </p:sp>
+      <p:sp>
+        <p:nvSpPr>
+          <p:cNvPr id="21" name="Shape 17"/>
+          <p:cNvSpPr/>
+          <p:nvPr/>
+        </p:nvSpPr>
+        <p:spPr>
+          <a:xfrm>
+            <a:off x="4617720" y="1554480"/>
+            <a:ext cx="1325880" cy="54864"/>
+          </a:xfrm>
+          <a:prstGeom prst="rect">
+            <a:avLst/>
+          </a:prstGeom>
+          <a:solidFill>
+            <a:srgbClr val="6366F1"/>
+          </a:solidFill>
+          <a:ln/>
+        </p:spPr>
+      </p:sp>
+      <p:sp>
+        <p:nvSpPr>
+          <p:cNvPr id="22" name="Text 18"/>
+          <p:cNvSpPr/>
+          <p:nvPr/>
+        </p:nvSpPr>
+        <p:spPr>
+          <a:xfrm>
+            <a:off x="4617720" y="1828800"/>
+            <a:ext cx="1325880" cy="1097280"/>
+          </a:xfrm>
+          <a:prstGeom prst="rect">
+            <a:avLst/>
+          </a:prstGeom>
+          <a:noFill/>
+          <a:ln/>
+        </p:spPr>
+        <p:txBody>
+          <a:bodyPr wrap="square" lIns="0" tIns="0" rIns="0" bIns="0" rtlCol="0" anchor="t"/>
+          <a:lstStyle/>
+          <a:p>
+            <a:pPr marL="0" indent="0" algn="ctr">
+              <a:buNone/>
+            </a:pPr>
+            <a:r>
+              <a:rPr lang="en-US" sz="1000" dirty="0">
+                <a:solidFill>
+                  <a:srgbClr val="1E293B"/>
+                </a:solidFill>
+                <a:latin typeface="Calibri" pitchFamily="34" charset="0"/>
+                <a:ea typeface="Calibri" pitchFamily="34" charset="-122"/>
+                <a:cs typeface="Calibri" pitchFamily="34" charset="-120"/>
+              </a:rPr>
+              <a:t>Chunk 2</a:t>
+            </a:r>
+            <a:endParaRPr lang="en-US" sz="1000" dirty="0"/>
+          </a:p>
+          <a:p>
+            <a:pPr marL="0" indent="0" algn="ctr">
+              <a:buNone/>
+            </a:pPr>
+            <a:r>
+              <a:rPr lang="en-US" sz="1000" dirty="0">
+                <a:solidFill>
+                  <a:srgbClr val="1E293B"/>
+                </a:solidFill>
+                <a:latin typeface="Calibri" pitchFamily="34" charset="0"/>
+                <a:ea typeface="Calibri" pitchFamily="34" charset="-122"/>
+                <a:cs typeface="Calibri" pitchFamily="34" charset="-120"/>
+              </a:rPr>
+              <a:t>Payment Terms</a:t>
+            </a:r>
+            <a:endParaRPr lang="en-US" sz="1000" dirty="0"/>
+          </a:p>
+          <a:p>
+            <a:pPr marL="0" indent="0" algn="ctr">
+              <a:buNone/>
+            </a:pPr>
+            <a:r>
+              <a:rPr lang="en-US" sz="1000" dirty="0">
+                <a:solidFill>
+                  <a:srgbClr val="1E293B"/>
+                </a:solidFill>
+                <a:latin typeface="Calibri" pitchFamily="34" charset="0"/>
+                <a:ea typeface="Calibri" pitchFamily="34" charset="-122"/>
+                <a:cs typeface="Calibri" pitchFamily="34" charset="-120"/>
+              </a:rPr>
+              <a:t>(pg. 55–58)</a:t>
+            </a:r>
+            <a:endParaRPr lang="en-US" sz="1000" dirty="0"/>
+          </a:p>
+        </p:txBody>
+      </p:sp>
+      <p:sp>
+        <p:nvSpPr>
+          <p:cNvPr id="23" name="Shape 19"/>
+          <p:cNvSpPr/>
+          <p:nvPr/>
+        </p:nvSpPr>
+        <p:spPr>
+          <a:xfrm>
+            <a:off x="4754880" y="3017520"/>
+            <a:ext cx="1051560" cy="45720"/>
+          </a:xfrm>
+          <a:prstGeom prst="rect">
+            <a:avLst/>
+          </a:prstGeom>
+          <a:solidFill>
+            <a:srgbClr val="6366F1"/>
+          </a:solidFill>
+          <a:ln/>
+        </p:spPr>
+      </p:sp>
+      <p:sp>
+        <p:nvSpPr>
+          <p:cNvPr id="24" name="Shape 20"/>
+          <p:cNvSpPr/>
+          <p:nvPr/>
+        </p:nvSpPr>
+        <p:spPr>
+          <a:xfrm>
+            <a:off x="4754880" y="3182112"/>
+            <a:ext cx="1051560" cy="45720"/>
+          </a:xfrm>
+          <a:prstGeom prst="rect">
+            <a:avLst/>
+          </a:prstGeom>
+          <a:solidFill>
+            <a:srgbClr val="6366F1"/>
+          </a:solidFill>
+          <a:ln/>
+        </p:spPr>
+      </p:sp>
+      <p:sp>
+        <p:nvSpPr>
+          <p:cNvPr id="25" name="Shape 21"/>
+          <p:cNvSpPr/>
+          <p:nvPr/>
+        </p:nvSpPr>
+        <p:spPr>
+          <a:xfrm>
+            <a:off x="4754880" y="3346704"/>
+            <a:ext cx="1051560" cy="45720"/>
+          </a:xfrm>
+          <a:prstGeom prst="rect">
+            <a:avLst/>
+          </a:prstGeom>
+          <a:solidFill>
+            <a:srgbClr val="6366F1"/>
+          </a:solidFill>
+          <a:ln/>
+        </p:spPr>
+      </p:sp>
+      <p:sp>
+        <p:nvSpPr>
+          <p:cNvPr id="26" name="Shape 22"/>
+          <p:cNvSpPr/>
+          <p:nvPr/>
+        </p:nvSpPr>
+        <p:spPr>
+          <a:xfrm>
+            <a:off x="4754880" y="3511296"/>
+            <a:ext cx="1051560" cy="45720"/>
+          </a:xfrm>
+          <a:prstGeom prst="rect">
+            <a:avLst/>
+          </a:prstGeom>
+          <a:solidFill>
+            <a:srgbClr val="6366F1"/>
+          </a:solidFill>
+          <a:ln/>
+        </p:spPr>
+      </p:sp>
+      <p:sp>
+        <p:nvSpPr>
+          <p:cNvPr id="27" name="Shape 23"/>
+          <p:cNvSpPr/>
+          <p:nvPr/>
+        </p:nvSpPr>
+        <p:spPr>
+          <a:xfrm>
+            <a:off x="6126480" y="1554480"/>
+            <a:ext cx="1325880" cy="2560320"/>
+          </a:xfrm>
+          <a:prstGeom prst="rect">
+            <a:avLst/>
+          </a:prstGeom>
+          <a:solidFill>
+            <a:srgbClr val="FFFFFF"/>
+          </a:solidFill>
+          <a:ln/>
+          <a:effectLst>
+            <a:outerShdw blurRad="76200" dist="25400" dir="8100000" algn="bl" rotWithShape="0">
+              <a:srgbClr val="000000">
+                <a:alpha val="12000"/>
+              </a:srgbClr>
+            </a:outerShdw>
+          </a:effectLst>
+        </p:spPr>
+      </p:sp>
+      <p:sp>
+        <p:nvSpPr>
+          <p:cNvPr id="28" name="Shape 24"/>
+          <p:cNvSpPr/>
+          <p:nvPr/>
+        </p:nvSpPr>
+        <p:spPr>
+          <a:xfrm>
+            <a:off x="6126480" y="1554480"/>
+            <a:ext cx="1325880" cy="54864"/>
+          </a:xfrm>
+          <a:prstGeom prst="rect">
+            <a:avLst/>
+          </a:prstGeom>
+          <a:solidFill>
+            <a:srgbClr val="22C55E"/>
+          </a:solidFill>
+          <a:ln/>
+        </p:spPr>
+      </p:sp>
+      <p:sp>
+        <p:nvSpPr>
+          <p:cNvPr id="29" name="Text 25"/>
+          <p:cNvSpPr/>
+          <p:nvPr/>
+        </p:nvSpPr>
+        <p:spPr>
+          <a:xfrm>
+            <a:off x="6126480" y="1828800"/>
+            <a:ext cx="1325880" cy="1097280"/>
+          </a:xfrm>
+          <a:prstGeom prst="rect">
+            <a:avLst/>
+          </a:prstGeom>
+          <a:noFill/>
+          <a:ln/>
+        </p:spPr>
+        <p:txBody>
+          <a:bodyPr wrap="square" lIns="0" tIns="0" rIns="0" bIns="0" rtlCol="0" anchor="t"/>
+          <a:lstStyle/>
+          <a:p>
+            <a:pPr marL="0" indent="0" algn="ctr">
+              <a:buNone/>
+            </a:pPr>
+            <a:r>
+              <a:rPr lang="en-US" sz="1000" dirty="0">
+                <a:solidFill>
+                  <a:srgbClr val="1E293B"/>
+                </a:solidFill>
+                <a:latin typeface="Calibri" pitchFamily="34" charset="0"/>
+                <a:ea typeface="Calibri" pitchFamily="34" charset="-122"/>
+                <a:cs typeface="Calibri" pitchFamily="34" charset="-120"/>
+              </a:rPr>
+              <a:t>Chunk 3</a:t>
+            </a:r>
+            <a:endParaRPr lang="en-US" sz="1000" dirty="0"/>
+          </a:p>
+          <a:p>
+            <a:pPr marL="0" indent="0" algn="ctr">
+              <a:buNone/>
+            </a:pPr>
+            <a:r>
+              <a:rPr lang="en-US" sz="1000" dirty="0">
+                <a:solidFill>
+                  <a:srgbClr val="1E293B"/>
+                </a:solidFill>
+                <a:latin typeface="Calibri" pitchFamily="34" charset="0"/>
+                <a:ea typeface="Calibri" pitchFamily="34" charset="-122"/>
+                <a:cs typeface="Calibri" pitchFamily="34" charset="-120"/>
+              </a:rPr>
+              <a:t>Tech Specs</a:t>
+            </a:r>
+            <a:endParaRPr lang="en-US" sz="1000" dirty="0"/>
+          </a:p>
+          <a:p>
+            <a:pPr marL="0" indent="0" algn="ctr">
+              <a:buNone/>
+            </a:pPr>
+            <a:r>
+              <a:rPr lang="en-US" sz="1000" dirty="0">
+                <a:solidFill>
+                  <a:srgbClr val="1E293B"/>
+                </a:solidFill>
+                <a:latin typeface="Calibri" pitchFamily="34" charset="0"/>
+                <a:ea typeface="Calibri" pitchFamily="34" charset="-122"/>
+                <a:cs typeface="Calibri" pitchFamily="34" charset="-120"/>
+              </a:rPr>
+              <a:t>(pg. 102–110)</a:t>
+            </a:r>
+            <a:endParaRPr lang="en-US" sz="1000" dirty="0"/>
+          </a:p>
+        </p:txBody>
+      </p:sp>
+      <p:sp>
+        <p:nvSpPr>
+          <p:cNvPr id="30" name="Shape 26"/>
+          <p:cNvSpPr/>
+          <p:nvPr/>
+        </p:nvSpPr>
+        <p:spPr>
+          <a:xfrm>
+            <a:off x="6263640" y="3017520"/>
+            <a:ext cx="1051560" cy="45720"/>
+          </a:xfrm>
+          <a:prstGeom prst="rect">
+            <a:avLst/>
+          </a:prstGeom>
+          <a:solidFill>
+            <a:srgbClr val="22C55E"/>
+          </a:solidFill>
+          <a:ln/>
+        </p:spPr>
+      </p:sp>
+      <p:sp>
+        <p:nvSpPr>
+          <p:cNvPr id="31" name="Shape 27"/>
+          <p:cNvSpPr/>
+          <p:nvPr/>
+        </p:nvSpPr>
+        <p:spPr>
+          <a:xfrm>
+            <a:off x="6263640" y="3182112"/>
+            <a:ext cx="1051560" cy="45720"/>
+          </a:xfrm>
+          <a:prstGeom prst="rect">
+            <a:avLst/>
+          </a:prstGeom>
+          <a:solidFill>
+            <a:srgbClr val="22C55E"/>
+          </a:solidFill>
+          <a:ln/>
+        </p:spPr>
+      </p:sp>
+      <p:sp>
+        <p:nvSpPr>
+          <p:cNvPr id="32" name="Shape 28"/>
+          <p:cNvSpPr/>
+          <p:nvPr/>
+        </p:nvSpPr>
+        <p:spPr>
+          <a:xfrm>
+            <a:off x="6263640" y="3346704"/>
+            <a:ext cx="1051560" cy="45720"/>
+          </a:xfrm>
+          <a:prstGeom prst="rect">
+            <a:avLst/>
+          </a:prstGeom>
+          <a:solidFill>
+            <a:srgbClr val="22C55E"/>
+          </a:solidFill>
+          <a:ln/>
+        </p:spPr>
+      </p:sp>
+      <p:sp>
+        <p:nvSpPr>
+          <p:cNvPr id="33" name="Shape 29"/>
+          <p:cNvSpPr/>
+          <p:nvPr/>
+        </p:nvSpPr>
+        <p:spPr>
+          <a:xfrm>
+            <a:off x="6263640" y="3511296"/>
+            <a:ext cx="1051560" cy="45720"/>
+          </a:xfrm>
+          <a:prstGeom prst="rect">
+            <a:avLst/>
+          </a:prstGeom>
+          <a:solidFill>
+            <a:srgbClr val="22C55E"/>
+          </a:solidFill>
+          <a:ln/>
+        </p:spPr>
+      </p:sp>
+      <p:sp>
+        <p:nvSpPr>
+          <p:cNvPr id="34" name="Shape 30"/>
+          <p:cNvSpPr/>
+          <p:nvPr/>
+        </p:nvSpPr>
+        <p:spPr>
+          <a:xfrm>
+            <a:off x="7635240" y="1554480"/>
+            <a:ext cx="1325880" cy="2560320"/>
+          </a:xfrm>
+          <a:prstGeom prst="rect">
+            <a:avLst/>
+          </a:prstGeom>
+          <a:solidFill>
+            <a:srgbClr val="FFFFFF"/>
+          </a:solidFill>
+          <a:ln/>
+          <a:effectLst>
+            <a:outerShdw blurRad="76200" dist="25400" dir="8100000" algn="bl" rotWithShape="0">
+              <a:srgbClr val="000000">
+                <a:alpha val="12000"/>
+              </a:srgbClr>
+            </a:outerShdw>
+          </a:effectLst>
+        </p:spPr>
+      </p:sp>
+      <p:sp>
+        <p:nvSpPr>
+          <p:cNvPr id="35" name="Shape 31"/>
+          <p:cNvSpPr/>
+          <p:nvPr/>
+        </p:nvSpPr>
+        <p:spPr>
+          <a:xfrm>
+            <a:off x="7635240" y="1554480"/>
+            <a:ext cx="1325880" cy="54864"/>
+          </a:xfrm>
+          <a:prstGeom prst="rect">
+            <a:avLst/>
+          </a:prstGeom>
+          <a:solidFill>
+            <a:srgbClr val="EF4444"/>
+          </a:solidFill>
+          <a:ln/>
+        </p:spPr>
+      </p:sp>
+      <p:sp>
+        <p:nvSpPr>
+          <p:cNvPr id="36" name="Text 32"/>
+          <p:cNvSpPr/>
+          <p:nvPr/>
+        </p:nvSpPr>
+        <p:spPr>
+          <a:xfrm>
+            <a:off x="7635240" y="1828800"/>
+            <a:ext cx="1325880" cy="1097280"/>
+          </a:xfrm>
+          <a:prstGeom prst="rect">
+            <a:avLst/>
+          </a:prstGeom>
+          <a:noFill/>
+          <a:ln/>
+        </p:spPr>
+        <p:txBody>
+          <a:bodyPr wrap="square" lIns="0" tIns="0" rIns="0" bIns="0" rtlCol="0" anchor="t"/>
+          <a:lstStyle/>
+          <a:p>
+            <a:pPr marL="0" indent="0" algn="ctr">
+              <a:buNone/>
+            </a:pPr>
+            <a:r>
+              <a:rPr lang="en-US" sz="1000" dirty="0">
+                <a:solidFill>
+                  <a:srgbClr val="1E293B"/>
+                </a:solidFill>
+                <a:latin typeface="Calibri" pitchFamily="34" charset="0"/>
+                <a:ea typeface="Calibri" pitchFamily="34" charset="-122"/>
+                <a:cs typeface="Calibri" pitchFamily="34" charset="-120"/>
+              </a:rPr>
+              <a:t>Chunk N</a:t>
+            </a:r>
+            <a:endParaRPr lang="en-US" sz="1000" dirty="0"/>
+          </a:p>
+          <a:p>
+            <a:pPr marL="0" indent="0" algn="ctr">
+              <a:buNone/>
+            </a:pPr>
+            <a:r>
+              <a:rPr lang="en-US" sz="1000" dirty="0">
+                <a:solidFill>
+                  <a:srgbClr val="1E293B"/>
+                </a:solidFill>
+                <a:latin typeface="Calibri" pitchFamily="34" charset="0"/>
+                <a:ea typeface="Calibri" pitchFamily="34" charset="-122"/>
+                <a:cs typeface="Calibri" pitchFamily="34" charset="-120"/>
+              </a:rPr>
+              <a:t>Warranty</a:t>
+            </a:r>
+            <a:endParaRPr lang="en-US" sz="1000" dirty="0"/>
+          </a:p>
+          <a:p>
+            <a:pPr marL="0" indent="0" algn="ctr">
+              <a:buNone/>
+            </a:pPr>
+            <a:r>
+              <a:rPr lang="en-US" sz="1000" dirty="0">
+                <a:solidFill>
+                  <a:srgbClr val="1E293B"/>
+                </a:solidFill>
+                <a:latin typeface="Calibri" pitchFamily="34" charset="0"/>
+                <a:ea typeface="Calibri" pitchFamily="34" charset="-122"/>
+                <a:cs typeface="Calibri" pitchFamily="34" charset="-120"/>
+              </a:rPr>
+              <a:t>(pg. 340–345)</a:t>
+            </a:r>
+            <a:endParaRPr lang="en-US" sz="1000" dirty="0"/>
+          </a:p>
+        </p:txBody>
+      </p:sp>
+      <p:sp>
+        <p:nvSpPr>
+          <p:cNvPr id="37" name="Shape 33"/>
+          <p:cNvSpPr/>
+          <p:nvPr/>
+        </p:nvSpPr>
+        <p:spPr>
+          <a:xfrm>
+            <a:off x="7772400" y="3017520"/>
+            <a:ext cx="1051560" cy="45720"/>
+          </a:xfrm>
+          <a:prstGeom prst="rect">
+            <a:avLst/>
+          </a:prstGeom>
+          <a:solidFill>
+            <a:srgbClr val="EF4444"/>
+          </a:solidFill>
+          <a:ln/>
+        </p:spPr>
+      </p:sp>
+      <p:sp>
+        <p:nvSpPr>
+          <p:cNvPr id="38" name="Shape 34"/>
+          <p:cNvSpPr/>
+          <p:nvPr/>
+        </p:nvSpPr>
+        <p:spPr>
+          <a:xfrm>
+            <a:off x="7772400" y="3182112"/>
+            <a:ext cx="1051560" cy="45720"/>
+          </a:xfrm>
+          <a:prstGeom prst="rect">
+            <a:avLst/>
+          </a:prstGeom>
+          <a:solidFill>
+            <a:srgbClr val="EF4444"/>
+          </a:solidFill>
+          <a:ln/>
+        </p:spPr>
+      </p:sp>
+      <p:sp>
+        <p:nvSpPr>
+          <p:cNvPr id="39" name="Shape 35"/>
+          <p:cNvSpPr/>
+          <p:nvPr/>
+        </p:nvSpPr>
+        <p:spPr>
+          <a:xfrm>
+            <a:off x="7772400" y="3346704"/>
+            <a:ext cx="1051560" cy="45720"/>
+          </a:xfrm>
+          <a:prstGeom prst="rect">
+            <a:avLst/>
+          </a:prstGeom>
+          <a:solidFill>
+            <a:srgbClr val="EF4444"/>
+          </a:solidFill>
+          <a:ln/>
+        </p:spPr>
+      </p:sp>
+      <p:sp>
+        <p:nvSpPr>
+          <p:cNvPr id="40" name="Shape 36"/>
+          <p:cNvSpPr/>
+          <p:nvPr/>
+        </p:nvSpPr>
+        <p:spPr>
+          <a:xfrm>
+            <a:off x="7772400" y="3511296"/>
+            <a:ext cx="1051560" cy="45720"/>
+          </a:xfrm>
+          <a:prstGeom prst="rect">
+            <a:avLst/>
+          </a:prstGeom>
+          <a:solidFill>
+            <a:srgbClr val="EF4444"/>
+          </a:solidFill>
+          <a:ln/>
+        </p:spPr>
+      </p:sp>
+      <p:sp>
+        <p:nvSpPr>
+          <p:cNvPr id="41" name="Shape 37"/>
+          <p:cNvSpPr/>
+          <p:nvPr/>
+        </p:nvSpPr>
+        <p:spPr>
+          <a:xfrm>
+            <a:off x="731520" y="4343400"/>
+            <a:ext cx="7680960" cy="594360"/>
+          </a:xfrm>
+          <a:prstGeom prst="rect">
+            <a:avLst/>
+          </a:prstGeom>
+          <a:solidFill>
+            <a:srgbClr val="EEF2FF"/>
+          </a:solidFill>
+          <a:ln/>
+        </p:spPr>
+      </p:sp>
+      <p:pic>
+        <p:nvPicPr>
+          <p:cNvPr id="42" name="Image 2" descr="preencoded.png"/>
+          <p:cNvPicPr>
+            <a:picLocks noChangeAspect="1"/>
+          </p:cNvPicPr>
+          <p:nvPr/>
+        </p:nvPicPr>
+        <p:blipFill>
+          <a:blip r:embed="rId5"/>
+          <a:stretch>
+            <a:fillRect/>
+          </a:stretch>
+        </p:blipFill>
+        <p:spPr>
+          <a:xfrm>
             <a:off x="914400" y="4434840"/>
             <a:ext cx="320040" cy="320040"/>
           </a:xfrm>
@@ -8067,7 +7839,7 @@
           <a:bodyPr wrap="square" lIns="0" tIns="0" rIns="0" bIns="0" rtlCol="0" anchor="ctr"/>
           <a:lstStyle/>
           <a:p>
-            <a:pPr indent="0" marL="0">
+            <a:pPr marL="0" indent="0">
               <a:buNone/>
             </a:pPr>
             <a:r>
@@ -8101,6 +7873,7 @@
         <a:solidFill>
           <a:srgbClr val="0F172A"/>
         </a:solidFill>
+        <a:effectLst/>
       </p:bgPr>
     </p:bg>
     <p:spTree>
@@ -8138,7 +7911,7 @@
           <a:bodyPr wrap="square" lIns="0" tIns="0" rIns="0" bIns="0" rtlCol="0" anchor="ctr"/>
           <a:lstStyle/>
           <a:p>
-            <a:pPr indent="0" marL="0">
+            <a:pPr marL="0" indent="0">
               <a:buNone/>
             </a:pPr>
             <a:r>
@@ -8177,7 +7950,7 @@
           <a:bodyPr wrap="square" lIns="0" tIns="0" rIns="0" bIns="0" rtlCol="0" anchor="ctr"/>
           <a:lstStyle/>
           <a:p>
-            <a:pPr indent="0" marL="0">
+            <a:pPr marL="0" indent="0">
               <a:buNone/>
             </a:pPr>
             <a:r>
@@ -8214,7 +7987,7 @@
           </a:solidFill>
           <a:ln/>
           <a:effectLst>
-            <a:outerShdw sx="100000" sy="100000" kx="0" ky="0" algn="bl" rotWithShape="0" blurRad="76200" dist="25400" dir="8100000">
+            <a:outerShdw blurRad="76200" dist="25400" dir="8100000" algn="bl" rotWithShape="0">
               <a:srgbClr val="000000">
                 <a:alpha val="12000"/>
               </a:srgbClr>
@@ -8244,14 +8017,14 @@
       </p:sp>
       <p:pic>
         <p:nvPicPr>
-          <p:cNvPr id="6" name="Image 0" descr="preencoded.png">    </p:cNvPr>
+          <p:cNvPr id="6" name="Image 0" descr="preencoded.png"/>
           <p:cNvPicPr>
             <a:picLocks noChangeAspect="1"/>
           </p:cNvPicPr>
           <p:nvPr/>
         </p:nvPicPr>
         <p:blipFill>
-          <a:blip r:embed="rId1"/>
+          <a:blip r:embed="rId3"/>
           <a:stretch>
             <a:fillRect/>
           </a:stretch>
@@ -8287,7 +8060,7 @@
           <a:bodyPr wrap="square" lIns="0" tIns="0" rIns="0" bIns="0" rtlCol="0" anchor="ctr"/>
           <a:lstStyle/>
           <a:p>
-            <a:pPr indent="0" marL="0">
+            <a:pPr marL="0" indent="0">
               <a:buNone/>
             </a:pPr>
             <a:r>
@@ -8346,7 +8119,7 @@
           <a:bodyPr wrap="square" lIns="0" tIns="0" rIns="0" bIns="0" rtlCol="0" anchor="ctr"/>
           <a:lstStyle/>
           <a:p>
-            <a:pPr algn="ctr" indent="0" marL="0">
+            <a:pPr marL="0" indent="0" algn="ctr">
               <a:buNone/>
             </a:pPr>
             <a:r>
@@ -8385,7 +8158,7 @@
           <a:bodyPr wrap="square" lIns="0" tIns="0" rIns="0" bIns="0" rtlCol="0" anchor="ctr"/>
           <a:lstStyle/>
           <a:p>
-            <a:pPr indent="0" marL="0">
+            <a:pPr marL="0" indent="0">
               <a:buNone/>
             </a:pPr>
             <a:r>
@@ -8444,7 +8217,7 @@
           <a:bodyPr wrap="square" lIns="0" tIns="0" rIns="0" bIns="0" rtlCol="0" anchor="ctr"/>
           <a:lstStyle/>
           <a:p>
-            <a:pPr algn="ctr" indent="0" marL="0">
+            <a:pPr marL="0" indent="0" algn="ctr">
               <a:buNone/>
             </a:pPr>
             <a:r>
@@ -8483,7 +8256,7 @@
           <a:bodyPr wrap="square" lIns="0" tIns="0" rIns="0" bIns="0" rtlCol="0" anchor="ctr"/>
           <a:lstStyle/>
           <a:p>
-            <a:pPr indent="0" marL="0">
+            <a:pPr marL="0" indent="0">
               <a:buNone/>
             </a:pPr>
             <a:r>
@@ -8542,7 +8315,7 @@
           <a:bodyPr wrap="square" lIns="0" tIns="0" rIns="0" bIns="0" rtlCol="0" anchor="ctr"/>
           <a:lstStyle/>
           <a:p>
-            <a:pPr algn="ctr" indent="0" marL="0">
+            <a:pPr marL="0" indent="0" algn="ctr">
               <a:buNone/>
             </a:pPr>
             <a:r>
@@ -8581,7 +8354,7 @@
           <a:bodyPr wrap="square" lIns="0" tIns="0" rIns="0" bIns="0" rtlCol="0" anchor="ctr"/>
           <a:lstStyle/>
           <a:p>
-            <a:pPr indent="0" marL="0">
+            <a:pPr marL="0" indent="0">
               <a:buNone/>
             </a:pPr>
             <a:r>
@@ -8640,7 +8413,7 @@
           <a:bodyPr wrap="square" lIns="0" tIns="0" rIns="0" bIns="0" rtlCol="0" anchor="ctr"/>
           <a:lstStyle/>
           <a:p>
-            <a:pPr algn="ctr" indent="0" marL="0">
+            <a:pPr marL="0" indent="0" algn="ctr">
               <a:buNone/>
             </a:pPr>
             <a:r>
@@ -8679,7 +8452,7 @@
           <a:bodyPr wrap="square" lIns="0" tIns="0" rIns="0" bIns="0" rtlCol="0" anchor="ctr"/>
           <a:lstStyle/>
           <a:p>
-            <a:pPr indent="0" marL="0">
+            <a:pPr marL="0" indent="0">
               <a:buNone/>
             </a:pPr>
             <a:r>
@@ -8716,7 +8489,7 @@
           </a:solidFill>
           <a:ln/>
           <a:effectLst>
-            <a:outerShdw sx="100000" sy="100000" kx="0" ky="0" algn="bl" rotWithShape="0" blurRad="76200" dist="25400" dir="8100000">
+            <a:outerShdw blurRad="76200" dist="25400" dir="8100000" algn="bl" rotWithShape="0">
               <a:srgbClr val="000000">
                 <a:alpha val="12000"/>
               </a:srgbClr>
@@ -8746,14 +8519,14 @@
       </p:sp>
       <p:pic>
         <p:nvPicPr>
-          <p:cNvPr id="22" name="Image 1" descr="preencoded.png">    </p:cNvPr>
+          <p:cNvPr id="22" name="Image 1" descr="preencoded.png"/>
           <p:cNvPicPr>
             <a:picLocks noChangeAspect="1"/>
           </p:cNvPicPr>
           <p:nvPr/>
         </p:nvPicPr>
         <p:blipFill>
-          <a:blip r:embed="rId2"/>
+          <a:blip r:embed="rId4"/>
           <a:stretch>
             <a:fillRect/>
           </a:stretch>
@@ -8789,7 +8562,7 @@
           <a:bodyPr wrap="square" lIns="0" tIns="0" rIns="0" bIns="0" rtlCol="0" anchor="ctr"/>
           <a:lstStyle/>
           <a:p>
-            <a:pPr indent="0" marL="0">
+            <a:pPr marL="0" indent="0">
               <a:buNone/>
             </a:pPr>
             <a:r>
@@ -8828,7 +8601,7 @@
           <a:bodyPr wrap="square" lIns="0" tIns="0" rIns="0" bIns="0" rtlCol="0" anchor="ctr"/>
           <a:lstStyle/>
           <a:p>
-            <a:pPr indent="0" marL="0">
+            <a:pPr marL="0" indent="0">
               <a:buNone/>
             </a:pPr>
             <a:r>
@@ -8867,7 +8640,7 @@
           <a:bodyPr wrap="square" lIns="0" tIns="0" rIns="0" bIns="0" rtlCol="0" anchor="ctr"/>
           <a:lstStyle/>
           <a:p>
-            <a:pPr indent="0" marL="0">
+            <a:pPr marL="0" indent="0">
               <a:buNone/>
             </a:pPr>
             <a:r>
@@ -8906,7 +8679,7 @@
           <a:bodyPr wrap="square" lIns="0" tIns="0" rIns="0" bIns="0" rtlCol="0" anchor="ctr"/>
           <a:lstStyle/>
           <a:p>
-            <a:pPr indent="0" marL="0">
+            <a:pPr marL="0" indent="0">
               <a:buNone/>
             </a:pPr>
             <a:r>
@@ -8945,7 +8718,7 @@
           <a:bodyPr wrap="square" lIns="0" tIns="0" rIns="0" bIns="0" rtlCol="0" anchor="ctr"/>
           <a:lstStyle/>
           <a:p>
-            <a:pPr indent="0" marL="0">
+            <a:pPr marL="0" indent="0">
               <a:buNone/>
             </a:pPr>
             <a:r>
@@ -8962,7 +8735,7 @@
             <a:endParaRPr lang="en-US" sz="1000" dirty="0"/>
           </a:p>
           <a:p>
-            <a:pPr indent="0" marL="0">
+            <a:pPr marL="0" indent="0">
               <a:buNone/>
             </a:pPr>
             <a:r>
@@ -9001,7 +8774,7 @@
           <a:bodyPr wrap="square" lIns="0" tIns="0" rIns="0" bIns="0" rtlCol="0" anchor="ctr"/>
           <a:lstStyle/>
           <a:p>
-            <a:pPr indent="0" marL="0">
+            <a:pPr marL="0" indent="0">
               <a:buNone/>
             </a:pPr>
             <a:r>
@@ -9035,6 +8808,7 @@
         <a:solidFill>
           <a:srgbClr val="F8FAFC"/>
         </a:solidFill>
+        <a:effectLst/>
       </p:bgPr>
     </p:bg>
     <p:spTree>
@@ -9072,7 +8846,7 @@
           <a:bodyPr wrap="square" lIns="0" tIns="0" rIns="0" bIns="0" rtlCol="0" anchor="ctr"/>
           <a:lstStyle/>
           <a:p>
-            <a:pPr indent="0" marL="0">
+            <a:pPr marL="0" indent="0">
               <a:buNone/>
             </a:pPr>
             <a:r>
@@ -9111,7 +8885,7 @@
           <a:bodyPr wrap="square" lIns="0" tIns="0" rIns="0" bIns="0" rtlCol="0" anchor="ctr"/>
           <a:lstStyle/>
           <a:p>
-            <a:pPr indent="0" marL="0">
+            <a:pPr marL="0" indent="0">
               <a:buNone/>
             </a:pPr>
             <a:r>
@@ -9148,7 +8922,7 @@
           </a:solidFill>
           <a:ln/>
           <a:effectLst>
-            <a:outerShdw sx="100000" sy="100000" kx="0" ky="0" algn="bl" rotWithShape="0" blurRad="76200" dist="25400" dir="8100000">
+            <a:outerShdw blurRad="76200" dist="25400" dir="8100000" algn="bl" rotWithShape="0">
               <a:srgbClr val="000000">
                 <a:alpha val="12000"/>
               </a:srgbClr>
@@ -9197,7 +8971,7 @@
           <a:bodyPr wrap="square" lIns="0" tIns="0" rIns="0" bIns="0" rtlCol="0" anchor="ctr"/>
           <a:lstStyle/>
           <a:p>
-            <a:pPr algn="ctr" indent="0" marL="0">
+            <a:pPr marL="0" indent="0" algn="ctr">
               <a:buNone/>
             </a:pPr>
             <a:r>
@@ -9217,253 +8991,7 @@
       </p:sp>
       <p:pic>
         <p:nvPicPr>
-          <p:cNvPr id="7" name="Image 0" descr="preencoded.png">    </p:cNvPr>
-          <p:cNvPicPr>
-            <a:picLocks noChangeAspect="1"/>
-          </p:cNvPicPr>
-          <p:nvPr/>
-        </p:nvPicPr>
-        <p:blipFill>
-          <a:blip r:embed="rId1"/>
-          <a:stretch>
-            <a:fillRect/>
-          </a:stretch>
-        </p:blipFill>
-        <p:spPr>
-          <a:xfrm>
-            <a:off x="960120" y="2194560"/>
-            <a:ext cx="548640" cy="548640"/>
-          </a:xfrm>
-          <a:prstGeom prst="rect">
-            <a:avLst/>
-          </a:prstGeom>
-        </p:spPr>
-      </p:pic>
-      <p:sp>
-        <p:nvSpPr>
-          <p:cNvPr id="8" name="Text 5"/>
-          <p:cNvSpPr/>
-          <p:nvPr/>
-        </p:nvSpPr>
-        <p:spPr>
-          <a:xfrm>
-            <a:off x="365760" y="2880360"/>
-            <a:ext cx="1920240" cy="320040"/>
-          </a:xfrm>
-          <a:prstGeom prst="rect">
-            <a:avLst/>
-          </a:prstGeom>
-          <a:noFill/>
-          <a:ln/>
-        </p:spPr>
-        <p:txBody>
-          <a:bodyPr wrap="square" lIns="0" tIns="0" rIns="0" bIns="0" rtlCol="0" anchor="ctr"/>
-          <a:lstStyle/>
-          <a:p>
-            <a:pPr algn="ctr" indent="0" marL="0">
-              <a:buNone/>
-            </a:pPr>
-            <a:r>
-              <a:rPr lang="en-US" sz="1600" b="1" dirty="0">
-                <a:solidFill>
-                  <a:srgbClr val="6366F1"/>
-                </a:solidFill>
-                <a:latin typeface="Trebuchet MS" pitchFamily="34" charset="0"/>
-                <a:ea typeface="Trebuchet MS" pitchFamily="34" charset="-122"/>
-                <a:cs typeface="Trebuchet MS" pitchFamily="34" charset="-120"/>
-              </a:rPr>
-              <a:t>Question</a:t>
-            </a:r>
-            <a:endParaRPr lang="en-US" sz="1600" dirty="0"/>
-          </a:p>
-        </p:txBody>
-      </p:sp>
-      <p:sp>
-        <p:nvSpPr>
-          <p:cNvPr id="9" name="Text 6"/>
-          <p:cNvSpPr/>
-          <p:nvPr/>
-        </p:nvSpPr>
-        <p:spPr>
-          <a:xfrm>
-            <a:off x="457200" y="3246120"/>
-            <a:ext cx="1737360" cy="640080"/>
-          </a:xfrm>
-          <a:prstGeom prst="rect">
-            <a:avLst/>
-          </a:prstGeom>
-          <a:noFill/>
-          <a:ln/>
-        </p:spPr>
-        <p:txBody>
-          <a:bodyPr wrap="square" lIns="0" tIns="0" rIns="0" bIns="0" rtlCol="0" anchor="ctr"/>
-          <a:lstStyle/>
-          <a:p>
-            <a:pPr algn="ctr" indent="0" marL="0">
-              <a:buNone/>
-            </a:pPr>
-            <a:r>
-              <a:rPr lang="en-US" sz="1100" dirty="0">
-                <a:solidFill>
-                  <a:srgbClr val="64748B"/>
-                </a:solidFill>
-                <a:latin typeface="Calibri" pitchFamily="34" charset="0"/>
-                <a:ea typeface="Calibri" pitchFamily="34" charset="-122"/>
-                <a:cs typeface="Calibri" pitchFamily="34" charset="-120"/>
-              </a:rPr>
-              <a:t>User asks:</a:t>
-            </a:r>
-            <a:endParaRPr lang="en-US" sz="1100" dirty="0"/>
-          </a:p>
-          <a:p>
-            <a:pPr algn="ctr" indent="0" marL="0">
-              <a:buNone/>
-            </a:pPr>
-            <a:r>
-              <a:rPr lang="en-US" sz="1100" dirty="0">
-                <a:solidFill>
-                  <a:srgbClr val="64748B"/>
-                </a:solidFill>
-                <a:latin typeface="Calibri" pitchFamily="34" charset="0"/>
-                <a:ea typeface="Calibri" pitchFamily="34" charset="-122"/>
-                <a:cs typeface="Calibri" pitchFamily="34" charset="-120"/>
-              </a:rPr>
-              <a:t>"What are the LD</a:t>
-            </a:r>
-            <a:endParaRPr lang="en-US" sz="1100" dirty="0"/>
-          </a:p>
-          <a:p>
-            <a:pPr algn="ctr" indent="0" marL="0">
-              <a:buNone/>
-            </a:pPr>
-            <a:r>
-              <a:rPr lang="en-US" sz="1100" dirty="0">
-                <a:solidFill>
-                  <a:srgbClr val="64748B"/>
-                </a:solidFill>
-                <a:latin typeface="Calibri" pitchFamily="34" charset="0"/>
-                <a:ea typeface="Calibri" pitchFamily="34" charset="-122"/>
-                <a:cs typeface="Calibri" pitchFamily="34" charset="-120"/>
-              </a:rPr>
-              <a:t>clauses for delays?"</a:t>
-            </a:r>
-            <a:endParaRPr lang="en-US" sz="1100" dirty="0"/>
-          </a:p>
-        </p:txBody>
-      </p:sp>
-      <p:pic>
-        <p:nvPicPr>
-          <p:cNvPr id="10" name="Image 1" descr="preencoded.png">    </p:cNvPr>
-          <p:cNvPicPr>
-            <a:picLocks noChangeAspect="1"/>
-          </p:cNvPicPr>
-          <p:nvPr/>
-        </p:nvPicPr>
-        <p:blipFill>
-          <a:blip r:embed="rId2"/>
-          <a:stretch>
-            <a:fillRect/>
-          </a:stretch>
-        </p:blipFill>
-        <p:spPr>
-          <a:xfrm>
-            <a:off x="2286000" y="2331720"/>
-            <a:ext cx="228600" cy="228600"/>
-          </a:xfrm>
-          <a:prstGeom prst="rect">
-            <a:avLst/>
-          </a:prstGeom>
-        </p:spPr>
-      </p:pic>
-      <p:sp>
-        <p:nvSpPr>
-          <p:cNvPr id="11" name="Shape 7"/>
-          <p:cNvSpPr/>
-          <p:nvPr/>
-        </p:nvSpPr>
-        <p:spPr>
-          <a:xfrm>
-            <a:off x="2560320" y="1417320"/>
-            <a:ext cx="1920240" cy="2560320"/>
-          </a:xfrm>
-          <a:prstGeom prst="rect">
-            <a:avLst/>
-          </a:prstGeom>
-          <a:solidFill>
-            <a:srgbClr val="FFFFFF"/>
-          </a:solidFill>
-          <a:ln/>
-          <a:effectLst>
-            <a:outerShdw sx="100000" sy="100000" kx="0" ky="0" algn="bl" rotWithShape="0" blurRad="76200" dist="25400" dir="8100000">
-              <a:srgbClr val="000000">
-                <a:alpha val="12000"/>
-              </a:srgbClr>
-            </a:outerShdw>
-          </a:effectLst>
-        </p:spPr>
-      </p:sp>
-      <p:sp>
-        <p:nvSpPr>
-          <p:cNvPr id="12" name="Shape 8"/>
-          <p:cNvSpPr/>
-          <p:nvPr/>
-        </p:nvSpPr>
-        <p:spPr>
-          <a:xfrm>
-            <a:off x="3200400" y="1554480"/>
-            <a:ext cx="457200" cy="457200"/>
-          </a:xfrm>
-          <a:prstGeom prst="ellipse">
-            <a:avLst/>
-          </a:prstGeom>
-          <a:solidFill>
-            <a:srgbClr val="F97316"/>
-          </a:solidFill>
-          <a:ln/>
-        </p:spPr>
-      </p:sp>
-      <p:sp>
-        <p:nvSpPr>
-          <p:cNvPr id="13" name="Text 9"/>
-          <p:cNvSpPr/>
-          <p:nvPr/>
-        </p:nvSpPr>
-        <p:spPr>
-          <a:xfrm>
-            <a:off x="3200400" y="1554480"/>
-            <a:ext cx="457200" cy="457200"/>
-          </a:xfrm>
-          <a:prstGeom prst="rect">
-            <a:avLst/>
-          </a:prstGeom>
-          <a:noFill/>
-          <a:ln/>
-        </p:spPr>
-        <p:txBody>
-          <a:bodyPr wrap="square" lIns="0" tIns="0" rIns="0" bIns="0" rtlCol="0" anchor="ctr"/>
-          <a:lstStyle/>
-          <a:p>
-            <a:pPr algn="ctr" indent="0" marL="0">
-              <a:buNone/>
-            </a:pPr>
-            <a:r>
-              <a:rPr lang="en-US" sz="1600" dirty="0">
-                <a:solidFill>
-                  <a:srgbClr val="FFFFFF"/>
-                </a:solidFill>
-                <a:latin typeface="Trebuchet MS" pitchFamily="34" charset="0"/>
-                <a:ea typeface="Trebuchet MS" pitchFamily="34" charset="-122"/>
-                <a:cs typeface="Trebuchet MS" pitchFamily="34" charset="-120"/>
-              </a:rPr>
-              <a:t>2</a:t>
-            </a:r>
-            <a:endParaRPr lang="en-US" sz="1600" dirty="0"/>
-          </a:p>
-        </p:txBody>
-      </p:sp>
-      <p:pic>
-        <p:nvPicPr>
-          <p:cNvPr id="14" name="Image 2" descr="preencoded.png">    </p:cNvPr>
+          <p:cNvPr id="7" name="Image 0" descr="preencoded.png"/>
           <p:cNvPicPr>
             <a:picLocks noChangeAspect="1"/>
           </p:cNvPicPr>
@@ -9477,7 +9005,7 @@
         </p:blipFill>
         <p:spPr>
           <a:xfrm>
-            <a:off x="3154680" y="2194560"/>
+            <a:off x="960120" y="2194560"/>
             <a:ext cx="548640" cy="548640"/>
           </a:xfrm>
           <a:prstGeom prst="rect">
@@ -9487,13 +9015,13 @@
       </p:pic>
       <p:sp>
         <p:nvSpPr>
-          <p:cNvPr id="15" name="Text 10"/>
-          <p:cNvSpPr/>
-          <p:nvPr/>
-        </p:nvSpPr>
-        <p:spPr>
-          <a:xfrm>
-            <a:off x="2560320" y="2880360"/>
+          <p:cNvPr id="8" name="Text 5"/>
+          <p:cNvSpPr/>
+          <p:nvPr/>
+        </p:nvSpPr>
+        <p:spPr>
+          <a:xfrm>
+            <a:off x="365760" y="2880360"/>
             <a:ext cx="1920240" cy="320040"/>
           </a:xfrm>
           <a:prstGeom prst="rect">
@@ -9506,19 +9034,19 @@
           <a:bodyPr wrap="square" lIns="0" tIns="0" rIns="0" bIns="0" rtlCol="0" anchor="ctr"/>
           <a:lstStyle/>
           <a:p>
-            <a:pPr algn="ctr" indent="0" marL="0">
+            <a:pPr marL="0" indent="0" algn="ctr">
               <a:buNone/>
             </a:pPr>
             <a:r>
               <a:rPr lang="en-US" sz="1600" b="1" dirty="0">
                 <a:solidFill>
-                  <a:srgbClr val="F97316"/>
+                  <a:srgbClr val="6366F1"/>
                 </a:solidFill>
                 <a:latin typeface="Trebuchet MS" pitchFamily="34" charset="0"/>
                 <a:ea typeface="Trebuchet MS" pitchFamily="34" charset="-122"/>
                 <a:cs typeface="Trebuchet MS" pitchFamily="34" charset="-120"/>
               </a:rPr>
-              <a:t>Retrieve</a:t>
+              <a:t>Question</a:t>
             </a:r>
             <a:endParaRPr lang="en-US" sz="1600" dirty="0"/>
           </a:p>
@@ -9526,13 +9054,13 @@
       </p:sp>
       <p:sp>
         <p:nvSpPr>
-          <p:cNvPr id="16" name="Text 11"/>
-          <p:cNvSpPr/>
-          <p:nvPr/>
-        </p:nvSpPr>
-        <p:spPr>
-          <a:xfrm>
-            <a:off x="2651760" y="3246120"/>
+          <p:cNvPr id="9" name="Text 6"/>
+          <p:cNvSpPr/>
+          <p:nvPr/>
+        </p:nvSpPr>
+        <p:spPr>
+          <a:xfrm>
+            <a:off x="457200" y="3246120"/>
             <a:ext cx="1737360" cy="640080"/>
           </a:xfrm>
           <a:prstGeom prst="rect">
@@ -9545,7 +9073,7 @@
           <a:bodyPr wrap="square" lIns="0" tIns="0" rIns="0" bIns="0" rtlCol="0" anchor="ctr"/>
           <a:lstStyle/>
           <a:p>
-            <a:pPr algn="ctr" indent="0" marL="0">
+            <a:pPr marL="0" indent="0" algn="ctr">
               <a:buNone/>
             </a:pPr>
             <a:r>
@@ -9557,12 +9085,12 @@
                 <a:ea typeface="Calibri" pitchFamily="34" charset="-122"/>
                 <a:cs typeface="Calibri" pitchFamily="34" charset="-120"/>
               </a:rPr>
-              <a:t>Embed query →</a:t>
+              <a:t>User asks:</a:t>
             </a:r>
             <a:endParaRPr lang="en-US" sz="1100" dirty="0"/>
           </a:p>
           <a:p>
-            <a:pPr algn="ctr" indent="0" marL="0">
+            <a:pPr marL="0" indent="0" algn="ctr">
               <a:buNone/>
             </a:pPr>
             <a:r>
@@ -9574,12 +9102,12 @@
                 <a:ea typeface="Calibri" pitchFamily="34" charset="-122"/>
                 <a:cs typeface="Calibri" pitchFamily="34" charset="-120"/>
               </a:rPr>
-              <a:t>Search ChromaDB →</a:t>
+              <a:t>"What are the LD</a:t>
             </a:r>
             <a:endParaRPr lang="en-US" sz="1100" dirty="0"/>
           </a:p>
           <a:p>
-            <a:pPr algn="ctr" indent="0" marL="0">
+            <a:pPr marL="0" indent="0" algn="ctr">
               <a:buNone/>
             </a:pPr>
             <a:r>
@@ -9591,7 +9119,7 @@
                 <a:ea typeface="Calibri" pitchFamily="34" charset="-122"/>
                 <a:cs typeface="Calibri" pitchFamily="34" charset="-120"/>
               </a:rPr>
-              <a:t>Top 3 chunks returned</a:t>
+              <a:t>clauses for delays?"</a:t>
             </a:r>
             <a:endParaRPr lang="en-US" sz="1100" dirty="0"/>
           </a:p>
@@ -9599,7 +9127,7 @@
       </p:sp>
       <p:pic>
         <p:nvPicPr>
-          <p:cNvPr id="17" name="Image 3" descr="preencoded.png">    </p:cNvPr>
+          <p:cNvPr id="10" name="Image 1" descr="preencoded.png"/>
           <p:cNvPicPr>
             <a:picLocks noChangeAspect="1"/>
           </p:cNvPicPr>
@@ -9613,7 +9141,7 @@
         </p:blipFill>
         <p:spPr>
           <a:xfrm>
-            <a:off x="4480560" y="2331720"/>
+            <a:off x="2286000" y="2331720"/>
             <a:ext cx="228600" cy="228600"/>
           </a:xfrm>
           <a:prstGeom prst="rect">
@@ -9623,13 +9151,13 @@
       </p:pic>
       <p:sp>
         <p:nvSpPr>
-          <p:cNvPr id="18" name="Shape 12"/>
-          <p:cNvSpPr/>
-          <p:nvPr/>
-        </p:nvSpPr>
-        <p:spPr>
-          <a:xfrm>
-            <a:off x="4754880" y="1417320"/>
+          <p:cNvPr id="11" name="Shape 7"/>
+          <p:cNvSpPr/>
+          <p:nvPr/>
+        </p:nvSpPr>
+        <p:spPr>
+          <a:xfrm>
+            <a:off x="2560320" y="1417320"/>
             <a:ext cx="1920240" cy="2560320"/>
           </a:xfrm>
           <a:prstGeom prst="rect">
@@ -9640,7 +9168,7 @@
           </a:solidFill>
           <a:ln/>
           <a:effectLst>
-            <a:outerShdw sx="100000" sy="100000" kx="0" ky="0" algn="bl" rotWithShape="0" blurRad="76200" dist="25400" dir="8100000">
+            <a:outerShdw blurRad="76200" dist="25400" dir="8100000" algn="bl" rotWithShape="0">
               <a:srgbClr val="000000">
                 <a:alpha val="12000"/>
               </a:srgbClr>
@@ -9650,33 +9178,33 @@
       </p:sp>
       <p:sp>
         <p:nvSpPr>
-          <p:cNvPr id="19" name="Shape 13"/>
-          <p:cNvSpPr/>
-          <p:nvPr/>
-        </p:nvSpPr>
-        <p:spPr>
-          <a:xfrm>
-            <a:off x="5394960" y="1554480"/>
+          <p:cNvPr id="12" name="Shape 8"/>
+          <p:cNvSpPr/>
+          <p:nvPr/>
+        </p:nvSpPr>
+        <p:spPr>
+          <a:xfrm>
+            <a:off x="3200400" y="1554480"/>
             <a:ext cx="457200" cy="457200"/>
           </a:xfrm>
           <a:prstGeom prst="ellipse">
             <a:avLst/>
           </a:prstGeom>
           <a:solidFill>
-            <a:srgbClr val="6366F1"/>
-          </a:solidFill>
-          <a:ln/>
-        </p:spPr>
-      </p:sp>
-      <p:sp>
-        <p:nvSpPr>
-          <p:cNvPr id="20" name="Text 14"/>
-          <p:cNvSpPr/>
-          <p:nvPr/>
-        </p:nvSpPr>
-        <p:spPr>
-          <a:xfrm>
-            <a:off x="5394960" y="1554480"/>
+            <a:srgbClr val="F97316"/>
+          </a:solidFill>
+          <a:ln/>
+        </p:spPr>
+      </p:sp>
+      <p:sp>
+        <p:nvSpPr>
+          <p:cNvPr id="13" name="Text 9"/>
+          <p:cNvSpPr/>
+          <p:nvPr/>
+        </p:nvSpPr>
+        <p:spPr>
+          <a:xfrm>
+            <a:off x="3200400" y="1554480"/>
             <a:ext cx="457200" cy="457200"/>
           </a:xfrm>
           <a:prstGeom prst="rect">
@@ -9689,7 +9217,7 @@
           <a:bodyPr wrap="square" lIns="0" tIns="0" rIns="0" bIns="0" rtlCol="0" anchor="ctr"/>
           <a:lstStyle/>
           <a:p>
-            <a:pPr algn="ctr" indent="0" marL="0">
+            <a:pPr marL="0" indent="0" algn="ctr">
               <a:buNone/>
             </a:pPr>
             <a:r>
@@ -9701,7 +9229,7 @@
                 <a:ea typeface="Trebuchet MS" pitchFamily="34" charset="-122"/>
                 <a:cs typeface="Trebuchet MS" pitchFamily="34" charset="-120"/>
               </a:rPr>
-              <a:t>3</a:t>
+              <a:t>2</a:t>
             </a:r>
             <a:endParaRPr lang="en-US" sz="1600" dirty="0"/>
           </a:p>
@@ -9709,7 +9237,7 @@
       </p:sp>
       <p:pic>
         <p:nvPicPr>
-          <p:cNvPr id="21" name="Image 4" descr="preencoded.png">    </p:cNvPr>
+          <p:cNvPr id="14" name="Image 2" descr="preencoded.png"/>
           <p:cNvPicPr>
             <a:picLocks noChangeAspect="1"/>
           </p:cNvPicPr>
@@ -9723,7 +9251,7 @@
         </p:blipFill>
         <p:spPr>
           <a:xfrm>
-            <a:off x="5349240" y="2194560"/>
+            <a:off x="3154680" y="2194560"/>
             <a:ext cx="548640" cy="548640"/>
           </a:xfrm>
           <a:prstGeom prst="rect">
@@ -9733,13 +9261,13 @@
       </p:pic>
       <p:sp>
         <p:nvSpPr>
-          <p:cNvPr id="22" name="Text 15"/>
-          <p:cNvSpPr/>
-          <p:nvPr/>
-        </p:nvSpPr>
-        <p:spPr>
-          <a:xfrm>
-            <a:off x="4754880" y="2880360"/>
+          <p:cNvPr id="15" name="Text 10"/>
+          <p:cNvSpPr/>
+          <p:nvPr/>
+        </p:nvSpPr>
+        <p:spPr>
+          <a:xfrm>
+            <a:off x="2560320" y="2880360"/>
             <a:ext cx="1920240" cy="320040"/>
           </a:xfrm>
           <a:prstGeom prst="rect">
@@ -9752,19 +9280,19 @@
           <a:bodyPr wrap="square" lIns="0" tIns="0" rIns="0" bIns="0" rtlCol="0" anchor="ctr"/>
           <a:lstStyle/>
           <a:p>
-            <a:pPr algn="ctr" indent="0" marL="0">
+            <a:pPr marL="0" indent="0" algn="ctr">
               <a:buNone/>
             </a:pPr>
             <a:r>
               <a:rPr lang="en-US" sz="1600" b="1" dirty="0">
                 <a:solidFill>
-                  <a:srgbClr val="6366F1"/>
+                  <a:srgbClr val="F97316"/>
                 </a:solidFill>
                 <a:latin typeface="Trebuchet MS" pitchFamily="34" charset="0"/>
                 <a:ea typeface="Trebuchet MS" pitchFamily="34" charset="-122"/>
                 <a:cs typeface="Trebuchet MS" pitchFamily="34" charset="-120"/>
               </a:rPr>
-              <a:t>Generate</a:t>
+              <a:t>Retrieve</a:t>
             </a:r>
             <a:endParaRPr lang="en-US" sz="1600" dirty="0"/>
           </a:p>
@@ -9772,13 +9300,13 @@
       </p:sp>
       <p:sp>
         <p:nvSpPr>
-          <p:cNvPr id="23" name="Text 16"/>
-          <p:cNvSpPr/>
-          <p:nvPr/>
-        </p:nvSpPr>
-        <p:spPr>
-          <a:xfrm>
-            <a:off x="4846320" y="3246120"/>
+          <p:cNvPr id="16" name="Text 11"/>
+          <p:cNvSpPr/>
+          <p:nvPr/>
+        </p:nvSpPr>
+        <p:spPr>
+          <a:xfrm>
+            <a:off x="2651760" y="3246120"/>
             <a:ext cx="1737360" cy="640080"/>
           </a:xfrm>
           <a:prstGeom prst="rect">
@@ -9791,7 +9319,7 @@
           <a:bodyPr wrap="square" lIns="0" tIns="0" rIns="0" bIns="0" rtlCol="0" anchor="ctr"/>
           <a:lstStyle/>
           <a:p>
-            <a:pPr algn="ctr" indent="0" marL="0">
+            <a:pPr marL="0" indent="0" algn="ctr">
               <a:buNone/>
             </a:pPr>
             <a:r>
@@ -9803,12 +9331,12 @@
                 <a:ea typeface="Calibri" pitchFamily="34" charset="-122"/>
                 <a:cs typeface="Calibri" pitchFamily="34" charset="-120"/>
               </a:rPr>
-              <a:t>LLM reads chunks +</a:t>
+              <a:t>Embed query →</a:t>
             </a:r>
             <a:endParaRPr lang="en-US" sz="1100" dirty="0"/>
           </a:p>
           <a:p>
-            <a:pPr algn="ctr" indent="0" marL="0">
+            <a:pPr marL="0" indent="0" algn="ctr">
               <a:buNone/>
             </a:pPr>
             <a:r>
@@ -9820,12 +9348,12 @@
                 <a:ea typeface="Calibri" pitchFamily="34" charset="-122"/>
                 <a:cs typeface="Calibri" pitchFamily="34" charset="-120"/>
               </a:rPr>
-              <a:t>query → synthesizes</a:t>
+              <a:t>Search ChromaDB →</a:t>
             </a:r>
             <a:endParaRPr lang="en-US" sz="1100" dirty="0"/>
           </a:p>
           <a:p>
-            <a:pPr algn="ctr" indent="0" marL="0">
+            <a:pPr marL="0" indent="0" algn="ctr">
               <a:buNone/>
             </a:pPr>
             <a:r>
@@ -9837,7 +9365,7 @@
                 <a:ea typeface="Calibri" pitchFamily="34" charset="-122"/>
                 <a:cs typeface="Calibri" pitchFamily="34" charset="-120"/>
               </a:rPr>
-              <a:t>a grounded answer</a:t>
+              <a:t>Top 3 chunks returned</a:t>
             </a:r>
             <a:endParaRPr lang="en-US" sz="1100" dirty="0"/>
           </a:p>
@@ -9845,7 +9373,117 @@
       </p:sp>
       <p:pic>
         <p:nvPicPr>
-          <p:cNvPr id="24" name="Image 5" descr="preencoded.png">    </p:cNvPr>
+          <p:cNvPr id="17" name="Image 3" descr="preencoded.png"/>
+          <p:cNvPicPr>
+            <a:picLocks noChangeAspect="1"/>
+          </p:cNvPicPr>
+          <p:nvPr/>
+        </p:nvPicPr>
+        <p:blipFill>
+          <a:blip r:embed="rId4"/>
+          <a:stretch>
+            <a:fillRect/>
+          </a:stretch>
+        </p:blipFill>
+        <p:spPr>
+          <a:xfrm>
+            <a:off x="4480560" y="2331720"/>
+            <a:ext cx="228600" cy="228600"/>
+          </a:xfrm>
+          <a:prstGeom prst="rect">
+            <a:avLst/>
+          </a:prstGeom>
+        </p:spPr>
+      </p:pic>
+      <p:sp>
+        <p:nvSpPr>
+          <p:cNvPr id="18" name="Shape 12"/>
+          <p:cNvSpPr/>
+          <p:nvPr/>
+        </p:nvSpPr>
+        <p:spPr>
+          <a:xfrm>
+            <a:off x="4754880" y="1417320"/>
+            <a:ext cx="1920240" cy="2560320"/>
+          </a:xfrm>
+          <a:prstGeom prst="rect">
+            <a:avLst/>
+          </a:prstGeom>
+          <a:solidFill>
+            <a:srgbClr val="FFFFFF"/>
+          </a:solidFill>
+          <a:ln/>
+          <a:effectLst>
+            <a:outerShdw blurRad="76200" dist="25400" dir="8100000" algn="bl" rotWithShape="0">
+              <a:srgbClr val="000000">
+                <a:alpha val="12000"/>
+              </a:srgbClr>
+            </a:outerShdw>
+          </a:effectLst>
+        </p:spPr>
+      </p:sp>
+      <p:sp>
+        <p:nvSpPr>
+          <p:cNvPr id="19" name="Shape 13"/>
+          <p:cNvSpPr/>
+          <p:nvPr/>
+        </p:nvSpPr>
+        <p:spPr>
+          <a:xfrm>
+            <a:off x="5394960" y="1554480"/>
+            <a:ext cx="457200" cy="457200"/>
+          </a:xfrm>
+          <a:prstGeom prst="ellipse">
+            <a:avLst/>
+          </a:prstGeom>
+          <a:solidFill>
+            <a:srgbClr val="6366F1"/>
+          </a:solidFill>
+          <a:ln/>
+        </p:spPr>
+      </p:sp>
+      <p:sp>
+        <p:nvSpPr>
+          <p:cNvPr id="20" name="Text 14"/>
+          <p:cNvSpPr/>
+          <p:nvPr/>
+        </p:nvSpPr>
+        <p:spPr>
+          <a:xfrm>
+            <a:off x="5394960" y="1554480"/>
+            <a:ext cx="457200" cy="457200"/>
+          </a:xfrm>
+          <a:prstGeom prst="rect">
+            <a:avLst/>
+          </a:prstGeom>
+          <a:noFill/>
+          <a:ln/>
+        </p:spPr>
+        <p:txBody>
+          <a:bodyPr wrap="square" lIns="0" tIns="0" rIns="0" bIns="0" rtlCol="0" anchor="ctr"/>
+          <a:lstStyle/>
+          <a:p>
+            <a:pPr marL="0" indent="0" algn="ctr">
+              <a:buNone/>
+            </a:pPr>
+            <a:r>
+              <a:rPr lang="en-US" sz="1600" dirty="0">
+                <a:solidFill>
+                  <a:srgbClr val="FFFFFF"/>
+                </a:solidFill>
+                <a:latin typeface="Trebuchet MS" pitchFamily="34" charset="0"/>
+                <a:ea typeface="Trebuchet MS" pitchFamily="34" charset="-122"/>
+                <a:cs typeface="Trebuchet MS" pitchFamily="34" charset="-120"/>
+              </a:rPr>
+              <a:t>3</a:t>
+            </a:r>
+            <a:endParaRPr lang="en-US" sz="1600" dirty="0"/>
+          </a:p>
+        </p:txBody>
+      </p:sp>
+      <p:pic>
+        <p:nvPicPr>
+          <p:cNvPr id="21" name="Image 4" descr="preencoded.png"/>
           <p:cNvPicPr>
             <a:picLocks noChangeAspect="1"/>
           </p:cNvPicPr>
@@ -9859,6 +9497,142 @@
         </p:blipFill>
         <p:spPr>
           <a:xfrm>
+            <a:off x="5349240" y="2194560"/>
+            <a:ext cx="548640" cy="548640"/>
+          </a:xfrm>
+          <a:prstGeom prst="rect">
+            <a:avLst/>
+          </a:prstGeom>
+        </p:spPr>
+      </p:pic>
+      <p:sp>
+        <p:nvSpPr>
+          <p:cNvPr id="22" name="Text 15"/>
+          <p:cNvSpPr/>
+          <p:nvPr/>
+        </p:nvSpPr>
+        <p:spPr>
+          <a:xfrm>
+            <a:off x="4754880" y="2880360"/>
+            <a:ext cx="1920240" cy="320040"/>
+          </a:xfrm>
+          <a:prstGeom prst="rect">
+            <a:avLst/>
+          </a:prstGeom>
+          <a:noFill/>
+          <a:ln/>
+        </p:spPr>
+        <p:txBody>
+          <a:bodyPr wrap="square" lIns="0" tIns="0" rIns="0" bIns="0" rtlCol="0" anchor="ctr"/>
+          <a:lstStyle/>
+          <a:p>
+            <a:pPr marL="0" indent="0" algn="ctr">
+              <a:buNone/>
+            </a:pPr>
+            <a:r>
+              <a:rPr lang="en-US" sz="1600" b="1" dirty="0">
+                <a:solidFill>
+                  <a:srgbClr val="6366F1"/>
+                </a:solidFill>
+                <a:latin typeface="Trebuchet MS" pitchFamily="34" charset="0"/>
+                <a:ea typeface="Trebuchet MS" pitchFamily="34" charset="-122"/>
+                <a:cs typeface="Trebuchet MS" pitchFamily="34" charset="-120"/>
+              </a:rPr>
+              <a:t>Generate</a:t>
+            </a:r>
+            <a:endParaRPr lang="en-US" sz="1600" dirty="0"/>
+          </a:p>
+        </p:txBody>
+      </p:sp>
+      <p:sp>
+        <p:nvSpPr>
+          <p:cNvPr id="23" name="Text 16"/>
+          <p:cNvSpPr/>
+          <p:nvPr/>
+        </p:nvSpPr>
+        <p:spPr>
+          <a:xfrm>
+            <a:off x="4846320" y="3246120"/>
+            <a:ext cx="1737360" cy="640080"/>
+          </a:xfrm>
+          <a:prstGeom prst="rect">
+            <a:avLst/>
+          </a:prstGeom>
+          <a:noFill/>
+          <a:ln/>
+        </p:spPr>
+        <p:txBody>
+          <a:bodyPr wrap="square" lIns="0" tIns="0" rIns="0" bIns="0" rtlCol="0" anchor="ctr"/>
+          <a:lstStyle/>
+          <a:p>
+            <a:pPr marL="0" indent="0" algn="ctr">
+              <a:buNone/>
+            </a:pPr>
+            <a:r>
+              <a:rPr lang="en-US" sz="1100" dirty="0">
+                <a:solidFill>
+                  <a:srgbClr val="64748B"/>
+                </a:solidFill>
+                <a:latin typeface="Calibri" pitchFamily="34" charset="0"/>
+                <a:ea typeface="Calibri" pitchFamily="34" charset="-122"/>
+                <a:cs typeface="Calibri" pitchFamily="34" charset="-120"/>
+              </a:rPr>
+              <a:t>LLM reads chunks +</a:t>
+            </a:r>
+            <a:endParaRPr lang="en-US" sz="1100" dirty="0"/>
+          </a:p>
+          <a:p>
+            <a:pPr marL="0" indent="0" algn="ctr">
+              <a:buNone/>
+            </a:pPr>
+            <a:r>
+              <a:rPr lang="en-US" sz="1100" dirty="0">
+                <a:solidFill>
+                  <a:srgbClr val="64748B"/>
+                </a:solidFill>
+                <a:latin typeface="Calibri" pitchFamily="34" charset="0"/>
+                <a:ea typeface="Calibri" pitchFamily="34" charset="-122"/>
+                <a:cs typeface="Calibri" pitchFamily="34" charset="-120"/>
+              </a:rPr>
+              <a:t>query → synthesizes</a:t>
+            </a:r>
+            <a:endParaRPr lang="en-US" sz="1100" dirty="0"/>
+          </a:p>
+          <a:p>
+            <a:pPr marL="0" indent="0" algn="ctr">
+              <a:buNone/>
+            </a:pPr>
+            <a:r>
+              <a:rPr lang="en-US" sz="1100" dirty="0">
+                <a:solidFill>
+                  <a:srgbClr val="64748B"/>
+                </a:solidFill>
+                <a:latin typeface="Calibri" pitchFamily="34" charset="0"/>
+                <a:ea typeface="Calibri" pitchFamily="34" charset="-122"/>
+                <a:cs typeface="Calibri" pitchFamily="34" charset="-120"/>
+              </a:rPr>
+              <a:t>a grounded answer</a:t>
+            </a:r>
+            <a:endParaRPr lang="en-US" sz="1100" dirty="0"/>
+          </a:p>
+        </p:txBody>
+      </p:sp>
+      <p:pic>
+        <p:nvPicPr>
+          <p:cNvPr id="24" name="Image 5" descr="preencoded.png"/>
+          <p:cNvPicPr>
+            <a:picLocks noChangeAspect="1"/>
+          </p:cNvPicPr>
+          <p:nvPr/>
+        </p:nvPicPr>
+        <p:blipFill>
+          <a:blip r:embed="rId4"/>
+          <a:stretch>
+            <a:fillRect/>
+          </a:stretch>
+        </p:blipFill>
+        <p:spPr>
+          <a:xfrm>
             <a:off x="6675120" y="2331720"/>
             <a:ext cx="228600" cy="228600"/>
           </a:xfrm>
@@ -9886,7 +9660,7 @@
           </a:solidFill>
           <a:ln/>
           <a:effectLst>
-            <a:outerShdw sx="100000" sy="100000" kx="0" ky="0" algn="bl" rotWithShape="0" blurRad="76200" dist="25400" dir="8100000">
+            <a:outerShdw blurRad="76200" dist="25400" dir="8100000" algn="bl" rotWithShape="0">
               <a:srgbClr val="000000">
                 <a:alpha val="12000"/>
               </a:srgbClr>
@@ -9935,7 +9709,7 @@
           <a:bodyPr wrap="square" lIns="0" tIns="0" rIns="0" bIns="0" rtlCol="0" anchor="ctr"/>
           <a:lstStyle/>
           <a:p>
-            <a:pPr algn="ctr" indent="0" marL="0">
+            <a:pPr marL="0" indent="0" algn="ctr">
               <a:buNone/>
             </a:pPr>
             <a:r>
@@ -9955,7 +9729,7 @@
       </p:sp>
       <p:pic>
         <p:nvPicPr>
-          <p:cNvPr id="28" name="Image 6" descr="preencoded.png">    </p:cNvPr>
+          <p:cNvPr id="28" name="Image 6" descr="preencoded.png"/>
           <p:cNvPicPr>
             <a:picLocks noChangeAspect="1"/>
           </p:cNvPicPr>
@@ -9998,7 +9772,7 @@
           <a:bodyPr wrap="square" lIns="0" tIns="0" rIns="0" bIns="0" rtlCol="0" anchor="ctr"/>
           <a:lstStyle/>
           <a:p>
-            <a:pPr algn="ctr" indent="0" marL="0">
+            <a:pPr marL="0" indent="0" algn="ctr">
               <a:buNone/>
             </a:pPr>
             <a:r>
@@ -10037,7 +9811,7 @@
           <a:bodyPr wrap="square" lIns="0" tIns="0" rIns="0" bIns="0" rtlCol="0" anchor="ctr"/>
           <a:lstStyle/>
           <a:p>
-            <a:pPr algn="ctr" indent="0" marL="0">
+            <a:pPr marL="0" indent="0" algn="ctr">
               <a:buNone/>
             </a:pPr>
             <a:r>
@@ -10054,7 +9828,7 @@
             <a:endParaRPr lang="en-US" sz="1100" dirty="0"/>
           </a:p>
           <a:p>
-            <a:pPr algn="ctr" indent="0" marL="0">
+            <a:pPr marL="0" indent="0" algn="ctr">
               <a:buNone/>
             </a:pPr>
             <a:r>
@@ -10071,7 +9845,7 @@
             <a:endParaRPr lang="en-US" sz="1100" dirty="0"/>
           </a:p>
           <a:p>
-            <a:pPr algn="ctr" indent="0" marL="0">
+            <a:pPr marL="0" indent="0" algn="ctr">
               <a:buNone/>
             </a:pPr>
             <a:r>
@@ -10111,7 +9885,7 @@
       </p:sp>
       <p:pic>
         <p:nvPicPr>
-          <p:cNvPr id="32" name="Image 7" descr="preencoded.png">    </p:cNvPr>
+          <p:cNvPr id="32" name="Image 7" descr="preencoded.png"/>
           <p:cNvPicPr>
             <a:picLocks noChangeAspect="1"/>
           </p:cNvPicPr>
@@ -10154,7 +9928,7 @@
           <a:bodyPr wrap="square" lIns="0" tIns="0" rIns="0" bIns="0" rtlCol="0" anchor="ctr"/>
           <a:lstStyle/>
           <a:p>
-            <a:pPr indent="0" marL="0">
+            <a:pPr marL="0" indent="0">
               <a:buNone/>
             </a:pPr>
             <a:r>
@@ -10188,6 +9962,7 @@
         <a:solidFill>
           <a:srgbClr val="0F172A"/>
         </a:solidFill>
+        <a:effectLst/>
       </p:bgPr>
     </p:bg>
     <p:spTree>
@@ -10225,7 +10000,7 @@
           <a:bodyPr wrap="square" lIns="0" tIns="0" rIns="0" bIns="0" rtlCol="0" anchor="ctr"/>
           <a:lstStyle/>
           <a:p>
-            <a:pPr indent="0" marL="0">
+            <a:pPr marL="0" indent="0">
               <a:buNone/>
             </a:pPr>
             <a:r>
@@ -10264,7 +10039,7 @@
           <a:bodyPr wrap="square" lIns="0" tIns="0" rIns="0" bIns="0" rtlCol="0" anchor="ctr"/>
           <a:lstStyle/>
           <a:p>
-            <a:pPr indent="0" marL="0">
+            <a:pPr marL="0" indent="0">
               <a:buNone/>
             </a:pPr>
             <a:r>
@@ -10301,7 +10076,7 @@
           </a:solidFill>
           <a:ln/>
           <a:effectLst>
-            <a:outerShdw sx="100000" sy="100000" kx="0" ky="0" algn="bl" rotWithShape="0" blurRad="76200" dist="25400" dir="8100000">
+            <a:outerShdw blurRad="76200" dist="25400" dir="8100000" algn="bl" rotWithShape="0">
               <a:srgbClr val="000000">
                 <a:alpha val="12000"/>
               </a:srgbClr>
@@ -10331,14 +10106,14 @@
       </p:sp>
       <p:pic>
         <p:nvPicPr>
-          <p:cNvPr id="6" name="Image 0" descr="preencoded.png">    </p:cNvPr>
+          <p:cNvPr id="6" name="Image 0" descr="preencoded.png"/>
           <p:cNvPicPr>
             <a:picLocks noChangeAspect="1"/>
           </p:cNvPicPr>
           <p:nvPr/>
         </p:nvPicPr>
         <p:blipFill>
-          <a:blip r:embed="rId1"/>
+          <a:blip r:embed="rId3"/>
           <a:stretch>
             <a:fillRect/>
           </a:stretch>
@@ -10374,7 +10149,7 @@
           <a:bodyPr wrap="square" lIns="0" tIns="0" rIns="0" bIns="0" rtlCol="0" anchor="ctr"/>
           <a:lstStyle/>
           <a:p>
-            <a:pPr indent="0" marL="0">
+            <a:pPr marL="0" indent="0">
               <a:buNone/>
             </a:pPr>
             <a:r>
@@ -10413,7 +10188,7 @@
           <a:bodyPr wrap="square" lIns="0" tIns="0" rIns="0" bIns="0" rtlCol="0" anchor="ctr"/>
           <a:lstStyle/>
           <a:p>
-            <a:pPr indent="0" marL="0">
+            <a:pPr marL="0" indent="0">
               <a:buNone/>
             </a:pPr>
             <a:r>
@@ -10430,7 +10205,7 @@
             <a:endParaRPr lang="en-US" sz="1000" dirty="0"/>
           </a:p>
           <a:p>
-            <a:pPr indent="0" marL="0">
+            <a:pPr marL="0" indent="0">
               <a:buNone/>
             </a:pPr>
             <a:r>
@@ -10469,7 +10244,7 @@
           <a:bodyPr wrap="square" lIns="0" tIns="0" rIns="0" bIns="0" rtlCol="0" anchor="ctr"/>
           <a:lstStyle/>
           <a:p>
-            <a:pPr indent="0" marL="0">
+            <a:pPr marL="0" indent="0">
               <a:buNone/>
             </a:pPr>
             <a:r>
@@ -10486,7 +10261,7 @@
             <a:endParaRPr lang="en-US" sz="1200" dirty="0"/>
           </a:p>
           <a:p>
-            <a:pPr indent="0" marL="0">
+            <a:pPr marL="0" indent="0">
               <a:buNone/>
             </a:pPr>
             <a:r>
@@ -10523,7 +10298,7 @@
           </a:solidFill>
           <a:ln/>
           <a:effectLst>
-            <a:outerShdw sx="100000" sy="100000" kx="0" ky="0" algn="bl" rotWithShape="0" blurRad="76200" dist="25400" dir="8100000">
+            <a:outerShdw blurRad="76200" dist="25400" dir="8100000" algn="bl" rotWithShape="0">
               <a:srgbClr val="000000">
                 <a:alpha val="12000"/>
               </a:srgbClr>
@@ -10553,14 +10328,14 @@
       </p:sp>
       <p:pic>
         <p:nvPicPr>
-          <p:cNvPr id="12" name="Image 1" descr="preencoded.png">    </p:cNvPr>
+          <p:cNvPr id="12" name="Image 1" descr="preencoded.png"/>
           <p:cNvPicPr>
             <a:picLocks noChangeAspect="1"/>
           </p:cNvPicPr>
           <p:nvPr/>
         </p:nvPicPr>
         <p:blipFill>
-          <a:blip r:embed="rId2"/>
+          <a:blip r:embed="rId4"/>
           <a:stretch>
             <a:fillRect/>
           </a:stretch>
@@ -10596,7 +10371,7 @@
           <a:bodyPr wrap="square" lIns="0" tIns="0" rIns="0" bIns="0" rtlCol="0" anchor="ctr"/>
           <a:lstStyle/>
           <a:p>
-            <a:pPr indent="0" marL="0">
+            <a:pPr marL="0" indent="0">
               <a:buNone/>
             </a:pPr>
             <a:r>
@@ -10635,7 +10410,7 @@
           <a:bodyPr wrap="square" lIns="0" tIns="0" rIns="0" bIns="0" rtlCol="0" anchor="ctr"/>
           <a:lstStyle/>
           <a:p>
-            <a:pPr indent="0" marL="0">
+            <a:pPr marL="0" indent="0">
               <a:buNone/>
             </a:pPr>
             <a:r>
@@ -10652,7 +10427,7 @@
             <a:endParaRPr lang="en-US" sz="1000" dirty="0"/>
           </a:p>
           <a:p>
-            <a:pPr indent="0" marL="0">
+            <a:pPr marL="0" indent="0">
               <a:buNone/>
             </a:pPr>
             <a:r>
@@ -10691,7 +10466,7 @@
           <a:bodyPr wrap="square" lIns="0" tIns="0" rIns="0" bIns="0" rtlCol="0" anchor="ctr"/>
           <a:lstStyle/>
           <a:p>
-            <a:pPr indent="0" marL="0">
+            <a:pPr marL="0" indent="0">
               <a:buNone/>
             </a:pPr>
             <a:r>
@@ -10708,7 +10483,7 @@
             <a:endParaRPr lang="en-US" sz="1200" dirty="0"/>
           </a:p>
           <a:p>
-            <a:pPr indent="0" marL="0">
+            <a:pPr marL="0" indent="0">
               <a:buNone/>
             </a:pPr>
             <a:r>
@@ -10745,7 +10520,7 @@
           </a:solidFill>
           <a:ln/>
           <a:effectLst>
-            <a:outerShdw sx="100000" sy="100000" kx="0" ky="0" algn="bl" rotWithShape="0" blurRad="76200" dist="25400" dir="8100000">
+            <a:outerShdw blurRad="76200" dist="25400" dir="8100000" algn="bl" rotWithShape="0">
               <a:srgbClr val="000000">
                 <a:alpha val="12000"/>
               </a:srgbClr>
@@ -10794,7 +10569,7 @@
           <a:bodyPr wrap="square" lIns="0" tIns="0" rIns="0" bIns="0" rtlCol="0" anchor="ctr"/>
           <a:lstStyle/>
           <a:p>
-            <a:pPr indent="0" marL="0">
+            <a:pPr marL="0" indent="0">
               <a:buNone/>
             </a:pPr>
             <a:r>
@@ -10833,7 +10608,7 @@
           <a:bodyPr wrap="square" lIns="0" tIns="0" rIns="0" bIns="0" rtlCol="0" anchor="ctr"/>
           <a:lstStyle/>
           <a:p>
-            <a:pPr indent="0" marL="0">
+            <a:pPr marL="0" indent="0">
               <a:spcAft>
                 <a:spcPts val="200"/>
               </a:spcAft>
@@ -10853,7 +10628,7 @@
             <a:endParaRPr lang="en-US" sz="1200" dirty="0"/>
           </a:p>
           <a:p>
-            <a:pPr indent="0" marL="0">
+            <a:pPr marL="0" indent="0">
               <a:spcAft>
                 <a:spcPts val="200"/>
               </a:spcAft>
@@ -10873,7 +10648,7 @@
             <a:endParaRPr lang="en-US" sz="1200" dirty="0"/>
           </a:p>
           <a:p>
-            <a:pPr indent="0" marL="0">
+            <a:pPr marL="0" indent="0">
               <a:spcAft>
                 <a:spcPts val="200"/>
               </a:spcAft>
@@ -10910,6 +10685,7 @@
         <a:solidFill>
           <a:srgbClr val="F8FAFC"/>
         </a:solidFill>
+        <a:effectLst/>
       </p:bgPr>
     </p:bg>
     <p:spTree>
@@ -10947,7 +10723,7 @@
           <a:bodyPr wrap="square" lIns="0" tIns="0" rIns="0" bIns="0" rtlCol="0" anchor="ctr"/>
           <a:lstStyle/>
           <a:p>
-            <a:pPr indent="0" marL="0">
+            <a:pPr marL="0" indent="0">
               <a:buNone/>
             </a:pPr>
             <a:r>
@@ -10986,7 +10762,7 @@
           <a:bodyPr wrap="square" lIns="0" tIns="0" rIns="0" bIns="0" rtlCol="0" anchor="ctr"/>
           <a:lstStyle/>
           <a:p>
-            <a:pPr indent="0" marL="0">
+            <a:pPr marL="0" indent="0">
               <a:buNone/>
             </a:pPr>
             <a:r>
@@ -11023,7 +10799,7 @@
           </a:solidFill>
           <a:ln/>
           <a:effectLst>
-            <a:outerShdw sx="100000" sy="100000" kx="0" ky="0" algn="bl" rotWithShape="0" blurRad="76200" dist="25400" dir="8100000">
+            <a:outerShdw blurRad="76200" dist="25400" dir="8100000" algn="bl" rotWithShape="0">
               <a:srgbClr val="000000">
                 <a:alpha val="12000"/>
               </a:srgbClr>
@@ -11053,407 +10829,7 @@
       </p:sp>
       <p:pic>
         <p:nvPicPr>
-          <p:cNvPr id="6" name="Image 0" descr="preencoded.png">    </p:cNvPr>
-          <p:cNvPicPr>
-            <a:picLocks noChangeAspect="1"/>
-          </p:cNvPicPr>
-          <p:nvPr/>
-        </p:nvPicPr>
-        <p:blipFill>
-          <a:blip r:embed="rId1"/>
-          <a:stretch>
-            <a:fillRect/>
-          </a:stretch>
-        </p:blipFill>
-        <p:spPr>
-          <a:xfrm>
-            <a:off x="1554480" y="1783080"/>
-            <a:ext cx="640080" cy="640080"/>
-          </a:xfrm>
-          <a:prstGeom prst="rect">
-            <a:avLst/>
-          </a:prstGeom>
-        </p:spPr>
-      </p:pic>
-      <p:sp>
-        <p:nvSpPr>
-          <p:cNvPr id="7" name="Text 4"/>
-          <p:cNvSpPr/>
-          <p:nvPr/>
-        </p:nvSpPr>
-        <p:spPr>
-          <a:xfrm>
-            <a:off x="731520" y="2560320"/>
-            <a:ext cx="2468880" cy="365760"/>
-          </a:xfrm>
-          <a:prstGeom prst="rect">
-            <a:avLst/>
-          </a:prstGeom>
-          <a:noFill/>
-          <a:ln/>
-        </p:spPr>
-        <p:txBody>
-          <a:bodyPr wrap="square" lIns="0" tIns="0" rIns="0" bIns="0" rtlCol="0" anchor="ctr"/>
-          <a:lstStyle/>
-          <a:p>
-            <a:pPr algn="ctr" indent="0" marL="0">
-              <a:buNone/>
-            </a:pPr>
-            <a:r>
-              <a:rPr lang="en-US" sz="1600" b="1" dirty="0">
-                <a:solidFill>
-                  <a:srgbClr val="6366F1"/>
-                </a:solidFill>
-                <a:latin typeface="Trebuchet MS" pitchFamily="34" charset="0"/>
-                <a:ea typeface="Trebuchet MS" pitchFamily="34" charset="-122"/>
-                <a:cs typeface="Trebuchet MS" pitchFamily="34" charset="-120"/>
-              </a:rPr>
-              <a:t>LangChain</a:t>
-            </a:r>
-            <a:endParaRPr lang="en-US" sz="1600" dirty="0"/>
-          </a:p>
-        </p:txBody>
-      </p:sp>
-      <p:sp>
-        <p:nvSpPr>
-          <p:cNvPr id="8" name="Text 5"/>
-          <p:cNvSpPr/>
-          <p:nvPr/>
-        </p:nvSpPr>
-        <p:spPr>
-          <a:xfrm>
-            <a:off x="868680" y="2971800"/>
-            <a:ext cx="2194560" cy="1051560"/>
-          </a:xfrm>
-          <a:prstGeom prst="rect">
-            <a:avLst/>
-          </a:prstGeom>
-          <a:noFill/>
-          <a:ln/>
-        </p:spPr>
-        <p:txBody>
-          <a:bodyPr wrap="square" lIns="0" tIns="0" rIns="0" bIns="0" rtlCol="0" anchor="ctr"/>
-          <a:lstStyle/>
-          <a:p>
-            <a:pPr algn="ctr" indent="0" marL="0">
-              <a:buNone/>
-            </a:pPr>
-            <a:r>
-              <a:rPr lang="en-US" sz="1200" dirty="0">
-                <a:solidFill>
-                  <a:srgbClr val="64748B"/>
-                </a:solidFill>
-                <a:latin typeface="Calibri" pitchFamily="34" charset="0"/>
-                <a:ea typeface="Calibri" pitchFamily="34" charset="-122"/>
-                <a:cs typeface="Calibri" pitchFamily="34" charset="-120"/>
-              </a:rPr>
-              <a:t>Orchestration framework.</a:t>
-            </a:r>
-            <a:endParaRPr lang="en-US" sz="1200" dirty="0"/>
-          </a:p>
-          <a:p>
-            <a:pPr algn="ctr" indent="0" marL="0">
-              <a:buNone/>
-            </a:pPr>
-            <a:r>
-              <a:rPr lang="en-US" sz="1200" dirty="0">
-                <a:solidFill>
-                  <a:srgbClr val="64748B"/>
-                </a:solidFill>
-                <a:latin typeface="Calibri" pitchFamily="34" charset="0"/>
-                <a:ea typeface="Calibri" pitchFamily="34" charset="-122"/>
-                <a:cs typeface="Calibri" pitchFamily="34" charset="-120"/>
-              </a:rPr>
-              <a:t>Chains together: loader →</a:t>
-            </a:r>
-            <a:endParaRPr lang="en-US" sz="1200" dirty="0"/>
-          </a:p>
-          <a:p>
-            <a:pPr algn="ctr" indent="0" marL="0">
-              <a:buNone/>
-            </a:pPr>
-            <a:r>
-              <a:rPr lang="en-US" sz="1200" dirty="0">
-                <a:solidFill>
-                  <a:srgbClr val="64748B"/>
-                </a:solidFill>
-                <a:latin typeface="Calibri" pitchFamily="34" charset="0"/>
-                <a:ea typeface="Calibri" pitchFamily="34" charset="-122"/>
-                <a:cs typeface="Calibri" pitchFamily="34" charset="-120"/>
-              </a:rPr>
-              <a:t>splitter → embedder →</a:t>
-            </a:r>
-            <a:endParaRPr lang="en-US" sz="1200" dirty="0"/>
-          </a:p>
-          <a:p>
-            <a:pPr algn="ctr" indent="0" marL="0">
-              <a:buNone/>
-            </a:pPr>
-            <a:r>
-              <a:rPr lang="en-US" sz="1200" dirty="0">
-                <a:solidFill>
-                  <a:srgbClr val="64748B"/>
-                </a:solidFill>
-                <a:latin typeface="Calibri" pitchFamily="34" charset="0"/>
-                <a:ea typeface="Calibri" pitchFamily="34" charset="-122"/>
-                <a:cs typeface="Calibri" pitchFamily="34" charset="-120"/>
-              </a:rPr>
-              <a:t>retriever → LLM → output.</a:t>
-            </a:r>
-            <a:endParaRPr lang="en-US" sz="1200" dirty="0"/>
-          </a:p>
-        </p:txBody>
-      </p:sp>
-      <p:sp>
-        <p:nvSpPr>
-          <p:cNvPr id="9" name="Shape 6"/>
-          <p:cNvSpPr/>
-          <p:nvPr/>
-        </p:nvSpPr>
-        <p:spPr>
-          <a:xfrm>
-            <a:off x="3474720" y="1554480"/>
-            <a:ext cx="2468880" cy="2743200"/>
-          </a:xfrm>
-          <a:prstGeom prst="rect">
-            <a:avLst/>
-          </a:prstGeom>
-          <a:solidFill>
-            <a:srgbClr val="FFFFFF"/>
-          </a:solidFill>
-          <a:ln/>
-          <a:effectLst>
-            <a:outerShdw sx="100000" sy="100000" kx="0" ky="0" algn="bl" rotWithShape="0" blurRad="76200" dist="25400" dir="8100000">
-              <a:srgbClr val="000000">
-                <a:alpha val="12000"/>
-              </a:srgbClr>
-            </a:outerShdw>
-          </a:effectLst>
-        </p:spPr>
-      </p:sp>
-      <p:sp>
-        <p:nvSpPr>
-          <p:cNvPr id="10" name="Shape 7"/>
-          <p:cNvSpPr/>
-          <p:nvPr/>
-        </p:nvSpPr>
-        <p:spPr>
-          <a:xfrm>
-            <a:off x="3474720" y="1554480"/>
-            <a:ext cx="2468880" cy="54864"/>
-          </a:xfrm>
-          <a:prstGeom prst="rect">
-            <a:avLst/>
-          </a:prstGeom>
-          <a:solidFill>
-            <a:srgbClr val="F97316"/>
-          </a:solidFill>
-          <a:ln/>
-        </p:spPr>
-      </p:sp>
-      <p:pic>
-        <p:nvPicPr>
-          <p:cNvPr id="11" name="Image 1" descr="preencoded.png">    </p:cNvPr>
-          <p:cNvPicPr>
-            <a:picLocks noChangeAspect="1"/>
-          </p:cNvPicPr>
-          <p:nvPr/>
-        </p:nvPicPr>
-        <p:blipFill>
-          <a:blip r:embed="rId2"/>
-          <a:stretch>
-            <a:fillRect/>
-          </a:stretch>
-        </p:blipFill>
-        <p:spPr>
-          <a:xfrm>
-            <a:off x="4297680" y="1783080"/>
-            <a:ext cx="640080" cy="640080"/>
-          </a:xfrm>
-          <a:prstGeom prst="rect">
-            <a:avLst/>
-          </a:prstGeom>
-        </p:spPr>
-      </p:pic>
-      <p:sp>
-        <p:nvSpPr>
-          <p:cNvPr id="12" name="Text 8"/>
-          <p:cNvSpPr/>
-          <p:nvPr/>
-        </p:nvSpPr>
-        <p:spPr>
-          <a:xfrm>
-            <a:off x="3474720" y="2560320"/>
-            <a:ext cx="2468880" cy="365760"/>
-          </a:xfrm>
-          <a:prstGeom prst="rect">
-            <a:avLst/>
-          </a:prstGeom>
-          <a:noFill/>
-          <a:ln/>
-        </p:spPr>
-        <p:txBody>
-          <a:bodyPr wrap="square" lIns="0" tIns="0" rIns="0" bIns="0" rtlCol="0" anchor="ctr"/>
-          <a:lstStyle/>
-          <a:p>
-            <a:pPr algn="ctr" indent="0" marL="0">
-              <a:buNone/>
-            </a:pPr>
-            <a:r>
-              <a:rPr lang="en-US" sz="1600" b="1" dirty="0">
-                <a:solidFill>
-                  <a:srgbClr val="F97316"/>
-                </a:solidFill>
-                <a:latin typeface="Trebuchet MS" pitchFamily="34" charset="0"/>
-                <a:ea typeface="Trebuchet MS" pitchFamily="34" charset="-122"/>
-                <a:cs typeface="Trebuchet MS" pitchFamily="34" charset="-120"/>
-              </a:rPr>
-              <a:t>ChromaDB</a:t>
-            </a:r>
-            <a:endParaRPr lang="en-US" sz="1600" dirty="0"/>
-          </a:p>
-        </p:txBody>
-      </p:sp>
-      <p:sp>
-        <p:nvSpPr>
-          <p:cNvPr id="13" name="Text 9"/>
-          <p:cNvSpPr/>
-          <p:nvPr/>
-        </p:nvSpPr>
-        <p:spPr>
-          <a:xfrm>
-            <a:off x="3611880" y="2971800"/>
-            <a:ext cx="2194560" cy="1051560"/>
-          </a:xfrm>
-          <a:prstGeom prst="rect">
-            <a:avLst/>
-          </a:prstGeom>
-          <a:noFill/>
-          <a:ln/>
-        </p:spPr>
-        <p:txBody>
-          <a:bodyPr wrap="square" lIns="0" tIns="0" rIns="0" bIns="0" rtlCol="0" anchor="ctr"/>
-          <a:lstStyle/>
-          <a:p>
-            <a:pPr algn="ctr" indent="0" marL="0">
-              <a:buNone/>
-            </a:pPr>
-            <a:r>
-              <a:rPr lang="en-US" sz="1200" dirty="0">
-                <a:solidFill>
-                  <a:srgbClr val="64748B"/>
-                </a:solidFill>
-                <a:latin typeface="Calibri" pitchFamily="34" charset="0"/>
-                <a:ea typeface="Calibri" pitchFamily="34" charset="-122"/>
-                <a:cs typeface="Calibri" pitchFamily="34" charset="-120"/>
-              </a:rPr>
-              <a:t>Lightweight vector database.</a:t>
-            </a:r>
-            <a:endParaRPr lang="en-US" sz="1200" dirty="0"/>
-          </a:p>
-          <a:p>
-            <a:pPr algn="ctr" indent="0" marL="0">
-              <a:buNone/>
-            </a:pPr>
-            <a:r>
-              <a:rPr lang="en-US" sz="1200" dirty="0">
-                <a:solidFill>
-                  <a:srgbClr val="64748B"/>
-                </a:solidFill>
-                <a:latin typeface="Calibri" pitchFamily="34" charset="0"/>
-                <a:ea typeface="Calibri" pitchFamily="34" charset="-122"/>
-                <a:cs typeface="Calibri" pitchFamily="34" charset="-120"/>
-              </a:rPr>
-              <a:t>Stores embeddings locally.</a:t>
-            </a:r>
-            <a:endParaRPr lang="en-US" sz="1200" dirty="0"/>
-          </a:p>
-          <a:p>
-            <a:pPr algn="ctr" indent="0" marL="0">
-              <a:buNone/>
-            </a:pPr>
-            <a:r>
-              <a:rPr lang="en-US" sz="1200" dirty="0">
-                <a:solidFill>
-                  <a:srgbClr val="64748B"/>
-                </a:solidFill>
-                <a:latin typeface="Calibri" pitchFamily="34" charset="0"/>
-                <a:ea typeface="Calibri" pitchFamily="34" charset="-122"/>
-                <a:cs typeface="Calibri" pitchFamily="34" charset="-120"/>
-              </a:rPr>
-              <a:t>Open-source, easy to set up,</a:t>
-            </a:r>
-            <a:endParaRPr lang="en-US" sz="1200" dirty="0"/>
-          </a:p>
-          <a:p>
-            <a:pPr algn="ctr" indent="0" marL="0">
-              <a:buNone/>
-            </a:pPr>
-            <a:r>
-              <a:rPr lang="en-US" sz="1200" dirty="0">
-                <a:solidFill>
-                  <a:srgbClr val="64748B"/>
-                </a:solidFill>
-                <a:latin typeface="Calibri" pitchFamily="34" charset="0"/>
-                <a:ea typeface="Calibri" pitchFamily="34" charset="-122"/>
-                <a:cs typeface="Calibri" pitchFamily="34" charset="-120"/>
-              </a:rPr>
-              <a:t>perfect for workshops.</a:t>
-            </a:r>
-            <a:endParaRPr lang="en-US" sz="1200" dirty="0"/>
-          </a:p>
-        </p:txBody>
-      </p:sp>
-      <p:sp>
-        <p:nvSpPr>
-          <p:cNvPr id="14" name="Shape 10"/>
-          <p:cNvSpPr/>
-          <p:nvPr/>
-        </p:nvSpPr>
-        <p:spPr>
-          <a:xfrm>
-            <a:off x="6217920" y="1554480"/>
-            <a:ext cx="2468880" cy="2743200"/>
-          </a:xfrm>
-          <a:prstGeom prst="rect">
-            <a:avLst/>
-          </a:prstGeom>
-          <a:solidFill>
-            <a:srgbClr val="FFFFFF"/>
-          </a:solidFill>
-          <a:ln/>
-          <a:effectLst>
-            <a:outerShdw sx="100000" sy="100000" kx="0" ky="0" algn="bl" rotWithShape="0" blurRad="76200" dist="25400" dir="8100000">
-              <a:srgbClr val="000000">
-                <a:alpha val="12000"/>
-              </a:srgbClr>
-            </a:outerShdw>
-          </a:effectLst>
-        </p:spPr>
-      </p:sp>
-      <p:sp>
-        <p:nvSpPr>
-          <p:cNvPr id="15" name="Shape 11"/>
-          <p:cNvSpPr/>
-          <p:nvPr/>
-        </p:nvSpPr>
-        <p:spPr>
-          <a:xfrm>
-            <a:off x="6217920" y="1554480"/>
-            <a:ext cx="2468880" cy="54864"/>
-          </a:xfrm>
-          <a:prstGeom prst="rect">
-            <a:avLst/>
-          </a:prstGeom>
-          <a:solidFill>
-            <a:srgbClr val="22C55E"/>
-          </a:solidFill>
-          <a:ln/>
-        </p:spPr>
-      </p:sp>
-      <p:pic>
-        <p:nvPicPr>
-          <p:cNvPr id="16" name="Image 2" descr="preencoded.png">    </p:cNvPr>
+          <p:cNvPr id="6" name="Image 0" descr="preencoded.png"/>
           <p:cNvPicPr>
             <a:picLocks noChangeAspect="1"/>
           </p:cNvPicPr>
@@ -11467,7 +10843,7 @@
         </p:blipFill>
         <p:spPr>
           <a:xfrm>
-            <a:off x="7040880" y="1783080"/>
+            <a:off x="1554480" y="1783080"/>
             <a:ext cx="640080" cy="640080"/>
           </a:xfrm>
           <a:prstGeom prst="rect">
@@ -11477,13 +10853,13 @@
       </p:pic>
       <p:sp>
         <p:nvSpPr>
-          <p:cNvPr id="17" name="Text 12"/>
-          <p:cNvSpPr/>
-          <p:nvPr/>
-        </p:nvSpPr>
-        <p:spPr>
-          <a:xfrm>
-            <a:off x="6217920" y="2560320"/>
+          <p:cNvPr id="7" name="Text 4"/>
+          <p:cNvSpPr/>
+          <p:nvPr/>
+        </p:nvSpPr>
+        <p:spPr>
+          <a:xfrm>
+            <a:off x="731520" y="2560320"/>
             <a:ext cx="2468880" cy="365760"/>
           </a:xfrm>
           <a:prstGeom prst="rect">
@@ -11496,19 +10872,19 @@
           <a:bodyPr wrap="square" lIns="0" tIns="0" rIns="0" bIns="0" rtlCol="0" anchor="ctr"/>
           <a:lstStyle/>
           <a:p>
-            <a:pPr algn="ctr" indent="0" marL="0">
+            <a:pPr marL="0" indent="0" algn="ctr">
               <a:buNone/>
             </a:pPr>
             <a:r>
               <a:rPr lang="en-US" sz="1600" b="1" dirty="0">
                 <a:solidFill>
-                  <a:srgbClr val="22C55E"/>
+                  <a:srgbClr val="6366F1"/>
                 </a:solidFill>
                 <a:latin typeface="Trebuchet MS" pitchFamily="34" charset="0"/>
                 <a:ea typeface="Trebuchet MS" pitchFamily="34" charset="-122"/>
                 <a:cs typeface="Trebuchet MS" pitchFamily="34" charset="-120"/>
               </a:rPr>
-              <a:t>LLM (GPT / Claude)</a:t>
+              <a:t>LangChain</a:t>
             </a:r>
             <a:endParaRPr lang="en-US" sz="1600" dirty="0"/>
           </a:p>
@@ -11516,13 +10892,13 @@
       </p:sp>
       <p:sp>
         <p:nvSpPr>
-          <p:cNvPr id="18" name="Text 13"/>
-          <p:cNvSpPr/>
-          <p:nvPr/>
-        </p:nvSpPr>
-        <p:spPr>
-          <a:xfrm>
-            <a:off x="6355080" y="2971800"/>
+          <p:cNvPr id="8" name="Text 5"/>
+          <p:cNvSpPr/>
+          <p:nvPr/>
+        </p:nvSpPr>
+        <p:spPr>
+          <a:xfrm>
+            <a:off x="868680" y="2971800"/>
             <a:ext cx="2194560" cy="1051560"/>
           </a:xfrm>
           <a:prstGeom prst="rect">
@@ -11535,7 +10911,7 @@
           <a:bodyPr wrap="square" lIns="0" tIns="0" rIns="0" bIns="0" rtlCol="0" anchor="ctr"/>
           <a:lstStyle/>
           <a:p>
-            <a:pPr algn="ctr" indent="0" marL="0">
+            <a:pPr marL="0" indent="0" algn="ctr">
               <a:buNone/>
             </a:pPr>
             <a:r>
@@ -11547,12 +10923,12 @@
                 <a:ea typeface="Calibri" pitchFamily="34" charset="-122"/>
                 <a:cs typeface="Calibri" pitchFamily="34" charset="-120"/>
               </a:rPr>
-              <a:t>The reasoning engine.</a:t>
+              <a:t>Orchestration framework.</a:t>
             </a:r>
             <a:endParaRPr lang="en-US" sz="1200" dirty="0"/>
           </a:p>
           <a:p>
-            <a:pPr algn="ctr" indent="0" marL="0">
+            <a:pPr marL="0" indent="0" algn="ctr">
               <a:buNone/>
             </a:pPr>
             <a:r>
@@ -11564,12 +10940,12 @@
                 <a:ea typeface="Calibri" pitchFamily="34" charset="-122"/>
                 <a:cs typeface="Calibri" pitchFamily="34" charset="-120"/>
               </a:rPr>
-              <a:t>Reads retrieved chunks +</a:t>
+              <a:t>Chains together: loader →</a:t>
             </a:r>
             <a:endParaRPr lang="en-US" sz="1200" dirty="0"/>
           </a:p>
           <a:p>
-            <a:pPr algn="ctr" indent="0" marL="0">
+            <a:pPr marL="0" indent="0" algn="ctr">
               <a:buNone/>
             </a:pPr>
             <a:r>
@@ -11581,12 +10957,12 @@
                 <a:ea typeface="Calibri" pitchFamily="34" charset="-122"/>
                 <a:cs typeface="Calibri" pitchFamily="34" charset="-120"/>
               </a:rPr>
-              <a:t>user query → generates</a:t>
+              <a:t>splitter → embedder →</a:t>
             </a:r>
             <a:endParaRPr lang="en-US" sz="1200" dirty="0"/>
           </a:p>
           <a:p>
-            <a:pPr algn="ctr" indent="0" marL="0">
+            <a:pPr marL="0" indent="0" algn="ctr">
               <a:buNone/>
             </a:pPr>
             <a:r>
@@ -11598,7 +10974,7 @@
                 <a:ea typeface="Calibri" pitchFamily="34" charset="-122"/>
                 <a:cs typeface="Calibri" pitchFamily="34" charset="-120"/>
               </a:rPr>
-              <a:t>grounded, cited answers.</a:t>
+              <a:t>retriever → LLM → output.</a:t>
             </a:r>
             <a:endParaRPr lang="en-US" sz="1200" dirty="0"/>
           </a:p>
@@ -11606,27 +10982,54 @@
       </p:sp>
       <p:sp>
         <p:nvSpPr>
-          <p:cNvPr id="19" name="Shape 14"/>
-          <p:cNvSpPr/>
-          <p:nvPr/>
-        </p:nvSpPr>
-        <p:spPr>
-          <a:xfrm>
-            <a:off x="731520" y="4526280"/>
-            <a:ext cx="7680960" cy="411480"/>
-          </a:xfrm>
-          <a:prstGeom prst="rect">
-            <a:avLst/>
-          </a:prstGeom>
-          <a:solidFill>
-            <a:srgbClr val="EEF2FF"/>
+          <p:cNvPr id="9" name="Shape 6"/>
+          <p:cNvSpPr/>
+          <p:nvPr/>
+        </p:nvSpPr>
+        <p:spPr>
+          <a:xfrm>
+            <a:off x="3474720" y="1554480"/>
+            <a:ext cx="2468880" cy="2743200"/>
+          </a:xfrm>
+          <a:prstGeom prst="rect">
+            <a:avLst/>
+          </a:prstGeom>
+          <a:solidFill>
+            <a:srgbClr val="FFFFFF"/>
+          </a:solidFill>
+          <a:ln/>
+          <a:effectLst>
+            <a:outerShdw blurRad="76200" dist="25400" dir="8100000" algn="bl" rotWithShape="0">
+              <a:srgbClr val="000000">
+                <a:alpha val="12000"/>
+              </a:srgbClr>
+            </a:outerShdw>
+          </a:effectLst>
+        </p:spPr>
+      </p:sp>
+      <p:sp>
+        <p:nvSpPr>
+          <p:cNvPr id="10" name="Shape 7"/>
+          <p:cNvSpPr/>
+          <p:nvPr/>
+        </p:nvSpPr>
+        <p:spPr>
+          <a:xfrm>
+            <a:off x="3474720" y="1554480"/>
+            <a:ext cx="2468880" cy="54864"/>
+          </a:xfrm>
+          <a:prstGeom prst="rect">
+            <a:avLst/>
+          </a:prstGeom>
+          <a:solidFill>
+            <a:srgbClr val="F97316"/>
           </a:solidFill>
           <a:ln/>
         </p:spPr>
       </p:sp>
       <p:pic>
         <p:nvPicPr>
-          <p:cNvPr id="20" name="Image 3" descr="preencoded.png">    </p:cNvPr>
+          <p:cNvPr id="11" name="Image 1" descr="preencoded.png"/>
           <p:cNvPicPr>
             <a:picLocks noChangeAspect="1"/>
           </p:cNvPicPr>
@@ -11640,6 +11043,379 @@
         </p:blipFill>
         <p:spPr>
           <a:xfrm>
+            <a:off x="4297680" y="1783080"/>
+            <a:ext cx="640080" cy="640080"/>
+          </a:xfrm>
+          <a:prstGeom prst="rect">
+            <a:avLst/>
+          </a:prstGeom>
+        </p:spPr>
+      </p:pic>
+      <p:sp>
+        <p:nvSpPr>
+          <p:cNvPr id="12" name="Text 8"/>
+          <p:cNvSpPr/>
+          <p:nvPr/>
+        </p:nvSpPr>
+        <p:spPr>
+          <a:xfrm>
+            <a:off x="3474720" y="2560320"/>
+            <a:ext cx="2468880" cy="365760"/>
+          </a:xfrm>
+          <a:prstGeom prst="rect">
+            <a:avLst/>
+          </a:prstGeom>
+          <a:noFill/>
+          <a:ln/>
+        </p:spPr>
+        <p:txBody>
+          <a:bodyPr wrap="square" lIns="0" tIns="0" rIns="0" bIns="0" rtlCol="0" anchor="ctr"/>
+          <a:lstStyle/>
+          <a:p>
+            <a:pPr marL="0" indent="0" algn="ctr">
+              <a:buNone/>
+            </a:pPr>
+            <a:r>
+              <a:rPr lang="en-US" sz="1600" b="1" dirty="0">
+                <a:solidFill>
+                  <a:srgbClr val="F97316"/>
+                </a:solidFill>
+                <a:latin typeface="Trebuchet MS" pitchFamily="34" charset="0"/>
+                <a:ea typeface="Trebuchet MS" pitchFamily="34" charset="-122"/>
+                <a:cs typeface="Trebuchet MS" pitchFamily="34" charset="-120"/>
+              </a:rPr>
+              <a:t>ChromaDB</a:t>
+            </a:r>
+            <a:endParaRPr lang="en-US" sz="1600" dirty="0"/>
+          </a:p>
+        </p:txBody>
+      </p:sp>
+      <p:sp>
+        <p:nvSpPr>
+          <p:cNvPr id="13" name="Text 9"/>
+          <p:cNvSpPr/>
+          <p:nvPr/>
+        </p:nvSpPr>
+        <p:spPr>
+          <a:xfrm>
+            <a:off x="3611880" y="2971800"/>
+            <a:ext cx="2194560" cy="1051560"/>
+          </a:xfrm>
+          <a:prstGeom prst="rect">
+            <a:avLst/>
+          </a:prstGeom>
+          <a:noFill/>
+          <a:ln/>
+        </p:spPr>
+        <p:txBody>
+          <a:bodyPr wrap="square" lIns="0" tIns="0" rIns="0" bIns="0" rtlCol="0" anchor="ctr"/>
+          <a:lstStyle/>
+          <a:p>
+            <a:pPr marL="0" indent="0" algn="ctr">
+              <a:buNone/>
+            </a:pPr>
+            <a:r>
+              <a:rPr lang="en-US" sz="1200" dirty="0">
+                <a:solidFill>
+                  <a:srgbClr val="64748B"/>
+                </a:solidFill>
+                <a:latin typeface="Calibri" pitchFamily="34" charset="0"/>
+                <a:ea typeface="Calibri" pitchFamily="34" charset="-122"/>
+                <a:cs typeface="Calibri" pitchFamily="34" charset="-120"/>
+              </a:rPr>
+              <a:t>Lightweight vector database.</a:t>
+            </a:r>
+            <a:endParaRPr lang="en-US" sz="1200" dirty="0"/>
+          </a:p>
+          <a:p>
+            <a:pPr marL="0" indent="0" algn="ctr">
+              <a:buNone/>
+            </a:pPr>
+            <a:r>
+              <a:rPr lang="en-US" sz="1200" dirty="0">
+                <a:solidFill>
+                  <a:srgbClr val="64748B"/>
+                </a:solidFill>
+                <a:latin typeface="Calibri" pitchFamily="34" charset="0"/>
+                <a:ea typeface="Calibri" pitchFamily="34" charset="-122"/>
+                <a:cs typeface="Calibri" pitchFamily="34" charset="-120"/>
+              </a:rPr>
+              <a:t>Stores embeddings locally.</a:t>
+            </a:r>
+            <a:endParaRPr lang="en-US" sz="1200" dirty="0"/>
+          </a:p>
+          <a:p>
+            <a:pPr marL="0" indent="0" algn="ctr">
+              <a:buNone/>
+            </a:pPr>
+            <a:r>
+              <a:rPr lang="en-US" sz="1200" dirty="0">
+                <a:solidFill>
+                  <a:srgbClr val="64748B"/>
+                </a:solidFill>
+                <a:latin typeface="Calibri" pitchFamily="34" charset="0"/>
+                <a:ea typeface="Calibri" pitchFamily="34" charset="-122"/>
+                <a:cs typeface="Calibri" pitchFamily="34" charset="-120"/>
+              </a:rPr>
+              <a:t>Open-source, easy to set up,</a:t>
+            </a:r>
+            <a:endParaRPr lang="en-US" sz="1200" dirty="0"/>
+          </a:p>
+          <a:p>
+            <a:pPr marL="0" indent="0" algn="ctr">
+              <a:buNone/>
+            </a:pPr>
+            <a:r>
+              <a:rPr lang="en-US" sz="1200" dirty="0">
+                <a:solidFill>
+                  <a:srgbClr val="64748B"/>
+                </a:solidFill>
+                <a:latin typeface="Calibri" pitchFamily="34" charset="0"/>
+                <a:ea typeface="Calibri" pitchFamily="34" charset="-122"/>
+                <a:cs typeface="Calibri" pitchFamily="34" charset="-120"/>
+              </a:rPr>
+              <a:t>perfect for workshops.</a:t>
+            </a:r>
+            <a:endParaRPr lang="en-US" sz="1200" dirty="0"/>
+          </a:p>
+        </p:txBody>
+      </p:sp>
+      <p:sp>
+        <p:nvSpPr>
+          <p:cNvPr id="14" name="Shape 10"/>
+          <p:cNvSpPr/>
+          <p:nvPr/>
+        </p:nvSpPr>
+        <p:spPr>
+          <a:xfrm>
+            <a:off x="6217920" y="1554480"/>
+            <a:ext cx="2468880" cy="2743200"/>
+          </a:xfrm>
+          <a:prstGeom prst="rect">
+            <a:avLst/>
+          </a:prstGeom>
+          <a:solidFill>
+            <a:srgbClr val="FFFFFF"/>
+          </a:solidFill>
+          <a:ln/>
+          <a:effectLst>
+            <a:outerShdw blurRad="76200" dist="25400" dir="8100000" algn="bl" rotWithShape="0">
+              <a:srgbClr val="000000">
+                <a:alpha val="12000"/>
+              </a:srgbClr>
+            </a:outerShdw>
+          </a:effectLst>
+        </p:spPr>
+      </p:sp>
+      <p:sp>
+        <p:nvSpPr>
+          <p:cNvPr id="15" name="Shape 11"/>
+          <p:cNvSpPr/>
+          <p:nvPr/>
+        </p:nvSpPr>
+        <p:spPr>
+          <a:xfrm>
+            <a:off x="6217920" y="1554480"/>
+            <a:ext cx="2468880" cy="54864"/>
+          </a:xfrm>
+          <a:prstGeom prst="rect">
+            <a:avLst/>
+          </a:prstGeom>
+          <a:solidFill>
+            <a:srgbClr val="22C55E"/>
+          </a:solidFill>
+          <a:ln/>
+        </p:spPr>
+      </p:sp>
+      <p:pic>
+        <p:nvPicPr>
+          <p:cNvPr id="16" name="Image 2" descr="preencoded.png"/>
+          <p:cNvPicPr>
+            <a:picLocks noChangeAspect="1"/>
+          </p:cNvPicPr>
+          <p:nvPr/>
+        </p:nvPicPr>
+        <p:blipFill>
+          <a:blip r:embed="rId5"/>
+          <a:stretch>
+            <a:fillRect/>
+          </a:stretch>
+        </p:blipFill>
+        <p:spPr>
+          <a:xfrm>
+            <a:off x="7040880" y="1783080"/>
+            <a:ext cx="640080" cy="640080"/>
+          </a:xfrm>
+          <a:prstGeom prst="rect">
+            <a:avLst/>
+          </a:prstGeom>
+        </p:spPr>
+      </p:pic>
+      <p:sp>
+        <p:nvSpPr>
+          <p:cNvPr id="17" name="Text 12"/>
+          <p:cNvSpPr/>
+          <p:nvPr/>
+        </p:nvSpPr>
+        <p:spPr>
+          <a:xfrm>
+            <a:off x="6217920" y="2560320"/>
+            <a:ext cx="2468880" cy="365760"/>
+          </a:xfrm>
+          <a:prstGeom prst="rect">
+            <a:avLst/>
+          </a:prstGeom>
+          <a:noFill/>
+          <a:ln/>
+        </p:spPr>
+        <p:txBody>
+          <a:bodyPr wrap="square" lIns="0" tIns="0" rIns="0" bIns="0" rtlCol="0" anchor="ctr"/>
+          <a:lstStyle/>
+          <a:p>
+            <a:pPr marL="0" indent="0" algn="ctr">
+              <a:buNone/>
+            </a:pPr>
+            <a:r>
+              <a:rPr lang="en-US" sz="1600" b="1" dirty="0">
+                <a:solidFill>
+                  <a:srgbClr val="22C55E"/>
+                </a:solidFill>
+                <a:latin typeface="Trebuchet MS" pitchFamily="34" charset="0"/>
+                <a:ea typeface="Trebuchet MS" pitchFamily="34" charset="-122"/>
+                <a:cs typeface="Trebuchet MS" pitchFamily="34" charset="-120"/>
+              </a:rPr>
+              <a:t>LLM (GPT / Claude)</a:t>
+            </a:r>
+            <a:endParaRPr lang="en-US" sz="1600" dirty="0"/>
+          </a:p>
+        </p:txBody>
+      </p:sp>
+      <p:sp>
+        <p:nvSpPr>
+          <p:cNvPr id="18" name="Text 13"/>
+          <p:cNvSpPr/>
+          <p:nvPr/>
+        </p:nvSpPr>
+        <p:spPr>
+          <a:xfrm>
+            <a:off x="6355080" y="2971800"/>
+            <a:ext cx="2194560" cy="1051560"/>
+          </a:xfrm>
+          <a:prstGeom prst="rect">
+            <a:avLst/>
+          </a:prstGeom>
+          <a:noFill/>
+          <a:ln/>
+        </p:spPr>
+        <p:txBody>
+          <a:bodyPr wrap="square" lIns="0" tIns="0" rIns="0" bIns="0" rtlCol="0" anchor="ctr"/>
+          <a:lstStyle/>
+          <a:p>
+            <a:pPr marL="0" indent="0" algn="ctr">
+              <a:buNone/>
+            </a:pPr>
+            <a:r>
+              <a:rPr lang="en-US" sz="1200" dirty="0">
+                <a:solidFill>
+                  <a:srgbClr val="64748B"/>
+                </a:solidFill>
+                <a:latin typeface="Calibri" pitchFamily="34" charset="0"/>
+                <a:ea typeface="Calibri" pitchFamily="34" charset="-122"/>
+                <a:cs typeface="Calibri" pitchFamily="34" charset="-120"/>
+              </a:rPr>
+              <a:t>The reasoning engine.</a:t>
+            </a:r>
+            <a:endParaRPr lang="en-US" sz="1200" dirty="0"/>
+          </a:p>
+          <a:p>
+            <a:pPr marL="0" indent="0" algn="ctr">
+              <a:buNone/>
+            </a:pPr>
+            <a:r>
+              <a:rPr lang="en-US" sz="1200" dirty="0">
+                <a:solidFill>
+                  <a:srgbClr val="64748B"/>
+                </a:solidFill>
+                <a:latin typeface="Calibri" pitchFamily="34" charset="0"/>
+                <a:ea typeface="Calibri" pitchFamily="34" charset="-122"/>
+                <a:cs typeface="Calibri" pitchFamily="34" charset="-120"/>
+              </a:rPr>
+              <a:t>Reads retrieved chunks +</a:t>
+            </a:r>
+            <a:endParaRPr lang="en-US" sz="1200" dirty="0"/>
+          </a:p>
+          <a:p>
+            <a:pPr marL="0" indent="0" algn="ctr">
+              <a:buNone/>
+            </a:pPr>
+            <a:r>
+              <a:rPr lang="en-US" sz="1200" dirty="0">
+                <a:solidFill>
+                  <a:srgbClr val="64748B"/>
+                </a:solidFill>
+                <a:latin typeface="Calibri" pitchFamily="34" charset="0"/>
+                <a:ea typeface="Calibri" pitchFamily="34" charset="-122"/>
+                <a:cs typeface="Calibri" pitchFamily="34" charset="-120"/>
+              </a:rPr>
+              <a:t>user query → generates</a:t>
+            </a:r>
+            <a:endParaRPr lang="en-US" sz="1200" dirty="0"/>
+          </a:p>
+          <a:p>
+            <a:pPr marL="0" indent="0" algn="ctr">
+              <a:buNone/>
+            </a:pPr>
+            <a:r>
+              <a:rPr lang="en-US" sz="1200" dirty="0">
+                <a:solidFill>
+                  <a:srgbClr val="64748B"/>
+                </a:solidFill>
+                <a:latin typeface="Calibri" pitchFamily="34" charset="0"/>
+                <a:ea typeface="Calibri" pitchFamily="34" charset="-122"/>
+                <a:cs typeface="Calibri" pitchFamily="34" charset="-120"/>
+              </a:rPr>
+              <a:t>grounded, cited answers.</a:t>
+            </a:r>
+            <a:endParaRPr lang="en-US" sz="1200" dirty="0"/>
+          </a:p>
+        </p:txBody>
+      </p:sp>
+      <p:sp>
+        <p:nvSpPr>
+          <p:cNvPr id="19" name="Shape 14"/>
+          <p:cNvSpPr/>
+          <p:nvPr/>
+        </p:nvSpPr>
+        <p:spPr>
+          <a:xfrm>
+            <a:off x="731520" y="4526280"/>
+            <a:ext cx="7680960" cy="411480"/>
+          </a:xfrm>
+          <a:prstGeom prst="rect">
+            <a:avLst/>
+          </a:prstGeom>
+          <a:solidFill>
+            <a:srgbClr val="EEF2FF"/>
+          </a:solidFill>
+          <a:ln/>
+        </p:spPr>
+      </p:sp>
+      <p:pic>
+        <p:nvPicPr>
+          <p:cNvPr id="20" name="Image 3" descr="preencoded.png"/>
+          <p:cNvPicPr>
+            <a:picLocks noChangeAspect="1"/>
+          </p:cNvPicPr>
+          <p:nvPr/>
+        </p:nvPicPr>
+        <p:blipFill>
+          <a:blip r:embed="rId6"/>
+          <a:stretch>
+            <a:fillRect/>
+          </a:stretch>
+        </p:blipFill>
+        <p:spPr>
+          <a:xfrm>
             <a:off x="914400" y="4590288"/>
             <a:ext cx="274320" cy="274320"/>
           </a:xfrm>
@@ -11669,7 +11445,7 @@
           <a:bodyPr wrap="square" lIns="0" tIns="0" rIns="0" bIns="0" rtlCol="0" anchor="ctr"/>
           <a:lstStyle/>
           <a:p>
-            <a:pPr indent="0" marL="0">
+            <a:pPr marL="0" indent="0">
               <a:buNone/>
             </a:pPr>
             <a:r>
@@ -11988,4 +11764,299 @@
     </a:ext>
   </a:extLst>
 </a:theme>
+</file>
+
+<file path=ppt/theme/theme2.xml><?xml version="1.0" encoding="utf-8"?>
+<a:theme xmlns:a="http://schemas.openxmlformats.org/drawingml/2006/main" name="Office Theme">
+  <a:themeElements>
+    <a:clrScheme name="Office">
+      <a:dk1>
+        <a:sysClr val="windowText" lastClr="000000"/>
+      </a:dk1>
+      <a:lt1>
+        <a:sysClr val="window" lastClr="FFFFFF"/>
+      </a:lt1>
+      <a:dk2>
+        <a:srgbClr val="44546A"/>
+      </a:dk2>
+      <a:lt2>
+        <a:srgbClr val="E7E6E6"/>
+      </a:lt2>
+      <a:accent1>
+        <a:srgbClr val="4472C4"/>
+      </a:accent1>
+      <a:accent2>
+        <a:srgbClr val="ED7D31"/>
+      </a:accent2>
+      <a:accent3>
+        <a:srgbClr val="A5A5A5"/>
+      </a:accent3>
+      <a:accent4>
+        <a:srgbClr val="FFC000"/>
+      </a:accent4>
+      <a:accent5>
+        <a:srgbClr val="5B9BD5"/>
+      </a:accent5>
+      <a:accent6>
+        <a:srgbClr val="70AD47"/>
+      </a:accent6>
+      <a:hlink>
+        <a:srgbClr val="0563C1"/>
+      </a:hlink>
+      <a:folHlink>
+        <a:srgbClr val="954F72"/>
+      </a:folHlink>
+    </a:clrScheme>
+    <a:fontScheme name="Office">
+      <a:majorFont>
+        <a:latin typeface="Calibri Light" panose="020F0302020204030204"/>
+        <a:ea typeface=""/>
+        <a:cs typeface=""/>
+        <a:font script="Jpan" typeface="游ゴシック Light"/>
+        <a:font script="Hang" typeface="맑은 고딕"/>
+        <a:font script="Hans" typeface="等线 Light"/>
+        <a:font script="Hant" typeface="新細明體"/>
+        <a:font script="Arab" typeface="Times New Roman"/>
+        <a:font script="Hebr" typeface="Times New Roman"/>
+        <a:font script="Thai" typeface="Angsana New"/>
+        <a:font script="Ethi" typeface="Nyala"/>
+        <a:font script="Beng" typeface="Vrinda"/>
+        <a:font script="Gujr" typeface="Shruti"/>
+        <a:font script="Khmr" typeface="MoolBoran"/>
+        <a:font script="Knda" typeface="Tunga"/>
+        <a:font script="Guru" typeface="Raavi"/>
+        <a:font script="Cans" typeface="Euphemia"/>
+        <a:font script="Cher" typeface="Plantagenet Cherokee"/>
+        <a:font script="Yiii" typeface="Microsoft Yi Baiti"/>
+        <a:font script="Tibt" typeface="Microsoft Himalaya"/>
+        <a:font script="Thaa" typeface="MV Boli"/>
+        <a:font script="Deva" typeface="Mangal"/>
+        <a:font script="Telu" typeface="Gautami"/>
+        <a:font script="Taml" typeface="Latha"/>
+        <a:font script="Syrc" typeface="Estrangelo Edessa"/>
+        <a:font script="Orya" typeface="Kalinga"/>
+        <a:font script="Mlym" typeface="Kartika"/>
+        <a:font script="Laoo" typeface="DokChampa"/>
+        <a:font script="Sinh" typeface="Iskoola Pota"/>
+        <a:font script="Mong" typeface="Mongolian Baiti"/>
+        <a:font script="Viet" typeface="Times New Roman"/>
+        <a:font script="Uigh" typeface="Microsoft Uighur"/>
+        <a:font script="Geor" typeface="Sylfaen"/>
+        <a:font script="Armn" typeface="Arial"/>
+        <a:font script="Bugi" typeface="Leelawadee UI"/>
+        <a:font script="Bopo" typeface="Microsoft JhengHei"/>
+        <a:font script="Java" typeface="Javanese Text"/>
+        <a:font script="Lisu" typeface="Segoe UI"/>
+        <a:font script="Mymr" typeface="Myanmar Text"/>
+        <a:font script="Nkoo" typeface="Ebrima"/>
+        <a:font script="Olck" typeface="Nirmala UI"/>
+        <a:font script="Osma" typeface="Ebrima"/>
+        <a:font script="Phag" typeface="Phagspa"/>
+        <a:font script="Syrn" typeface="Estrangelo Edessa"/>
+        <a:font script="Syrj" typeface="Estrangelo Edessa"/>
+        <a:font script="Syre" typeface="Estrangelo Edessa"/>
+        <a:font script="Sora" typeface="Nirmala UI"/>
+        <a:font script="Tale" typeface="Microsoft Tai Le"/>
+        <a:font script="Talu" typeface="Microsoft New Tai Lue"/>
+        <a:font script="Tfng" typeface="Ebrima"/>
+      </a:majorFont>
+      <a:minorFont>
+        <a:latin typeface="Calibri" panose="020F0502020204030204"/>
+        <a:ea typeface=""/>
+        <a:cs typeface=""/>
+        <a:font script="Jpan" typeface="游ゴシック"/>
+        <a:font script="Hang" typeface="맑은 고딕"/>
+        <a:font script="Hans" typeface="等线"/>
+        <a:font script="Hant" typeface="新細明體"/>
+        <a:font script="Arab" typeface="Arial"/>
+        <a:font script="Hebr" typeface="Arial"/>
+        <a:font script="Thai" typeface="Cordia New"/>
+        <a:font script="Ethi" typeface="Nyala"/>
+        <a:font script="Beng" typeface="Vrinda"/>
+        <a:font script="Gujr" typeface="Shruti"/>
+        <a:font script="Khmr" typeface="DaunPenh"/>
+        <a:font script="Knda" typeface="Tunga"/>
+        <a:font script="Guru" typeface="Raavi"/>
+        <a:font script="Cans" typeface="Euphemia"/>
+        <a:font script="Cher" typeface="Plantagenet Cherokee"/>
+        <a:font script="Yiii" typeface="Microsoft Yi Baiti"/>
+        <a:font script="Tibt" typeface="Microsoft Himalaya"/>
+        <a:font script="Thaa" typeface="MV Boli"/>
+        <a:font script="Deva" typeface="Mangal"/>
+        <a:font script="Telu" typeface="Gautami"/>
+        <a:font script="Taml" typeface="Latha"/>
+        <a:font script="Syrc" typeface="Estrangelo Edessa"/>
+        <a:font script="Orya" typeface="Kalinga"/>
+        <a:font script="Mlym" typeface="Kartika"/>
+        <a:font script="Laoo" typeface="DokChampa"/>
+        <a:font script="Sinh" typeface="Iskoola Pota"/>
+        <a:font script="Mong" typeface="Mongolian Baiti"/>
+        <a:font script="Viet" typeface="Arial"/>
+        <a:font script="Uigh" typeface="Microsoft Uighur"/>
+        <a:font script="Geor" typeface="Sylfaen"/>
+        <a:font script="Armn" typeface="Arial"/>
+        <a:font script="Bugi" typeface="Leelawadee UI"/>
+        <a:font script="Bopo" typeface="Microsoft JhengHei"/>
+        <a:font script="Java" typeface="Javanese Text"/>
+        <a:font script="Lisu" typeface="Segoe UI"/>
+        <a:font script="Mymr" typeface="Myanmar Text"/>
+        <a:font script="Nkoo" typeface="Ebrima"/>
+        <a:font script="Olck" typeface="Nirmala UI"/>
+        <a:font script="Osma" typeface="Ebrima"/>
+        <a:font script="Phag" typeface="Phagspa"/>
+        <a:font script="Syrn" typeface="Estrangelo Edessa"/>
+        <a:font script="Syrj" typeface="Estrangelo Edessa"/>
+        <a:font script="Syre" typeface="Estrangelo Edessa"/>
+        <a:font script="Sora" typeface="Nirmala UI"/>
+        <a:font script="Tale" typeface="Microsoft Tai Le"/>
+        <a:font script="Talu" typeface="Microsoft New Tai Lue"/>
+        <a:font script="Tfng" typeface="Ebrima"/>
+      </a:minorFont>
+    </a:fontScheme>
+    <a:fmtScheme name="Office">
+      <a:fillStyleLst>
+        <a:solidFill>
+          <a:schemeClr val="phClr"/>
+        </a:solidFill>
+        <a:gradFill rotWithShape="1">
+          <a:gsLst>
+            <a:gs pos="0">
+              <a:schemeClr val="phClr">
+                <a:lumMod val="110000"/>
+                <a:satMod val="105000"/>
+                <a:tint val="67000"/>
+              </a:schemeClr>
+            </a:gs>
+            <a:gs pos="50000">
+              <a:schemeClr val="phClr">
+                <a:lumMod val="105000"/>
+                <a:satMod val="103000"/>
+                <a:tint val="73000"/>
+              </a:schemeClr>
+            </a:gs>
+            <a:gs pos="100000">
+              <a:schemeClr val="phClr">
+                <a:lumMod val="105000"/>
+                <a:satMod val="109000"/>
+                <a:tint val="81000"/>
+              </a:schemeClr>
+            </a:gs>
+          </a:gsLst>
+          <a:lin ang="5400000" scaled="0"/>
+        </a:gradFill>
+        <a:gradFill rotWithShape="1">
+          <a:gsLst>
+            <a:gs pos="0">
+              <a:schemeClr val="phClr">
+                <a:satMod val="103000"/>
+                <a:lumMod val="102000"/>
+                <a:tint val="94000"/>
+              </a:schemeClr>
+            </a:gs>
+            <a:gs pos="50000">
+              <a:schemeClr val="phClr">
+                <a:satMod val="110000"/>
+                <a:lumMod val="100000"/>
+                <a:shade val="100000"/>
+              </a:schemeClr>
+            </a:gs>
+            <a:gs pos="100000">
+              <a:schemeClr val="phClr">
+                <a:lumMod val="99000"/>
+                <a:satMod val="120000"/>
+                <a:shade val="78000"/>
+              </a:schemeClr>
+            </a:gs>
+          </a:gsLst>
+          <a:lin ang="5400000" scaled="0"/>
+        </a:gradFill>
+      </a:fillStyleLst>
+      <a:lnStyleLst>
+        <a:ln w="6350" cap="flat" cmpd="sng" algn="ctr">
+          <a:solidFill>
+            <a:schemeClr val="phClr"/>
+          </a:solidFill>
+          <a:prstDash val="solid"/>
+          <a:miter lim="800000"/>
+        </a:ln>
+        <a:ln w="12700" cap="flat" cmpd="sng" algn="ctr">
+          <a:solidFill>
+            <a:schemeClr val="phClr"/>
+          </a:solidFill>
+          <a:prstDash val="solid"/>
+          <a:miter lim="800000"/>
+        </a:ln>
+        <a:ln w="19050" cap="flat" cmpd="sng" algn="ctr">
+          <a:solidFill>
+            <a:schemeClr val="phClr"/>
+          </a:solidFill>
+          <a:prstDash val="solid"/>
+          <a:miter lim="800000"/>
+        </a:ln>
+      </a:lnStyleLst>
+      <a:effectStyleLst>
+        <a:effectStyle>
+          <a:effectLst/>
+        </a:effectStyle>
+        <a:effectStyle>
+          <a:effectLst/>
+        </a:effectStyle>
+        <a:effectStyle>
+          <a:effectLst>
+            <a:outerShdw blurRad="57150" dist="19050" dir="5400000" algn="ctr" rotWithShape="0">
+              <a:srgbClr val="000000">
+                <a:alpha val="63000"/>
+              </a:srgbClr>
+            </a:outerShdw>
+          </a:effectLst>
+        </a:effectStyle>
+      </a:effectStyleLst>
+      <a:bgFillStyleLst>
+        <a:solidFill>
+          <a:schemeClr val="phClr"/>
+        </a:solidFill>
+        <a:solidFill>
+          <a:schemeClr val="phClr">
+            <a:tint val="95000"/>
+            <a:satMod val="170000"/>
+          </a:schemeClr>
+        </a:solidFill>
+        <a:gradFill rotWithShape="1">
+          <a:gsLst>
+            <a:gs pos="0">
+              <a:schemeClr val="phClr">
+                <a:tint val="93000"/>
+                <a:satMod val="150000"/>
+                <a:shade val="98000"/>
+                <a:lumMod val="102000"/>
+              </a:schemeClr>
+            </a:gs>
+            <a:gs pos="50000">
+              <a:schemeClr val="phClr">
+                <a:tint val="98000"/>
+                <a:satMod val="130000"/>
+                <a:shade val="90000"/>
+                <a:lumMod val="103000"/>
+              </a:schemeClr>
+            </a:gs>
+            <a:gs pos="100000">
+              <a:schemeClr val="phClr">
+                <a:shade val="63000"/>
+                <a:satMod val="120000"/>
+              </a:schemeClr>
+            </a:gs>
+          </a:gsLst>
+          <a:lin ang="5400000" scaled="0"/>
+        </a:gradFill>
+      </a:bgFillStyleLst>
+    </a:fmtScheme>
+  </a:themeElements>
+  <a:objectDefaults/>
+  <a:extraClrSchemeLst/>
+  <a:extLst>
+    <a:ext uri="{05A4C25C-085E-4340-85A3-A5531E510DB2}">
+      <thm15:themeFamily xmlns:thm15="http://schemas.microsoft.com/office/thememl/2012/main" name="Office Theme" id="{62F939B6-93AF-4DB8-9C6B-D6C7DFDC589F}" vid="{4A3C46E8-61CC-4603-A589-7422A47A8E4A}"/>
+    </a:ext>
+  </a:extLst>
+</a:theme>
 </file>